--- a/docs/slides/wk-03-2026-01-29-action.pptx
+++ b/docs/slides/wk-03-2026-01-29-action.pptx
@@ -38,6 +38,20 @@
     <p:sldId id="286" r:id="rId32"/>
     <p:sldId id="287" r:id="rId33"/>
     <p:sldId id="288" r:id="rId34"/>
+    <p:sldId id="289" r:id="rId35"/>
+    <p:sldId id="290" r:id="rId36"/>
+    <p:sldId id="291" r:id="rId37"/>
+    <p:sldId id="292" r:id="rId38"/>
+    <p:sldId id="293" r:id="rId39"/>
+    <p:sldId id="294" r:id="rId40"/>
+    <p:sldId id="295" r:id="rId41"/>
+    <p:sldId id="296" r:id="rId42"/>
+    <p:sldId id="297" r:id="rId43"/>
+    <p:sldId id="298" r:id="rId44"/>
+    <p:sldId id="299" r:id="rId45"/>
+    <p:sldId id="300" r:id="rId46"/>
+    <p:sldId id="301" r:id="rId47"/>
+    <p:sldId id="302" r:id="rId48"/>
   </p:sldIdLst>
   <p:sldSz cx="9144000" cy="5143500" type="screen16x9"/>
   <p:notesSz cx="6858000" cy="9144000"/>
@@ -153,6 +167,26 @@
     </p:ext>
   </p:extLst>
 </p:presentation>
+</file>
+
+<file path=ppt/media/image5.txt>Please set a user-agent and respect our robot policy https://w.wiki/4wJS. See also https://phabricator.wikimedia.org/T400119.
+
+</file>
+
+<file path=ppt/media/image6.txt>Please set a user-agent and respect our robot policy https://w.wiki/4wJS. See also https://phabricator.wikimedia.org/T400119.
+
+</file>
+
+<file path=ppt/media/image7.txt>Please set a user-agent and respect our robot policy https://w.wiki/4wJS. See also https://phabricator.wikimedia.org/T400119.
+
+</file>
+
+<file path=ppt/media/image8.txt>Please set a user-agent and respect our robot policy https://w.wiki/4wJS. See also https://phabricator.wikimedia.org/T400119.
+
+</file>
+
+<file path=ppt/media/image9.txt>Please set a user-agent and respect our robot policy https://w.wiki/4wJS. See also https://phabricator.wikimedia.org/T400119.
+
 </file>
 
 <file path=ppt/slideLayouts/slideLayout1.xml><?xml version="1.0" encoding="utf-8"?>
@@ -3277,7 +3311,7 @@
       </p:sp>
       <p:pic>
         <p:nvPicPr>
-          <p:cNvPr descr="wk-03-2026-01-29-action_files/figure-pptx/mermaid-figure-4.png" id="0" name="Picture 1"/>
+          <p:cNvPr descr="wk-03-2026-01-29-action_files/figure-pptx/mermaid-figure-5.png" id="0" name="Picture 1"/>
           <p:cNvPicPr>
             <a:picLocks noGrp="1" noChangeAspect="1"/>
           </p:cNvPicPr>
@@ -3381,7 +3415,7 @@
       </p:sp>
       <p:pic>
         <p:nvPicPr>
-          <p:cNvPr descr="wk-03-2026-01-29-action_files/figure-pptx/mermaid-figure-3.png" id="0" name="Picture 1"/>
+          <p:cNvPr descr="wk-03-2026-01-29-action_files/figure-pptx/mermaid-figure-4.png" id="0" name="Picture 1"/>
           <p:cNvPicPr>
             <a:picLocks noGrp="1" noChangeAspect="1"/>
           </p:cNvPicPr>
@@ -3454,7 +3488,7 @@
       </p:sp>
       <p:pic>
         <p:nvPicPr>
-          <p:cNvPr descr="wk-03-2026-01-29-action_files/figure-pptx/mermaid-figure-2.png" id="0" name="Picture 1"/>
+          <p:cNvPr descr="wk-03-2026-01-29-action_files/figure-pptx/mermaid-figure-3.png" id="0" name="Picture 1"/>
           <p:cNvPicPr>
             <a:picLocks noGrp="1" noChangeAspect="1"/>
           </p:cNvPicPr>
@@ -3627,7 +3661,7 @@
             <a:pPr lvl="1"/>
             <a:r>
               <a:rPr/>
-              <a:t>Finde a mate</a:t>
+              <a:t>Find a mate</a:t>
             </a:r>
           </a:p>
           <a:p>
@@ -4915,7 +4949,58 @@
             </a:pPr>
             <a:r>
               <a:rPr/>
-              <a:t>Eye movements</a:t>
+              <a:t>Looking</a:t>
+            </a:r>
+          </a:p>
+        </p:txBody>
+      </p:sp>
+      <p:sp>
+        <p:nvSpPr>
+          <p:cNvPr id="3" name="Content Placeholder 2"/>
+          <p:cNvSpPr>
+            <a:spLocks noGrp="1"/>
+          </p:cNvSpPr>
+          <p:nvPr>
+            <p:ph idx="1"/>
+          </p:nvPr>
+        </p:nvSpPr>
+        <p:spPr/>
+        <p:txBody>
+          <a:bodyPr/>
+          <a:lstStyle/>
+          <a:p>
+            <a:pPr lvl="0"/>
+            <a:r>
+              <a:rPr/>
+              <a:t>Behavioral goals</a:t>
+            </a:r>
+          </a:p>
+          <a:p>
+            <a:pPr lvl="1"/>
+            <a:r>
+              <a:rPr/>
+              <a:t>Direct gaze (eyes + head + body) toward goal-relevant targets</a:t>
+            </a:r>
+          </a:p>
+          <a:p>
+            <a:pPr lvl="1"/>
+            <a:r>
+              <a:rPr/>
+              <a:t>Direct gaze toward emergent targets</a:t>
+            </a:r>
+          </a:p>
+          <a:p>
+            <a:pPr lvl="1"/>
+            <a:r>
+              <a:rPr/>
+              <a:t>Track/pursue targets across observer/target motion</a:t>
+            </a:r>
+          </a:p>
+          <a:p>
+            <a:pPr lvl="1"/>
+            <a:r>
+              <a:rPr/>
+              <a:t>Maximize quality of visual information about targets</a:t>
             </a:r>
           </a:p>
         </p:txBody>
@@ -4942,27 +5027,62 @@
           <a:chExt cx="0" cy="0"/>
         </a:xfrm>
       </p:grpSpPr>
-      <p:sp>
-        <p:nvSpPr>
-          <p:cNvPr id="2" name="Title 1"/>
-          <p:cNvSpPr>
-            <a:spLocks noGrp="1"/>
-          </p:cNvSpPr>
-          <p:nvPr>
-            <p:ph type="title"/>
-          </p:nvPr>
-        </p:nvSpPr>
-        <p:spPr/>
-        <p:txBody>
-          <a:bodyPr/>
-          <a:lstStyle/>
-          <a:p>
-            <a:pPr lvl="0" indent="0" marL="0">
+      <p:pic>
+        <p:nvPicPr>
+          <p:cNvPr descr="https://upload.wikimedia.org/wikipedia/commons/thumb/1/1e/Schematic_diagram_of_the_human_eye_en.svg/960px-Schematic_diagram_of_the_human_eye_en.svg.png" id="0" name="Picture 1"/>
+          <p:cNvPicPr>
+            <a:picLocks noGrp="1" noChangeAspect="1"/>
+          </p:cNvPicPr>
+          <p:nvPr/>
+        </p:nvPicPr>
+        <p:blipFill>
+          <a:blip r:embed="rId2"/>
+          <a:stretch>
+            <a:fillRect/>
+          </a:stretch>
+        </p:blipFill>
+        <p:spPr bwMode="auto">
+          <a:xfrm>
+            <a:off x="2413000" y="1193800"/>
+            <a:ext cx="4318000" cy="2882900"/>
+          </a:xfrm>
+          <a:prstGeom prst="rect">
+            <a:avLst/>
+          </a:prstGeom>
+          <a:noFill/>
+          <a:ln w="9525">
+            <a:noFill/>
+            <a:headEnd/>
+            <a:tailEnd/>
+          </a:ln>
+        </p:spPr>
+      </p:pic>
+      <p:sp>
+        <p:nvSpPr>
+          <p:cNvPr id="1" name="TextBox 3"/>
+          <p:cNvSpPr txBox="1"/>
+          <p:nvPr/>
+        </p:nvSpPr>
+        <p:spPr>
+          <a:xfrm>
+            <a:off x="457200" y="4076700"/>
+            <a:ext cx="8229600" cy="508000"/>
+          </a:xfrm>
+          <a:prstGeom prst="rect">
+            <a:avLst/>
+          </a:prstGeom>
+          <a:noFill/>
+        </p:spPr>
+        <p:txBody>
+          <a:bodyPr/>
+          <a:lstStyle/>
+          <a:p>
+            <a:pPr lvl="0" indent="0" marL="0" algn="ctr">
               <a:buNone/>
             </a:pPr>
             <a:r>
               <a:rPr/>
-              <a:t>Reaching</a:t>
+              <a:t>By Rhcastilhos. And Jmarchn. - Schematic_diagram_of_the_human_eye_with_English_annotations.svg, CC BY-SA 3.0, https://commons.wikimedia.org/w/index.php?curid=1597930</a:t>
             </a:r>
           </a:p>
         </p:txBody>
@@ -4989,27 +5109,62 @@
           <a:chExt cx="0" cy="0"/>
         </a:xfrm>
       </p:grpSpPr>
-      <p:sp>
-        <p:nvSpPr>
-          <p:cNvPr id="2" name="Title 1"/>
-          <p:cNvSpPr>
-            <a:spLocks noGrp="1"/>
-          </p:cNvSpPr>
-          <p:nvPr>
-            <p:ph type="title"/>
-          </p:nvPr>
-        </p:nvSpPr>
-        <p:spPr/>
-        <p:txBody>
-          <a:bodyPr/>
-          <a:lstStyle/>
-          <a:p>
-            <a:pPr lvl="0" indent="0" marL="0">
+      <p:pic>
+        <p:nvPicPr>
+          <p:cNvPr descr="https://upload.wikimedia.org/wikipedia/commons/thumb/2/27/AcuityHumanEye.svg/1280px-AcuityHumanEye.svg.png" id="0" name="Picture 1"/>
+          <p:cNvPicPr>
+            <a:picLocks noGrp="1" noChangeAspect="1"/>
+          </p:cNvPicPr>
+          <p:nvPr/>
+        </p:nvPicPr>
+        <p:blipFill>
+          <a:blip r:embed="rId2"/>
+          <a:stretch>
+            <a:fillRect/>
+          </a:stretch>
+        </p:blipFill>
+        <p:spPr bwMode="auto">
+          <a:xfrm>
+            <a:off x="2413000" y="1193800"/>
+            <a:ext cx="4318000" cy="2882900"/>
+          </a:xfrm>
+          <a:prstGeom prst="rect">
+            <a:avLst/>
+          </a:prstGeom>
+          <a:noFill/>
+          <a:ln w="9525">
+            <a:noFill/>
+            <a:headEnd/>
+            <a:tailEnd/>
+          </a:ln>
+        </p:spPr>
+      </p:pic>
+      <p:sp>
+        <p:nvSpPr>
+          <p:cNvPr id="1" name="TextBox 3"/>
+          <p:cNvSpPr txBox="1"/>
+          <p:nvPr/>
+        </p:nvSpPr>
+        <p:spPr>
+          <a:xfrm>
+            <a:off x="457200" y="4076700"/>
+            <a:ext cx="8229600" cy="508000"/>
+          </a:xfrm>
+          <a:prstGeom prst="rect">
+            <a:avLst/>
+          </a:prstGeom>
+          <a:noFill/>
+        </p:spPr>
+        <p:txBody>
+          <a:bodyPr/>
+          <a:lstStyle/>
+          <a:p>
+            <a:pPr lvl="0" indent="0" marL="0" algn="ctr">
               <a:buNone/>
             </a:pPr>
             <a:r>
               <a:rPr/>
-              <a:t>Locomotion</a:t>
+              <a:t>By Vanessa Ezekowitz - Hand-drawn based on File:AcuityHumanEye.jpg by Hans-Werner Hunziker, CC BY-SA 3.0, https://commons.wikimedia.org/w/index.php?curid=7327065</a:t>
             </a:r>
           </a:p>
         </p:txBody>
@@ -5056,13 +5211,510 @@
             </a:pPr>
             <a:r>
               <a:rPr/>
-              <a:t>Speech</a:t>
+              <a:t>Eye movements</a:t>
+            </a:r>
+          </a:p>
+        </p:txBody>
+      </p:sp>
+      <p:sp>
+        <p:nvSpPr>
+          <p:cNvPr id="3" name="Content Placeholder 2"/>
+          <p:cNvSpPr>
+            <a:spLocks noGrp="1"/>
+          </p:cNvSpPr>
+          <p:nvPr>
+            <p:ph idx="1"/>
+          </p:nvPr>
+        </p:nvSpPr>
+        <p:spPr/>
+        <p:txBody>
+          <a:bodyPr/>
+          <a:lstStyle/>
+          <a:p>
+            <a:pPr lvl="0"/>
+            <a:r>
+              <a:rPr/>
+              <a:t>Voluntary</a:t>
+            </a:r>
+          </a:p>
+          <a:p>
+            <a:pPr lvl="1"/>
+            <a:r>
+              <a:rPr/>
+              <a:t>Saccades</a:t>
+            </a:r>
+          </a:p>
+          <a:p>
+            <a:pPr lvl="1"/>
+            <a:r>
+              <a:rPr/>
+              <a:t>Smooth pursuit</a:t>
+            </a:r>
+          </a:p>
+          <a:p>
+            <a:pPr lvl="1"/>
+            <a:r>
+              <a:rPr/>
+              <a:t>Vergence</a:t>
+            </a:r>
+          </a:p>
+          <a:p>
+            <a:pPr lvl="0"/>
+            <a:r>
+              <a:rPr/>
+              <a:t>Involuntary</a:t>
+            </a:r>
+          </a:p>
+          <a:p>
+            <a:pPr lvl="1"/>
+            <a:r>
+              <a:rPr/>
+              <a:t>Vestibulo-occular reflex (VOR)</a:t>
+            </a:r>
+          </a:p>
+          <a:p>
+            <a:pPr lvl="1"/>
+            <a:r>
+              <a:rPr/>
+              <a:t>Optokinetic nystagmus</a:t>
+            </a:r>
+          </a:p>
+          <a:p>
+            <a:pPr lvl="1"/>
+            <a:r>
+              <a:rPr/>
+              <a:t>Accommodation</a:t>
             </a:r>
           </a:p>
         </p:txBody>
       </p:sp>
     </p:spTree>
   </p:cSld>
+  <p:timing>
+    <p:tnLst>
+      <p:par>
+        <p:cTn id="1" dur="indefinite" restart="never" nodeType="tmRoot">
+          <p:childTnLst>
+            <p:seq concurrent="1" nextAc="seek">
+              <p:cTn id="2" dur="indefinite" nodeType="mainSeq">
+                <p:childTnLst>
+                  <p:par>
+                    <p:cTn id="3" fill="hold">
+                      <p:stCondLst>
+                        <p:cond delay="indefinite"/>
+                      </p:stCondLst>
+                      <p:childTnLst>
+                        <p:par>
+                          <p:cTn id="4" fill="hold">
+                            <p:stCondLst>
+                              <p:cond delay="0"/>
+                            </p:stCondLst>
+                            <p:childTnLst>
+                              <p:par>
+                                <p:cTn id="5" presetID="1" presetClass="entr" presetSubtype="0" fill="hold" grpId="0" nodeType="clickEffect">
+                                  <p:stCondLst>
+                                    <p:cond delay="0"/>
+                                  </p:stCondLst>
+                                  <p:childTnLst>
+                                    <p:set>
+                                      <p:cBhvr>
+                                        <p:cTn id="6" dur="1" fill="hold">
+                                          <p:stCondLst>
+                                            <p:cond delay="0"/>
+                                          </p:stCondLst>
+                                        </p:cTn>
+                                        <p:tgtEl>
+                                          <p:spTgt spid="3">
+                                            <p:txEl>
+                                              <p:pRg st="0" end="0"/>
+                                            </p:txEl>
+                                          </p:spTgt>
+                                        </p:tgtEl>
+                                        <p:attrNameLst>
+                                          <p:attrName>style.visibility</p:attrName>
+                                        </p:attrNameLst>
+                                      </p:cBhvr>
+                                      <p:to>
+                                        <p:strVal val="visible"/>
+                                      </p:to>
+                                    </p:set>
+                                  </p:childTnLst>
+                                </p:cTn>
+                              </p:par>
+                            </p:childTnLst>
+                          </p:cTn>
+                        </p:par>
+                      </p:childTnLst>
+                    </p:cTn>
+                  </p:par>
+                  <p:par>
+                    <p:cTn id="7" fill="hold">
+                      <p:stCondLst>
+                        <p:cond delay="indefinite"/>
+                      </p:stCondLst>
+                      <p:childTnLst>
+                        <p:par>
+                          <p:cTn id="8" fill="hold">
+                            <p:stCondLst>
+                              <p:cond delay="0"/>
+                            </p:stCondLst>
+                            <p:childTnLst>
+                              <p:par>
+                                <p:cTn id="9" presetID="1" presetClass="entr" presetSubtype="0" fill="hold" grpId="0" nodeType="clickEffect">
+                                  <p:stCondLst>
+                                    <p:cond delay="0"/>
+                                  </p:stCondLst>
+                                  <p:childTnLst>
+                                    <p:set>
+                                      <p:cBhvr>
+                                        <p:cTn id="10" dur="1" fill="hold">
+                                          <p:stCondLst>
+                                            <p:cond delay="0"/>
+                                          </p:stCondLst>
+                                        </p:cTn>
+                                        <p:tgtEl>
+                                          <p:spTgt spid="3">
+                                            <p:txEl>
+                                              <p:pRg st="1" end="1"/>
+                                            </p:txEl>
+                                          </p:spTgt>
+                                        </p:tgtEl>
+                                        <p:attrNameLst>
+                                          <p:attrName>style.visibility</p:attrName>
+                                        </p:attrNameLst>
+                                      </p:cBhvr>
+                                      <p:to>
+                                        <p:strVal val="visible"/>
+                                      </p:to>
+                                    </p:set>
+                                  </p:childTnLst>
+                                </p:cTn>
+                              </p:par>
+                            </p:childTnLst>
+                          </p:cTn>
+                        </p:par>
+                      </p:childTnLst>
+                    </p:cTn>
+                  </p:par>
+                  <p:par>
+                    <p:cTn id="11" fill="hold">
+                      <p:stCondLst>
+                        <p:cond delay="indefinite"/>
+                      </p:stCondLst>
+                      <p:childTnLst>
+                        <p:par>
+                          <p:cTn id="12" fill="hold">
+                            <p:stCondLst>
+                              <p:cond delay="0"/>
+                            </p:stCondLst>
+                            <p:childTnLst>
+                              <p:par>
+                                <p:cTn id="13" presetID="1" presetClass="entr" presetSubtype="0" fill="hold" grpId="0" nodeType="clickEffect">
+                                  <p:stCondLst>
+                                    <p:cond delay="0"/>
+                                  </p:stCondLst>
+                                  <p:childTnLst>
+                                    <p:set>
+                                      <p:cBhvr>
+                                        <p:cTn id="14" dur="1" fill="hold">
+                                          <p:stCondLst>
+                                            <p:cond delay="0"/>
+                                          </p:stCondLst>
+                                        </p:cTn>
+                                        <p:tgtEl>
+                                          <p:spTgt spid="3">
+                                            <p:txEl>
+                                              <p:pRg st="2" end="2"/>
+                                            </p:txEl>
+                                          </p:spTgt>
+                                        </p:tgtEl>
+                                        <p:attrNameLst>
+                                          <p:attrName>style.visibility</p:attrName>
+                                        </p:attrNameLst>
+                                      </p:cBhvr>
+                                      <p:to>
+                                        <p:strVal val="visible"/>
+                                      </p:to>
+                                    </p:set>
+                                  </p:childTnLst>
+                                </p:cTn>
+                              </p:par>
+                            </p:childTnLst>
+                          </p:cTn>
+                        </p:par>
+                      </p:childTnLst>
+                    </p:cTn>
+                  </p:par>
+                  <p:par>
+                    <p:cTn id="15" fill="hold">
+                      <p:stCondLst>
+                        <p:cond delay="indefinite"/>
+                      </p:stCondLst>
+                      <p:childTnLst>
+                        <p:par>
+                          <p:cTn id="16" fill="hold">
+                            <p:stCondLst>
+                              <p:cond delay="0"/>
+                            </p:stCondLst>
+                            <p:childTnLst>
+                              <p:par>
+                                <p:cTn id="17" presetID="1" presetClass="entr" presetSubtype="0" fill="hold" grpId="0" nodeType="clickEffect">
+                                  <p:stCondLst>
+                                    <p:cond delay="0"/>
+                                  </p:stCondLst>
+                                  <p:childTnLst>
+                                    <p:set>
+                                      <p:cBhvr>
+                                        <p:cTn id="18" dur="1" fill="hold">
+                                          <p:stCondLst>
+                                            <p:cond delay="0"/>
+                                          </p:stCondLst>
+                                        </p:cTn>
+                                        <p:tgtEl>
+                                          <p:spTgt spid="3">
+                                            <p:txEl>
+                                              <p:pRg st="3" end="3"/>
+                                            </p:txEl>
+                                          </p:spTgt>
+                                        </p:tgtEl>
+                                        <p:attrNameLst>
+                                          <p:attrName>style.visibility</p:attrName>
+                                        </p:attrNameLst>
+                                      </p:cBhvr>
+                                      <p:to>
+                                        <p:strVal val="visible"/>
+                                      </p:to>
+                                    </p:set>
+                                  </p:childTnLst>
+                                </p:cTn>
+                              </p:par>
+                            </p:childTnLst>
+                          </p:cTn>
+                        </p:par>
+                      </p:childTnLst>
+                    </p:cTn>
+                  </p:par>
+                  <p:par>
+                    <p:cTn id="19" fill="hold">
+                      <p:stCondLst>
+                        <p:cond delay="indefinite"/>
+                      </p:stCondLst>
+                      <p:childTnLst>
+                        <p:par>
+                          <p:cTn id="20" fill="hold">
+                            <p:stCondLst>
+                              <p:cond delay="0"/>
+                            </p:stCondLst>
+                            <p:childTnLst>
+                              <p:par>
+                                <p:cTn id="21" presetID="1" presetClass="entr" presetSubtype="0" fill="hold" grpId="0" nodeType="clickEffect">
+                                  <p:stCondLst>
+                                    <p:cond delay="0"/>
+                                  </p:stCondLst>
+                                  <p:childTnLst>
+                                    <p:set>
+                                      <p:cBhvr>
+                                        <p:cTn id="22" dur="1" fill="hold">
+                                          <p:stCondLst>
+                                            <p:cond delay="0"/>
+                                          </p:stCondLst>
+                                        </p:cTn>
+                                        <p:tgtEl>
+                                          <p:spTgt spid="3">
+                                            <p:txEl>
+                                              <p:pRg st="4" end="4"/>
+                                            </p:txEl>
+                                          </p:spTgt>
+                                        </p:tgtEl>
+                                        <p:attrNameLst>
+                                          <p:attrName>style.visibility</p:attrName>
+                                        </p:attrNameLst>
+                                      </p:cBhvr>
+                                      <p:to>
+                                        <p:strVal val="visible"/>
+                                      </p:to>
+                                    </p:set>
+                                  </p:childTnLst>
+                                </p:cTn>
+                              </p:par>
+                            </p:childTnLst>
+                          </p:cTn>
+                        </p:par>
+                      </p:childTnLst>
+                    </p:cTn>
+                  </p:par>
+                  <p:par>
+                    <p:cTn id="23" fill="hold">
+                      <p:stCondLst>
+                        <p:cond delay="indefinite"/>
+                      </p:stCondLst>
+                      <p:childTnLst>
+                        <p:par>
+                          <p:cTn id="24" fill="hold">
+                            <p:stCondLst>
+                              <p:cond delay="0"/>
+                            </p:stCondLst>
+                            <p:childTnLst>
+                              <p:par>
+                                <p:cTn id="25" presetID="1" presetClass="entr" presetSubtype="0" fill="hold" grpId="0" nodeType="clickEffect">
+                                  <p:stCondLst>
+                                    <p:cond delay="0"/>
+                                  </p:stCondLst>
+                                  <p:childTnLst>
+                                    <p:set>
+                                      <p:cBhvr>
+                                        <p:cTn id="26" dur="1" fill="hold">
+                                          <p:stCondLst>
+                                            <p:cond delay="0"/>
+                                          </p:stCondLst>
+                                        </p:cTn>
+                                        <p:tgtEl>
+                                          <p:spTgt spid="3">
+                                            <p:txEl>
+                                              <p:pRg st="5" end="5"/>
+                                            </p:txEl>
+                                          </p:spTgt>
+                                        </p:tgtEl>
+                                        <p:attrNameLst>
+                                          <p:attrName>style.visibility</p:attrName>
+                                        </p:attrNameLst>
+                                      </p:cBhvr>
+                                      <p:to>
+                                        <p:strVal val="visible"/>
+                                      </p:to>
+                                    </p:set>
+                                  </p:childTnLst>
+                                </p:cTn>
+                              </p:par>
+                            </p:childTnLst>
+                          </p:cTn>
+                        </p:par>
+                      </p:childTnLst>
+                    </p:cTn>
+                  </p:par>
+                  <p:par>
+                    <p:cTn id="27" fill="hold">
+                      <p:stCondLst>
+                        <p:cond delay="indefinite"/>
+                      </p:stCondLst>
+                      <p:childTnLst>
+                        <p:par>
+                          <p:cTn id="28" fill="hold">
+                            <p:stCondLst>
+                              <p:cond delay="0"/>
+                            </p:stCondLst>
+                            <p:childTnLst>
+                              <p:par>
+                                <p:cTn id="29" presetID="1" presetClass="entr" presetSubtype="0" fill="hold" grpId="0" nodeType="clickEffect">
+                                  <p:stCondLst>
+                                    <p:cond delay="0"/>
+                                  </p:stCondLst>
+                                  <p:childTnLst>
+                                    <p:set>
+                                      <p:cBhvr>
+                                        <p:cTn id="30" dur="1" fill="hold">
+                                          <p:stCondLst>
+                                            <p:cond delay="0"/>
+                                          </p:stCondLst>
+                                        </p:cTn>
+                                        <p:tgtEl>
+                                          <p:spTgt spid="3">
+                                            <p:txEl>
+                                              <p:pRg st="6" end="6"/>
+                                            </p:txEl>
+                                          </p:spTgt>
+                                        </p:tgtEl>
+                                        <p:attrNameLst>
+                                          <p:attrName>style.visibility</p:attrName>
+                                        </p:attrNameLst>
+                                      </p:cBhvr>
+                                      <p:to>
+                                        <p:strVal val="visible"/>
+                                      </p:to>
+                                    </p:set>
+                                  </p:childTnLst>
+                                </p:cTn>
+                              </p:par>
+                            </p:childTnLst>
+                          </p:cTn>
+                        </p:par>
+                      </p:childTnLst>
+                    </p:cTn>
+                  </p:par>
+                  <p:par>
+                    <p:cTn id="31" fill="hold">
+                      <p:stCondLst>
+                        <p:cond delay="indefinite"/>
+                      </p:stCondLst>
+                      <p:childTnLst>
+                        <p:par>
+                          <p:cTn id="32" fill="hold">
+                            <p:stCondLst>
+                              <p:cond delay="0"/>
+                            </p:stCondLst>
+                            <p:childTnLst>
+                              <p:par>
+                                <p:cTn id="33" presetID="1" presetClass="entr" presetSubtype="0" fill="hold" grpId="0" nodeType="clickEffect">
+                                  <p:stCondLst>
+                                    <p:cond delay="0"/>
+                                  </p:stCondLst>
+                                  <p:childTnLst>
+                                    <p:set>
+                                      <p:cBhvr>
+                                        <p:cTn id="34" dur="1" fill="hold">
+                                          <p:stCondLst>
+                                            <p:cond delay="0"/>
+                                          </p:stCondLst>
+                                        </p:cTn>
+                                        <p:tgtEl>
+                                          <p:spTgt spid="3">
+                                            <p:txEl>
+                                              <p:pRg st="7" end="7"/>
+                                            </p:txEl>
+                                          </p:spTgt>
+                                        </p:tgtEl>
+                                        <p:attrNameLst>
+                                          <p:attrName>style.visibility</p:attrName>
+                                        </p:attrNameLst>
+                                      </p:cBhvr>
+                                      <p:to>
+                                        <p:strVal val="visible"/>
+                                      </p:to>
+                                    </p:set>
+                                  </p:childTnLst>
+                                </p:cTn>
+                              </p:par>
+                            </p:childTnLst>
+                          </p:cTn>
+                        </p:par>
+                      </p:childTnLst>
+                    </p:cTn>
+                  </p:par>
+                </p:childTnLst>
+              </p:cTn>
+              <p:prevCondLst>
+                <p:cond evt="onPrev" delay="0">
+                  <p:tgtEl>
+                    <p:sldTgt/>
+                  </p:tgtEl>
+                </p:cond>
+              </p:prevCondLst>
+              <p:nextCondLst>
+                <p:cond evt="onNext" delay="0">
+                  <p:tgtEl>
+                    <p:sldTgt/>
+                  </p:tgtEl>
+                </p:cond>
+              </p:nextCondLst>
+            </p:seq>
+          </p:childTnLst>
+        </p:cTn>
+      </p:par>
+    </p:tnLst>
+    <p:bldLst>
+      <p:bldP spid="3" grpId="0" uiExpand="1" build="p"/>
+    </p:bldLst>
+  </p:timing>
 </p:sld>
 </file>
 
@@ -5093,12 +5745,7 @@
             <p:ph type="title"/>
           </p:nvPr>
         </p:nvSpPr>
-        <p:spPr>
-          <a:xfrm>
-            <a:off x="722313" y="3305176"/>
-            <a:ext cx="7772400" cy="1021556"/>
-          </a:xfrm>
-        </p:spPr>
+        <p:spPr/>
         <p:txBody>
           <a:bodyPr/>
           <a:lstStyle/>
@@ -5108,7 +5755,96 @@
             </a:pPr>
             <a:r>
               <a:rPr/>
-              <a:t>Wrap-up</a:t>
+              <a:t>Saccades</a:t>
+            </a:r>
+          </a:p>
+        </p:txBody>
+      </p:sp>
+      <mc:AlternateContent xmlns:mc="http://schemas.openxmlformats.org/markup-compatibility/2006">
+        <mc:Choice xmlns:a14="http://schemas.microsoft.com/office/drawing/2010/main" Requires="a14">
+          <p:sp>
+            <p:nvSpPr>
+              <p:cNvPr id="3" name="Content Placeholder 2"/>
+              <p:cNvSpPr>
+                <a:spLocks noGrp="1"/>
+              </p:cNvSpPr>
+              <p:nvPr>
+                <p:ph idx="1" sz="half"/>
+              </p:nvPr>
+            </p:nvSpPr>
+            <p:spPr/>
+            <p:txBody>
+              <a:bodyPr/>
+              <a:lstStyle/>
+              <a:p>
+                <a:pPr lvl="0"/>
+                <a:r>
+                  <a:rPr/>
+                  <a:t>Rapid, ballistic (no online feedback)</a:t>
+                </a:r>
+              </a:p>
+              <a:p>
+                <a:pPr lvl="0"/>
+                <a:r>
+                  <a:rPr/>
+                  <a:t>~2-3/s</a:t>
+                </a:r>
+              </a:p>
+              <a:p>
+                <a:pPr lvl="0"/>
+                <a:r>
+                  <a:rPr/>
+                  <a:t>~200 ms to initiate</a:t>
+                </a:r>
+              </a:p>
+              <a:p>
+                <a:pPr lvl="0"/>
+                <a:r>
+                  <a:rPr/>
+                  <a:t>Amplitudes &gt;20 deg </a:t>
+                </a:r>
+                <a14:m>
+                  <m:oMath xmlns:m="http://schemas.openxmlformats.org/officeDocument/2006/math">
+                    <m:r>
+                      <m:rPr>
+                        <m:sty m:val="p"/>
+                      </m:rPr>
+                      <m:t>→</m:t>
+                    </m:r>
+                  </m:oMath>
+                </a14:m>
+                <a:r>
+                  <a:rPr/>
+                  <a:t> saccade + head movement</a:t>
+                </a:r>
+              </a:p>
+            </p:txBody>
+          </p:sp>
+        </mc:Choice>
+      </mc:AlternateContent>
+      <p:sp>
+        <p:nvSpPr>
+          <p:cNvPr id="4" name="Content Placeholder 3"/>
+          <p:cNvSpPr>
+            <a:spLocks noGrp="1"/>
+          </p:cNvSpPr>
+          <p:nvPr>
+            <p:ph idx="2" sz="half"/>
+          </p:nvPr>
+        </p:nvSpPr>
+        <p:spPr/>
+        <p:txBody>
+          <a:bodyPr/>
+          <a:lstStyle/>
+          <a:p>
+            <a:pPr lvl="0" indent="0" marL="0">
+              <a:buNone/>
+            </a:pPr>
+            <a:r>
+              <a:rPr>
+                <a:hlinkClick r:id="rId2"/>
+              </a:rPr>
+              <a:t>https://upload.wikimedia.org/wikipedia/commons/e/e9/This_shows_a_recording_of_the_eye_movements_of_a_participant_looking_freely_at_a_picture.webm</a:t>
             </a:r>
           </a:p>
         </p:txBody>
@@ -5137,12 +5873,12 @@
       </p:grpSpPr>
       <p:sp>
         <p:nvSpPr>
-          <p:cNvPr id="2" name="Title 1"/>
-          <p:cNvSpPr>
-            <a:spLocks noGrp="1"/>
-          </p:cNvSpPr>
-          <p:nvPr>
-            <p:ph type="title"/>
+          <p:cNvPr id="3" name="Content Placeholder 2"/>
+          <p:cNvSpPr>
+            <a:spLocks noGrp="1"/>
+          </p:cNvSpPr>
+          <p:nvPr>
+            <p:ph idx="1"/>
           </p:nvPr>
         </p:nvSpPr>
         <p:spPr/>
@@ -5155,7 +5891,7 @@
             </a:pPr>
             <a:r>
               <a:rPr/>
-              <a:t>Main points</a:t>
+              <a:t>– Wikipedia contributors (2025)</a:t>
             </a:r>
           </a:p>
         </p:txBody>
@@ -5285,7 +6021,7 @@
             </a:pPr>
             <a:r>
               <a:rPr/>
-              <a:t>Next time</a:t>
+              <a:t>Vergence</a:t>
             </a:r>
           </a:p>
         </p:txBody>
@@ -5297,7 +6033,7 @@
             <a:spLocks noGrp="1"/>
           </p:cNvSpPr>
           <p:nvPr>
-            <p:ph idx="1"/>
+            <p:ph idx="1" sz="half"/>
           </p:nvPr>
         </p:nvSpPr>
         <p:spPr/>
@@ -5308,7 +6044,74 @@
             <a:pPr lvl="0"/>
             <a:r>
               <a:rPr/>
-              <a:t>Perception</a:t>
+              <a:t>Eyes move disjointly</a:t>
+            </a:r>
+          </a:p>
+          <a:p>
+            <a:pPr lvl="0"/>
+            <a:r>
+              <a:rPr/>
+              <a:t>Fixate on comparable locations</a:t>
+            </a:r>
+          </a:p>
+        </p:txBody>
+      </p:sp>
+      <p:pic>
+        <p:nvPicPr>
+          <p:cNvPr descr="https://upload.wikimedia.org/wikipedia/commons/0/0e/Stereogram_Tut_Eye_Convergence.png" id="0" name="Picture 1"/>
+          <p:cNvPicPr>
+            <a:picLocks noGrp="1" noChangeAspect="1"/>
+          </p:cNvPicPr>
+          <p:nvPr/>
+        </p:nvPicPr>
+        <p:blipFill>
+          <a:blip r:embed="rId2"/>
+          <a:stretch>
+            <a:fillRect/>
+          </a:stretch>
+        </p:blipFill>
+        <p:spPr bwMode="auto">
+          <a:xfrm>
+            <a:off x="4648200" y="1295400"/>
+            <a:ext cx="4038600" cy="2692400"/>
+          </a:xfrm>
+          <a:prstGeom prst="rect">
+            <a:avLst/>
+          </a:prstGeom>
+          <a:noFill/>
+          <a:ln w="9525">
+            <a:noFill/>
+            <a:headEnd/>
+            <a:tailEnd/>
+          </a:ln>
+        </p:spPr>
+      </p:pic>
+      <p:sp>
+        <p:nvSpPr>
+          <p:cNvPr id="1" name="TextBox 3"/>
+          <p:cNvSpPr txBox="1"/>
+          <p:nvPr/>
+        </p:nvSpPr>
+        <p:spPr>
+          <a:xfrm>
+            <a:off x="4648200" y="4076700"/>
+            <a:ext cx="4038600" cy="508000"/>
+          </a:xfrm>
+          <a:prstGeom prst="rect">
+            <a:avLst/>
+          </a:prstGeom>
+          <a:noFill/>
+        </p:spPr>
+        <p:txBody>
+          <a:bodyPr/>
+          <a:lstStyle/>
+          <a:p>
+            <a:pPr lvl="0" indent="0" marL="0" algn="ctr">
+              <a:buNone/>
+            </a:pPr>
+            <a:r>
+              <a:rPr/>
+              <a:t>CC BY-SA 3.0, https://commons.wikimedia.org/w/index.php?curid=74230</a:t>
             </a:r>
           </a:p>
         </p:txBody>
@@ -5345,22 +6148,114 @@
             <p:ph type="title"/>
           </p:nvPr>
         </p:nvSpPr>
+        <p:spPr/>
+        <p:txBody>
+          <a:bodyPr/>
+          <a:lstStyle/>
+          <a:p>
+            <a:pPr lvl="0" indent="0" marL="0">
+              <a:buNone/>
+            </a:pPr>
+            <a:r>
+              <a:rPr/>
+              <a:t>Vestibulo-occular reflex (VOR)</a:t>
+            </a:r>
+          </a:p>
+        </p:txBody>
+      </p:sp>
+      <p:sp>
+        <p:nvSpPr>
+          <p:cNvPr id="3" name="Content Placeholder 2"/>
+          <p:cNvSpPr>
+            <a:spLocks noGrp="1"/>
+          </p:cNvSpPr>
+          <p:nvPr>
+            <p:ph idx="1" sz="half"/>
+          </p:nvPr>
+        </p:nvSpPr>
+        <p:spPr/>
+        <p:txBody>
+          <a:bodyPr/>
+          <a:lstStyle/>
+          <a:p>
+            <a:pPr lvl="0"/>
+            <a:r>
+              <a:rPr/>
+              <a:t>Steady eyes when head moves</a:t>
+            </a:r>
+          </a:p>
+          <a:p>
+            <a:pPr lvl="0"/>
+            <a:r>
+              <a:rPr/>
+              <a:t>Fast: response &lt; 10 ms</a:t>
+            </a:r>
+          </a:p>
+          <a:p>
+            <a:pPr lvl="0"/>
+            <a:r>
+              <a:rPr/>
+              <a:t>Disturbed in vertigo</a:t>
+            </a:r>
+          </a:p>
+        </p:txBody>
+      </p:sp>
+      <p:pic>
+        <p:nvPicPr>
+          <p:cNvPr descr="https://upload.wikimedia.org/wikipedia/commons/thumb/8/84/Vestibulo-ocular_reflex_EN.svg/1280px-Vestibulo-ocular_reflex_EN.svg.png" id="0" name="Picture 1"/>
+          <p:cNvPicPr>
+            <a:picLocks noGrp="1" noChangeAspect="1"/>
+          </p:cNvPicPr>
+          <p:nvPr/>
+        </p:nvPicPr>
+        <p:blipFill>
+          <a:blip r:embed="rId2"/>
+          <a:stretch>
+            <a:fillRect/>
+          </a:stretch>
+        </p:blipFill>
+        <p:spPr bwMode="auto">
+          <a:xfrm>
+            <a:off x="4648200" y="1295400"/>
+            <a:ext cx="4038600" cy="2692400"/>
+          </a:xfrm>
+          <a:prstGeom prst="rect">
+            <a:avLst/>
+          </a:prstGeom>
+          <a:noFill/>
+          <a:ln w="9525">
+            <a:noFill/>
+            <a:headEnd/>
+            <a:tailEnd/>
+          </a:ln>
+        </p:spPr>
+      </p:pic>
+      <p:sp>
+        <p:nvSpPr>
+          <p:cNvPr id="1" name="TextBox 3"/>
+          <p:cNvSpPr txBox="1"/>
+          <p:nvPr/>
+        </p:nvSpPr>
         <p:spPr>
           <a:xfrm>
-            <a:off x="722313" y="3305176"/>
-            <a:ext cx="7772400" cy="1021556"/>
+            <a:off x="4648200" y="4076700"/>
+            <a:ext cx="4038600" cy="508000"/>
           </a:xfrm>
+          <a:prstGeom prst="rect">
+            <a:avLst/>
+          </a:prstGeom>
+          <a:noFill/>
         </p:spPr>
         <p:txBody>
           <a:bodyPr/>
           <a:lstStyle/>
           <a:p>
-            <a:pPr lvl="0" indent="0" marL="0">
+            <a:pPr lvl="0" indent="0" marL="0" algn="ctr">
               <a:buNone/>
             </a:pPr>
             <a:r>
               <a:rPr/>
-              <a:t>Resources</a:t>
+              <a:t>By .Koen - Own work based on: Simple vestibulo-ocular reflex.PNG and Image:ThreeNeuronArc.png, CC BY-SA 4.0, https://commons.wikimedia.org/w/index.php?curid=4130081</a:t>
             </a:r>
           </a:p>
         </p:txBody>
@@ -5407,7 +6302,7 @@
             </a:pPr>
             <a:r>
               <a:rPr/>
-              <a:t>About</a:t>
+              <a:t>Optokinetic nystagmus (OKN)</a:t>
             </a:r>
           </a:p>
         </p:txBody>
@@ -5427,32 +6322,52 @@
           <a:bodyPr/>
           <a:lstStyle/>
           <a:p>
+            <a:pPr lvl="0"/>
+            <a:r>
+              <a:rPr/>
+              <a:t>Also called optokinetic response</a:t>
+            </a:r>
+          </a:p>
+          <a:p>
+            <a:pPr lvl="0"/>
+            <a:r>
+              <a:rPr/>
+              <a:t>Fast tracking of whole field visual motion, then reset</a:t>
+            </a:r>
+          </a:p>
+          <a:p>
             <a:pPr lvl="0" indent="0" marL="0">
               <a:buNone/>
             </a:pPr>
-            <a:r>
-              <a:rPr/>
-              <a:t>This talk was produced using </a:t>
-            </a:r>
             <a:r>
               <a:rPr>
                 <a:hlinkClick r:id="rId2"/>
               </a:rPr>
-              <a:t>Quarto</a:t>
-            </a:r>
-            <a:r>
-              <a:rPr/>
-              <a:t>, using the </a:t>
+              <a:t>https://www.youtube.com/watch?v=CG5n516PCXM</a:t>
+            </a:r>
+          </a:p>
+          <a:p>
+            <a:pPr lvl="0" indent="0" marL="0">
+              <a:buNone/>
+            </a:pPr>
+            <a:r>
+              <a:rPr/>
+              <a:t>– Stanton (2015)</a:t>
+            </a:r>
+          </a:p>
+          <a:p>
+            <a:pPr lvl="0" indent="0" marL="0">
+              <a:buNone/>
+            </a:pPr>
+            <a:r>
+              <a:rPr/>
+              <a:t>By Student BSMU, CC BY-SA 3.0, </a:t>
             </a:r>
             <a:r>
               <a:rPr>
                 <a:hlinkClick r:id="rId3"/>
               </a:rPr>
-              <a:t>RStudio</a:t>
-            </a:r>
-            <a:r>
-              <a:rPr/>
-              <a:t> Integrated Development Environment (IDE), version 2026.1.0.392.</a:t>
+              <a:t>https://commons.wikimedia.org/w/index.php?curid=3004633</a:t>
             </a:r>
           </a:p>
           <a:p>
@@ -5461,33 +6376,13 @@
             </a:pPr>
             <a:r>
               <a:rPr/>
-              <a:t>The source files are in R and R Markdown, then rendered to HTML using the </a:t>
+              <a:t>By Student BSMU, CC BY-SA 3.0, </a:t>
             </a:r>
             <a:r>
               <a:rPr>
                 <a:hlinkClick r:id="rId4"/>
               </a:rPr>
-              <a:t>revealJS</a:t>
-            </a:r>
-            <a:r>
-              <a:rPr/>
-              <a:t> framework. The HTML slides are hosted in a </a:t>
-            </a:r>
-            <a:r>
-              <a:rPr>
-                <a:hlinkClick r:id="rId5"/>
-              </a:rPr>
-              <a:t>GitHub repo</a:t>
-            </a:r>
-            <a:r>
-              <a:rPr/>
-              <a:t> and served by GitHub pages: </a:t>
-            </a:r>
-            <a:r>
-              <a:rPr>
-                <a:hlinkClick r:id="rId6"/>
-              </a:rPr>
-              <a:t>https://psu-psychology.github.io/psy-511-scan-fdns-2026-spring/</a:t>
+              <a:t>https://commons.wikimedia.org/w/index.php?curid=3004633</a:t>
             </a:r>
           </a:p>
         </p:txBody>
@@ -5534,22 +6429,578 @@
             </a:pPr>
             <a:r>
               <a:rPr/>
-              <a:t>References</a:t>
-            </a:r>
-          </a:p>
-        </p:txBody>
-      </p:sp>
-      <p:sp>
-        <p:nvSpPr>
-          <p:cNvPr id="3" name="Content Placeholder 2"/>
-          <p:cNvSpPr>
-            <a:spLocks noGrp="1"/>
-          </p:cNvSpPr>
+              <a:t>Pupil constriction/dilation</a:t>
+            </a:r>
+          </a:p>
+        </p:txBody>
+      </p:sp>
+      <mc:AlternateContent xmlns:mc="http://schemas.openxmlformats.org/markup-compatibility/2006">
+        <mc:Choice xmlns:a14="http://schemas.microsoft.com/office/drawing/2010/main" Requires="a14">
+          <p:sp>
+            <p:nvSpPr>
+              <p:cNvPr id="3" name="Content Placeholder 2"/>
+              <p:cNvSpPr>
+                <a:spLocks noGrp="1"/>
+              </p:cNvSpPr>
+              <p:nvPr>
+                <p:ph idx="1" sz="half"/>
+              </p:nvPr>
+            </p:nvSpPr>
+            <p:spPr/>
+            <p:txBody>
+              <a:bodyPr/>
+              <a:lstStyle/>
+              <a:p>
+                <a:pPr lvl="0"/>
+                <a:r>
+                  <a:rPr/>
+                  <a:t>Bright light </a:t>
+                </a:r>
+                <a14:m>
+                  <m:oMath xmlns:m="http://schemas.openxmlformats.org/officeDocument/2006/math">
+                    <m:r>
+                      <m:rPr>
+                        <m:sty m:val="p"/>
+                      </m:rPr>
+                      <m:t>→</m:t>
+                    </m:r>
+                  </m:oMath>
+                </a14:m>
+                <a:r>
+                  <a:rPr/>
+                  <a:t> constriction</a:t>
+                </a:r>
+              </a:p>
+              <a:p>
+                <a:pPr lvl="1"/>
+                <a:r>
+                  <a:rPr/>
+                  <a:t>Also by parasympathetic activation</a:t>
+                </a:r>
+              </a:p>
+              <a:p>
+                <a:pPr lvl="0"/>
+                <a:r>
+                  <a:rPr/>
+                  <a:t>Dim light </a:t>
+                </a:r>
+                <a14:m>
+                  <m:oMath xmlns:m="http://schemas.openxmlformats.org/officeDocument/2006/math">
+                    <m:r>
+                      <m:rPr>
+                        <m:sty m:val="p"/>
+                      </m:rPr>
+                      <m:t>→</m:t>
+                    </m:r>
+                  </m:oMath>
+                </a14:m>
+                <a:r>
+                  <a:rPr/>
+                  <a:t> dilation</a:t>
+                </a:r>
+              </a:p>
+              <a:p>
+                <a:pPr lvl="1"/>
+                <a:r>
+                  <a:rPr/>
+                  <a:t>Also by sympathetic activation</a:t>
+                </a:r>
+              </a:p>
+            </p:txBody>
+          </p:sp>
+        </mc:Choice>
+      </mc:AlternateContent>
+      <p:pic>
+        <p:nvPicPr>
+          <p:cNvPr descr="https://upload.wikimedia.org/wikipedia/commons/a/a3/Eye_dilate.gif" id="0" name="Picture 1"/>
+          <p:cNvPicPr>
+            <a:picLocks noGrp="1" noChangeAspect="1"/>
+          </p:cNvPicPr>
+          <p:nvPr/>
+        </p:nvPicPr>
+        <p:blipFill>
+          <a:blip r:embed="rId2"/>
+          <a:stretch>
+            <a:fillRect/>
+          </a:stretch>
+        </p:blipFill>
+        <p:spPr bwMode="auto">
+          <a:xfrm>
+            <a:off x="4648200" y="1295400"/>
+            <a:ext cx="4038600" cy="2692400"/>
+          </a:xfrm>
+          <a:prstGeom prst="rect">
+            <a:avLst/>
+          </a:prstGeom>
+          <a:noFill/>
+          <a:ln w="9525">
+            <a:noFill/>
+            <a:headEnd/>
+            <a:tailEnd/>
+          </a:ln>
+        </p:spPr>
+      </p:pic>
+      <p:sp>
+        <p:nvSpPr>
+          <p:cNvPr id="1" name="TextBox 3"/>
+          <p:cNvSpPr txBox="1"/>
+          <p:nvPr/>
+        </p:nvSpPr>
+        <p:spPr>
+          <a:xfrm>
+            <a:off x="4648200" y="4076700"/>
+            <a:ext cx="4038600" cy="508000"/>
+          </a:xfrm>
+          <a:prstGeom prst="rect">
+            <a:avLst/>
+          </a:prstGeom>
+          <a:noFill/>
+        </p:spPr>
+        <p:txBody>
+          <a:bodyPr/>
+          <a:lstStyle/>
+          <a:p>
+            <a:pPr lvl="0" indent="0" marL="0" algn="ctr">
+              <a:buNone/>
+            </a:pPr>
+            <a:r>
+              <a:rPr/>
+              <a:t>By Greyson Orlando - Own work, Public Domain, https://commons.wikimedia.org/w/index.php?curid=1451923</a:t>
+            </a:r>
+          </a:p>
+        </p:txBody>
+      </p:sp>
+    </p:spTree>
+  </p:cSld>
+</p:sld>
+</file>
+
+<file path=ppt/slides/slide34.xml><?xml version="1.0" encoding="utf-8"?>
+<p:sld xmlns:a="http://schemas.openxmlformats.org/drawingml/2006/main" xmlns:r="http://schemas.openxmlformats.org/officeDocument/2006/relationships" xmlns:p="http://schemas.openxmlformats.org/presentationml/2006/main">
+  <p:cSld>
+    <p:spTree>
+      <p:nvGrpSpPr>
+        <p:cNvPr id="1" name=""/>
+        <p:cNvGrpSpPr/>
+        <p:nvPr/>
+      </p:nvGrpSpPr>
+      <p:grpSpPr>
+        <a:xfrm>
+          <a:off x="0" y="0"/>
+          <a:ext cx="0" cy="0"/>
+          <a:chOff x="0" y="0"/>
+          <a:chExt cx="0" cy="0"/>
+        </a:xfrm>
+      </p:grpSpPr>
+      <p:sp>
+        <p:nvSpPr>
+          <p:cNvPr id="2" name="Title 1"/>
+          <p:cNvSpPr>
+            <a:spLocks noGrp="1"/>
+          </p:cNvSpPr>
+          <p:nvPr>
+            <p:ph type="title"/>
+          </p:nvPr>
+        </p:nvSpPr>
+        <p:spPr/>
+        <p:txBody>
+          <a:bodyPr/>
+          <a:lstStyle/>
+          <a:p>
+            <a:pPr lvl="0" indent="0" marL="0">
+              <a:buNone/>
+            </a:pPr>
+            <a:r>
+              <a:rPr/>
+              <a:t>Eye muscles</a:t>
+            </a:r>
+          </a:p>
+        </p:txBody>
+      </p:sp>
+      <p:pic>
+        <p:nvPicPr>
+          <p:cNvPr descr="https://pressbooks.library.torontomu.ca/assessmentnursingmain/wp-content/uploads/sites/421/2024/08/Extraocular-movement-via-cranial-nerves.jpg" id="0" name="Picture 1"/>
+          <p:cNvPicPr>
+            <a:picLocks noGrp="1" noChangeAspect="1"/>
+          </p:cNvPicPr>
+          <p:nvPr/>
+        </p:nvPicPr>
+        <p:blipFill>
+          <a:blip r:embed="rId2"/>
+          <a:stretch>
+            <a:fillRect/>
+          </a:stretch>
+        </p:blipFill>
+        <p:spPr bwMode="auto">
+          <a:xfrm>
+            <a:off x="584200" y="1193800"/>
+            <a:ext cx="7962900" cy="3390900"/>
+          </a:xfrm>
+          <a:prstGeom prst="rect">
+            <a:avLst/>
+          </a:prstGeom>
+          <a:noFill/>
+          <a:ln w="9525">
+            <a:noFill/>
+            <a:headEnd/>
+            <a:tailEnd/>
+          </a:ln>
+        </p:spPr>
+      </p:pic>
+    </p:spTree>
+  </p:cSld>
+</p:sld>
+</file>
+
+<file path=ppt/slides/slide35.xml><?xml version="1.0" encoding="utf-8"?>
+<p:sld xmlns:a="http://schemas.openxmlformats.org/drawingml/2006/main" xmlns:r="http://schemas.openxmlformats.org/officeDocument/2006/relationships" xmlns:p="http://schemas.openxmlformats.org/presentationml/2006/main">
+  <p:cSld>
+    <p:spTree>
+      <p:nvGrpSpPr>
+        <p:cNvPr id="1" name=""/>
+        <p:cNvGrpSpPr/>
+        <p:nvPr/>
+      </p:nvGrpSpPr>
+      <p:grpSpPr>
+        <a:xfrm>
+          <a:off x="0" y="0"/>
+          <a:ext cx="0" cy="0"/>
+          <a:chOff x="0" y="0"/>
+          <a:chExt cx="0" cy="0"/>
+        </a:xfrm>
+      </p:grpSpPr>
+      <p:graphicFrame>
+        <p:nvGraphicFramePr>
+          <p:cNvPr id="6" name="Content Placeholder 5"/>
+          <p:cNvGraphicFramePr>
+            <a:graphicFrameLocks noGrp="1"/>
+          </p:cNvGraphicFramePr>
           <p:nvPr>
             <p:ph idx="1"/>
           </p:nvPr>
-        </p:nvSpPr>
-        <p:spPr/>
+        </p:nvGraphicFramePr>
+        <p:xfrm>
+          <a:off x="457200" y="1193800"/>
+          <a:ext cx="8229600" cy="3390900"/>
+        </p:xfrm>
+        <a:graphic>
+          <a:graphicData uri="http://schemas.openxmlformats.org/drawingml/2006/table">
+            <a:tbl>
+              <a:tblPr firstRow="1" bandRow="1">
+                <a:tableStyleId>{5C22544A-7EE6-4342-B048-85BDC9FD1C3A}</a:tableStyleId>
+              </a:tblPr>
+              <a:tblGrid>
+                <a:gridCol w="4114800"/>
+                <a:gridCol w="4114800"/>
+              </a:tblGrid>
+              <a:tr h="0">
+                <a:tc>
+                  <a:txBody>
+                    <a:bodyPr/>
+                    <a:lstStyle/>
+                    <a:p>
+                      <a:pPr lvl="0" indent="0" marL="0">
+                        <a:buNone/>
+                      </a:pPr>
+                      <a:r>
+                        <a:rPr/>
+                        <a:t>Nerve</a:t>
+                      </a:r>
+                    </a:p>
+                  </a:txBody>
+                  <a:tcPr/>
+                </a:tc>
+                <a:tc>
+                  <a:txBody>
+                    <a:bodyPr/>
+                    <a:lstStyle/>
+                    <a:p>
+                      <a:pPr lvl="0" indent="0" marL="0">
+                        <a:buNone/>
+                      </a:pPr>
+                      <a:r>
+                        <a:rPr/>
+                        <a:t>Eye Muscle</a:t>
+                      </a:r>
+                    </a:p>
+                  </a:txBody>
+                  <a:tcPr/>
+                </a:tc>
+              </a:tr>
+              <a:tr h="0">
+                <a:tc>
+                  <a:txBody>
+                    <a:bodyPr/>
+                    <a:lstStyle/>
+                    <a:p>
+                      <a:pPr lvl="0" indent="0" marL="0">
+                        <a:buNone/>
+                      </a:pPr>
+                      <a:r>
+                        <a:rPr/>
+                        <a:t>CN III Oculomotor</a:t>
+                      </a:r>
+                    </a:p>
+                  </a:txBody>
+                </a:tc>
+                <a:tc>
+                  <a:txBody>
+                    <a:bodyPr/>
+                    <a:lstStyle/>
+                    <a:p>
+                      <a:pPr lvl="0" indent="0" marL="0">
+                        <a:buNone/>
+                      </a:pPr>
+                      <a:r>
+                        <a:rPr/>
+                        <a:t>Superior rectus</a:t>
+                      </a:r>
+                    </a:p>
+                  </a:txBody>
+                </a:tc>
+              </a:tr>
+              <a:tr h="0">
+                <a:tc>
+                  <a:txBody>
+                    <a:bodyPr/>
+                    <a:lstStyle/>
+                    <a:p>
+                      <a:endParaRPr/>
+                    </a:p>
+                  </a:txBody>
+                </a:tc>
+                <a:tc>
+                  <a:txBody>
+                    <a:bodyPr/>
+                    <a:lstStyle/>
+                    <a:p>
+                      <a:pPr lvl="0" indent="0" marL="0">
+                        <a:buNone/>
+                      </a:pPr>
+                      <a:r>
+                        <a:rPr/>
+                        <a:t>Inferior rectus</a:t>
+                      </a:r>
+                    </a:p>
+                  </a:txBody>
+                </a:tc>
+              </a:tr>
+              <a:tr h="0">
+                <a:tc>
+                  <a:txBody>
+                    <a:bodyPr/>
+                    <a:lstStyle/>
+                    <a:p>
+                      <a:endParaRPr/>
+                    </a:p>
+                  </a:txBody>
+                </a:tc>
+                <a:tc>
+                  <a:txBody>
+                    <a:bodyPr/>
+                    <a:lstStyle/>
+                    <a:p>
+                      <a:pPr lvl="0" indent="0" marL="0">
+                        <a:buNone/>
+                      </a:pPr>
+                      <a:r>
+                        <a:rPr/>
+                        <a:t>Medial rectus</a:t>
+                      </a:r>
+                    </a:p>
+                  </a:txBody>
+                </a:tc>
+              </a:tr>
+              <a:tr h="0">
+                <a:tc>
+                  <a:txBody>
+                    <a:bodyPr/>
+                    <a:lstStyle/>
+                    <a:p>
+                      <a:endParaRPr/>
+                    </a:p>
+                  </a:txBody>
+                </a:tc>
+                <a:tc>
+                  <a:txBody>
+                    <a:bodyPr/>
+                    <a:lstStyle/>
+                    <a:p>
+                      <a:pPr lvl="0" indent="0" marL="0">
+                        <a:buNone/>
+                      </a:pPr>
+                      <a:r>
+                        <a:rPr/>
+                        <a:t>Inferior oblique</a:t>
+                      </a:r>
+                    </a:p>
+                  </a:txBody>
+                </a:tc>
+              </a:tr>
+              <a:tr h="0">
+                <a:tc>
+                  <a:txBody>
+                    <a:bodyPr/>
+                    <a:lstStyle/>
+                    <a:p>
+                      <a:endParaRPr/>
+                    </a:p>
+                  </a:txBody>
+                </a:tc>
+                <a:tc>
+                  <a:txBody>
+                    <a:bodyPr/>
+                    <a:lstStyle/>
+                    <a:p>
+                      <a:pPr lvl="0" indent="0" marL="0">
+                        <a:buNone/>
+                      </a:pPr>
+                      <a:r>
+                        <a:rPr/>
+                        <a:t>Iris (pupillary) sphincter</a:t>
+                      </a:r>
+                    </a:p>
+                  </a:txBody>
+                </a:tc>
+              </a:tr>
+              <a:tr h="0">
+                <a:tc>
+                  <a:txBody>
+                    <a:bodyPr/>
+                    <a:lstStyle/>
+                    <a:p>
+                      <a:pPr lvl="0" indent="0" marL="0">
+                        <a:buNone/>
+                      </a:pPr>
+                      <a:r>
+                        <a:rPr/>
+                        <a:t>CN IV Trochlear</a:t>
+                      </a:r>
+                    </a:p>
+                  </a:txBody>
+                </a:tc>
+                <a:tc>
+                  <a:txBody>
+                    <a:bodyPr/>
+                    <a:lstStyle/>
+                    <a:p>
+                      <a:pPr lvl="0" indent="0" marL="0">
+                        <a:buNone/>
+                      </a:pPr>
+                      <a:r>
+                        <a:rPr/>
+                        <a:t>Superior oblique</a:t>
+                      </a:r>
+                    </a:p>
+                  </a:txBody>
+                </a:tc>
+              </a:tr>
+              <a:tr h="0">
+                <a:tc>
+                  <a:txBody>
+                    <a:bodyPr/>
+                    <a:lstStyle/>
+                    <a:p>
+                      <a:pPr lvl="0" indent="0" marL="0">
+                        <a:buNone/>
+                      </a:pPr>
+                      <a:r>
+                        <a:rPr/>
+                        <a:t>CN VI Abducens</a:t>
+                      </a:r>
+                    </a:p>
+                  </a:txBody>
+                </a:tc>
+                <a:tc>
+                  <a:txBody>
+                    <a:bodyPr/>
+                    <a:lstStyle/>
+                    <a:p>
+                      <a:pPr lvl="0" indent="0" marL="0">
+                        <a:buNone/>
+                      </a:pPr>
+                      <a:r>
+                        <a:rPr/>
+                        <a:t>Lateral rectus</a:t>
+                      </a:r>
+                    </a:p>
+                  </a:txBody>
+                </a:tc>
+              </a:tr>
+              <a:tr h="0">
+                <a:tc>
+                  <a:txBody>
+                    <a:bodyPr/>
+                    <a:lstStyle/>
+                    <a:p>
+                      <a:pPr lvl="0" indent="0" marL="0">
+                        <a:buNone/>
+                      </a:pPr>
+                      <a:r>
+                        <a:rPr/>
+                        <a:t>ANS sympathetic</a:t>
+                      </a:r>
+                    </a:p>
+                  </a:txBody>
+                </a:tc>
+                <a:tc>
+                  <a:txBody>
+                    <a:bodyPr/>
+                    <a:lstStyle/>
+                    <a:p>
+                      <a:pPr lvl="0" indent="0" marL="0">
+                        <a:buNone/>
+                      </a:pPr>
+                      <a:r>
+                        <a:rPr/>
+                        <a:t>Iris (pupillary) dilator</a:t>
+                      </a:r>
+                    </a:p>
+                  </a:txBody>
+                </a:tc>
+              </a:tr>
+            </a:tbl>
+          </a:graphicData>
+        </a:graphic>
+      </p:graphicFrame>
+    </p:spTree>
+  </p:cSld>
+</p:sld>
+</file>
+
+<file path=ppt/slides/slide36.xml><?xml version="1.0" encoding="utf-8"?>
+<p:sld xmlns:a="http://schemas.openxmlformats.org/drawingml/2006/main" xmlns:r="http://schemas.openxmlformats.org/officeDocument/2006/relationships" xmlns:p="http://schemas.openxmlformats.org/presentationml/2006/main">
+  <p:cSld>
+    <p:spTree>
+      <p:nvGrpSpPr>
+        <p:cNvPr id="1" name=""/>
+        <p:cNvGrpSpPr/>
+        <p:nvPr/>
+      </p:nvGrpSpPr>
+      <p:grpSpPr>
+        <a:xfrm>
+          <a:off x="0" y="0"/>
+          <a:ext cx="0" cy="0"/>
+          <a:chOff x="0" y="0"/>
+          <a:chExt cx="0" cy="0"/>
+        </a:xfrm>
+      </p:grpSpPr>
+      <p:sp>
+        <p:nvSpPr>
+          <p:cNvPr id="2" name="Title 1"/>
+          <p:cNvSpPr>
+            <a:spLocks noGrp="1"/>
+          </p:cNvSpPr>
+          <p:nvPr>
+            <p:ph type="title"/>
+          </p:nvPr>
+        </p:nvSpPr>
+        <p:spPr>
+          <a:xfrm>
+            <a:off x="457201" y="204787"/>
+            <a:ext cx="3008313" cy="871538"/>
+          </a:xfrm>
+        </p:spPr>
         <p:txBody>
           <a:bodyPr/>
           <a:lstStyle/>
@@ -5559,298 +7010,355 @@
             </a:pPr>
             <a:r>
               <a:rPr/>
-              <a:t>Bress, K. S., &amp; Cascio, C. J. (2024). Sensorimotor regulation of facial expression - an untouched frontier. </a:t>
-            </a:r>
-            <a:r>
-              <a:rPr i="1"/>
-              <a:t>Neuroscience and Biobehavioral Reviews</a:t>
-            </a:r>
-            <a:r>
-              <a:rPr/>
-              <a:t>, </a:t>
-            </a:r>
-            <a:r>
-              <a:rPr i="1"/>
-              <a:t>162</a:t>
-            </a:r>
-            <a:r>
-              <a:rPr/>
-              <a:t>, 105684. </a:t>
-            </a:r>
-            <a:r>
-              <a:rPr>
-                <a:hlinkClick r:id="rId2"/>
-              </a:rPr>
-              <a:t>https://doi.org/10.1016/j.neubiorev.2024.105684</a:t>
-            </a:r>
-          </a:p>
+              <a:t>Inputs to CN III</a:t>
+            </a:r>
+          </a:p>
+        </p:txBody>
+      </p:sp>
+      <p:sp>
+        <p:nvSpPr>
+          <p:cNvPr id="4" name="Text Placeholder 3"/>
+          <p:cNvSpPr>
+            <a:spLocks noGrp="1"/>
+          </p:cNvSpPr>
+          <p:nvPr>
+            <p:ph idx="2" sz="half" type="body"/>
+          </p:nvPr>
+        </p:nvSpPr>
+        <p:spPr/>
+        <p:txBody>
+          <a:bodyPr/>
+          <a:lstStyle/>
           <a:p>
             <a:pPr lvl="0" indent="0" marL="0">
               <a:buNone/>
             </a:pPr>
-            <a:r>
-              <a:rPr/>
-              <a:t>Cullen, K. E. (2022, May 31). The neuroscience of balance. Retrieved January 5, 2026, from </a:t>
-            </a:r>
-            <a:r>
-              <a:rPr>
-                <a:hlinkClick r:id="rId3"/>
-              </a:rPr>
-              <a:t>https://www.physoc.org/magazine-articles/the-neuroscience-of-balance/</a:t>
-            </a:r>
-          </a:p>
+          </a:p>
+        </p:txBody>
+      </p:sp>
+      <p:pic>
+        <p:nvPicPr>
+          <p:cNvPr descr="wk-03-2026-01-29-action_files/figure-pptx/mermaid-figure-2.png" id="0" name="Picture 1"/>
+          <p:cNvPicPr>
+            <a:picLocks noGrp="1" noChangeAspect="1"/>
+          </p:cNvPicPr>
+          <p:nvPr/>
+        </p:nvPicPr>
+        <p:blipFill>
+          <a:blip r:embed="rId2"/>
+          <a:stretch>
+            <a:fillRect/>
+          </a:stretch>
+        </p:blipFill>
+        <p:spPr bwMode="auto">
+          <a:xfrm>
+            <a:off x="3568700" y="1701800"/>
+            <a:ext cx="5105400" cy="1384300"/>
+          </a:xfrm>
+          <a:prstGeom prst="rect">
+            <a:avLst/>
+          </a:prstGeom>
+          <a:noFill/>
+          <a:ln w="9525">
+            <a:noFill/>
+            <a:headEnd/>
+            <a:tailEnd/>
+          </a:ln>
+        </p:spPr>
+      </p:pic>
+    </p:spTree>
+  </p:cSld>
+</p:sld>
+</file>
+
+<file path=ppt/slides/slide37.xml><?xml version="1.0" encoding="utf-8"?>
+<p:sld xmlns:a="http://schemas.openxmlformats.org/drawingml/2006/main" xmlns:r="http://schemas.openxmlformats.org/officeDocument/2006/relationships" xmlns:p="http://schemas.openxmlformats.org/presentationml/2006/main">
+  <p:cSld>
+    <p:spTree>
+      <p:nvGrpSpPr>
+        <p:cNvPr id="1" name=""/>
+        <p:cNvGrpSpPr/>
+        <p:nvPr/>
+      </p:nvGrpSpPr>
+      <p:grpSpPr>
+        <a:xfrm>
+          <a:off x="0" y="0"/>
+          <a:ext cx="0" cy="0"/>
+          <a:chOff x="0" y="0"/>
+          <a:chExt cx="0" cy="0"/>
+        </a:xfrm>
+      </p:grpSpPr>
+      <p:sp>
+        <p:nvSpPr>
+          <p:cNvPr id="2" name="Title 1"/>
+          <p:cNvSpPr>
+            <a:spLocks noGrp="1"/>
+          </p:cNvSpPr>
+          <p:nvPr>
+            <p:ph type="title"/>
+          </p:nvPr>
+        </p:nvSpPr>
+        <p:spPr/>
+        <p:txBody>
+          <a:bodyPr/>
+          <a:lstStyle/>
           <a:p>
             <a:pPr lvl="0" indent="0" marL="0">
               <a:buNone/>
             </a:pPr>
             <a:r>
               <a:rPr/>
-              <a:t>Di Caro, V., Cesari, P., Sala, F., &amp; Cattaneo, L. (2025). The neural bases of the reach-grasp movement in humans: Quantitative evidence from brain lesions. </a:t>
-            </a:r>
-            <a:r>
-              <a:rPr i="1"/>
-              <a:t>Proceedings of the National Academy of Sciences of the United States of America</a:t>
-            </a:r>
-            <a:r>
-              <a:rPr/>
-              <a:t>, </a:t>
-            </a:r>
-            <a:r>
-              <a:rPr i="1"/>
-              <a:t>122</a:t>
-            </a:r>
-            <a:r>
-              <a:rPr/>
-              <a:t>, e2419801122. </a:t>
-            </a:r>
-            <a:r>
-              <a:rPr>
-                <a:hlinkClick r:id="rId4"/>
-              </a:rPr>
-              <a:t>https://doi.org/10.1073/pnas.2419801122</a:t>
-            </a:r>
-          </a:p>
+              <a:t>Considerations</a:t>
+            </a:r>
+          </a:p>
+        </p:txBody>
+      </p:sp>
+      <mc:AlternateContent xmlns:mc="http://schemas.openxmlformats.org/markup-compatibility/2006">
+        <mc:Choice xmlns:a14="http://schemas.microsoft.com/office/drawing/2010/main" Requires="a14">
+          <p:sp>
+            <p:nvSpPr>
+              <p:cNvPr id="3" name="Content Placeholder 2"/>
+              <p:cNvSpPr>
+                <a:spLocks noGrp="1"/>
+              </p:cNvSpPr>
+              <p:nvPr>
+                <p:ph idx="1"/>
+              </p:nvPr>
+            </p:nvSpPr>
+            <p:spPr/>
+            <p:txBody>
+              <a:bodyPr/>
+              <a:lstStyle/>
+              <a:p>
+                <a:pPr lvl="0"/>
+                <a:r>
+                  <a:rPr/>
+                  <a:t>Act to perceive; perceive to act</a:t>
+                </a:r>
+              </a:p>
+              <a:p>
+                <a:pPr lvl="0"/>
+                <a:r>
+                  <a:rPr/>
+                  <a:t>Provide sensory feedback</a:t>
+                </a:r>
+              </a:p>
+              <a:p>
+                <a:pPr lvl="1"/>
+                <a:r>
+                  <a:rPr/>
+                  <a:t>Move eyes </a:t>
+                </a:r>
+                <a14:m>
+                  <m:oMath xmlns:m="http://schemas.openxmlformats.org/officeDocument/2006/math">
+                    <m:r>
+                      <m:rPr>
+                        <m:sty m:val="p"/>
+                      </m:rPr>
+                      <m:t>→</m:t>
+                    </m:r>
+                  </m:oMath>
+                </a14:m>
+                <a:r>
+                  <a:rPr/>
+                  <a:t> shift visual field</a:t>
+                </a:r>
+              </a:p>
+              <a:p>
+                <a:pPr lvl="1"/>
+                <a:r>
+                  <a:rPr/>
+                  <a:t>Change vergence or lens thickness </a:t>
+                </a:r>
+                <a14:m>
+                  <m:oMath xmlns:m="http://schemas.openxmlformats.org/officeDocument/2006/math">
+                    <m:r>
+                      <m:rPr>
+                        <m:sty m:val="p"/>
+                      </m:rPr>
+                      <m:t>→</m:t>
+                    </m:r>
+                  </m:oMath>
+                </a14:m>
+                <a:r>
+                  <a:rPr/>
+                  <a:t> change image focus</a:t>
+                </a:r>
+              </a:p>
+              <a:p>
+                <a:pPr lvl="1"/>
+                <a:r>
+                  <a:rPr/>
+                  <a:t>Eye muscles (probably) have proprioceptors analogous to spindles in skeletal muscles</a:t>
+                </a:r>
+              </a:p>
+            </p:txBody>
+          </p:sp>
+        </mc:Choice>
+      </mc:AlternateContent>
+    </p:spTree>
+  </p:cSld>
+</p:sld>
+</file>
+
+<file path=ppt/slides/slide38.xml><?xml version="1.0" encoding="utf-8"?>
+<p:sld xmlns:a="http://schemas.openxmlformats.org/drawingml/2006/main" xmlns:r="http://schemas.openxmlformats.org/officeDocument/2006/relationships" xmlns:p="http://schemas.openxmlformats.org/presentationml/2006/main">
+  <p:cSld>
+    <p:spTree>
+      <p:nvGrpSpPr>
+        <p:cNvPr id="1" name=""/>
+        <p:cNvGrpSpPr/>
+        <p:nvPr/>
+      </p:nvGrpSpPr>
+      <p:grpSpPr>
+        <a:xfrm>
+          <a:off x="0" y="0"/>
+          <a:ext cx="0" cy="0"/>
+          <a:chOff x="0" y="0"/>
+          <a:chExt cx="0" cy="0"/>
+        </a:xfrm>
+      </p:grpSpPr>
+      <p:sp>
+        <p:nvSpPr>
+          <p:cNvPr id="2" name="Title 1"/>
+          <p:cNvSpPr>
+            <a:spLocks noGrp="1"/>
+          </p:cNvSpPr>
+          <p:nvPr>
+            <p:ph type="title"/>
+          </p:nvPr>
+        </p:nvSpPr>
+        <p:spPr/>
+        <p:txBody>
+          <a:bodyPr/>
+          <a:lstStyle/>
           <a:p>
             <a:pPr lvl="0" indent="0" marL="0">
               <a:buNone/>
             </a:pPr>
             <a:r>
               <a:rPr/>
-              <a:t>Griffin, Z. M. (2024). Language production. In </a:t>
-            </a:r>
-            <a:r>
-              <a:rPr i="1"/>
-              <a:t>Open encyclopedia of cognitive science</a:t>
-            </a:r>
-            <a:r>
-              <a:rPr/>
-              <a:t>. MIT Press. </a:t>
-            </a:r>
-            <a:r>
-              <a:rPr>
-                <a:hlinkClick r:id="rId5"/>
-              </a:rPr>
-              <a:t>https://doi.org/10.21428/e2759450.b076f599</a:t>
-            </a:r>
-          </a:p>
+              <a:t>Considerations</a:t>
+            </a:r>
+          </a:p>
+        </p:txBody>
+      </p:sp>
+      <mc:AlternateContent xmlns:mc="http://schemas.openxmlformats.org/markup-compatibility/2006">
+        <mc:Choice xmlns:a14="http://schemas.microsoft.com/office/drawing/2010/main" Requires="a14">
+          <p:sp>
+            <p:nvSpPr>
+              <p:cNvPr id="3" name="Content Placeholder 2"/>
+              <p:cNvSpPr>
+                <a:spLocks noGrp="1"/>
+              </p:cNvSpPr>
+              <p:nvPr>
+                <p:ph idx="1"/>
+              </p:nvPr>
+            </p:nvSpPr>
+            <p:spPr/>
+            <p:txBody>
+              <a:bodyPr/>
+              <a:lstStyle/>
+              <a:p>
+                <a:pPr lvl="0"/>
+                <a:r>
+                  <a:rPr/>
+                  <a:t>Relatively simple physics:</a:t>
+                </a:r>
+              </a:p>
+              <a:p>
+                <a:pPr lvl="1"/>
+                <a:r>
+                  <a:rPr/>
+                  <a:t>Limited influence of gravity, friction</a:t>
+                </a:r>
+              </a:p>
+              <a:p>
+                <a:pPr lvl="0"/>
+                <a:r>
+                  <a:rPr/>
+                  <a:t>Small # of muscles </a:t>
+                </a:r>
+                <a14:m>
+                  <m:oMath xmlns:m="http://schemas.openxmlformats.org/officeDocument/2006/math">
+                    <m:r>
+                      <m:rPr>
+                        <m:sty m:val="p"/>
+                      </m:rPr>
+                      <m:t>→</m:t>
+                    </m:r>
+                  </m:oMath>
+                </a14:m>
+                <a:r>
+                  <a:rPr/>
+                  <a:t> “model” motor system?</a:t>
+                </a:r>
+              </a:p>
+              <a:p>
+                <a:pPr lvl="0"/>
+                <a:r>
+                  <a:rPr b="1"/>
+                  <a:t>DEMO</a:t>
+                </a:r>
+                <a:r>
+                  <a:rPr/>
+                  <a:t>: Illustrates “forward” model?</a:t>
+                </a:r>
+              </a:p>
+              <a:p>
+                <a:pPr lvl="1"/>
+                <a:r>
+                  <a:rPr/>
+                  <a:t>Predicting future sensory states</a:t>
+                </a:r>
+              </a:p>
+            </p:txBody>
+          </p:sp>
+        </mc:Choice>
+      </mc:AlternateContent>
+    </p:spTree>
+  </p:cSld>
+</p:sld>
+</file>
+
+<file path=ppt/slides/slide39.xml><?xml version="1.0" encoding="utf-8"?>
+<p:sld xmlns:a="http://schemas.openxmlformats.org/drawingml/2006/main" xmlns:r="http://schemas.openxmlformats.org/officeDocument/2006/relationships" xmlns:p="http://schemas.openxmlformats.org/presentationml/2006/main">
+  <p:cSld>
+    <p:spTree>
+      <p:nvGrpSpPr>
+        <p:cNvPr id="1" name=""/>
+        <p:cNvGrpSpPr/>
+        <p:nvPr/>
+      </p:nvGrpSpPr>
+      <p:grpSpPr>
+        <a:xfrm>
+          <a:off x="0" y="0"/>
+          <a:ext cx="0" cy="0"/>
+          <a:chOff x="0" y="0"/>
+          <a:chExt cx="0" cy="0"/>
+        </a:xfrm>
+      </p:grpSpPr>
+      <p:sp>
+        <p:nvSpPr>
+          <p:cNvPr id="2" name="Title 1"/>
+          <p:cNvSpPr>
+            <a:spLocks noGrp="1"/>
+          </p:cNvSpPr>
+          <p:nvPr>
+            <p:ph type="title"/>
+          </p:nvPr>
+        </p:nvSpPr>
+        <p:spPr/>
+        <p:txBody>
+          <a:bodyPr/>
+          <a:lstStyle/>
           <a:p>
             <a:pPr lvl="0" indent="0" marL="0">
               <a:buNone/>
             </a:pPr>
             <a:r>
               <a:rPr/>
-              <a:t>Khanna, A. R., Muñoz, W., Kim, Y. J., Kfir, Y., Paulk, A. C., Jamali, M., … Williams, Z. M. (2024). Single-neuronal elements of speech production in humans. </a:t>
-            </a:r>
-            <a:r>
-              <a:rPr i="1"/>
-              <a:t>Nature</a:t>
-            </a:r>
-            <a:r>
-              <a:rPr/>
-              <a:t>, </a:t>
-            </a:r>
-            <a:r>
-              <a:rPr i="1"/>
-              <a:t>626</a:t>
-            </a:r>
-            <a:r>
-              <a:rPr/>
-              <a:t>, 603–610. </a:t>
-            </a:r>
-            <a:r>
-              <a:rPr>
-                <a:hlinkClick r:id="rId6"/>
-              </a:rPr>
-              <a:t>https://doi.org/10.1038/s41586-023-06982-w</a:t>
-            </a:r>
-          </a:p>
-          <a:p>
-            <a:pPr lvl="0" indent="0" marL="0">
-              <a:buNone/>
-            </a:pPr>
-            <a:r>
-              <a:rPr/>
-              <a:t>Kim, H. E., Avraham, G., &amp; Ivry, R. B. (2021). The psychology of reaching: Action selection, movement implementation, and sensorimotor learning. </a:t>
-            </a:r>
-            <a:r>
-              <a:rPr i="1"/>
-              <a:t>Annual Review of Psychology</a:t>
-            </a:r>
-            <a:r>
-              <a:rPr/>
-              <a:t>, </a:t>
-            </a:r>
-            <a:r>
-              <a:rPr i="1"/>
-              <a:t>72</a:t>
-            </a:r>
-            <a:r>
-              <a:rPr/>
-              <a:t>, 61–95. </a:t>
-            </a:r>
-            <a:r>
-              <a:rPr>
-                <a:hlinkClick r:id="rId7"/>
-              </a:rPr>
-              <a:t>https://doi.org/10.1146/annurev-psych-010419-051053</a:t>
-            </a:r>
-          </a:p>
-          <a:p>
-            <a:pPr lvl="0" indent="0" marL="0">
-              <a:buNone/>
-            </a:pPr>
-            <a:r>
-              <a:rPr/>
-              <a:t>Locomotion. (n.d.). Retrieved January 5, 2026, from </a:t>
-            </a:r>
-            <a:r>
-              <a:rPr>
-                <a:hlinkClick r:id="rId8"/>
-              </a:rPr>
-              <a:t>https://www.sciencedirect.com/topics/neuroscience/locomotion</a:t>
-            </a:r>
-          </a:p>
-          <a:p>
-            <a:pPr lvl="0" indent="0" marL="0">
-              <a:buNone/>
-            </a:pPr>
-            <a:r>
-              <a:rPr/>
-              <a:t>Purves, D., Augustine, G. J., Fitzpatrick, D., Katz, L. C., LaMantia, A.-S., McNamara, J. O., &amp; Mark Williams, S. (2001). Spinal cord circuitry and locomotion. In </a:t>
-            </a:r>
-            <a:r>
-              <a:rPr i="1"/>
-              <a:t>Neuroscience. 2nd edition</a:t>
-            </a:r>
-            <a:r>
-              <a:rPr/>
-              <a:t>. Sinauer Associates. Retrieved from </a:t>
-            </a:r>
-            <a:r>
-              <a:rPr>
-                <a:hlinkClick r:id="rId9"/>
-              </a:rPr>
-              <a:t>https://www.ncbi.nlm.nih.gov/books/NBK11015/</a:t>
-            </a:r>
-          </a:p>
-          <a:p>
-            <a:pPr lvl="0" indent="0" marL="0">
-              <a:buNone/>
-            </a:pPr>
-            <a:r>
-              <a:rPr/>
-              <a:t>Quote origin: “To be is to do” “to do is to be” “do be do be do.” (n.d.). Retrieved January 12, 2026, from </a:t>
-            </a:r>
-            <a:r>
-              <a:rPr>
-                <a:hlinkClick r:id="rId10"/>
-              </a:rPr>
-              <a:t>https://quoteinvestigator.com/2013/09/16/do-be-do/</a:t>
-            </a:r>
-          </a:p>
-          <a:p>
-            <a:pPr lvl="0" indent="0" marL="0">
-              <a:buNone/>
-            </a:pPr>
-            <a:r>
-              <a:rPr/>
-              <a:t>Reviews, B. &amp;. T. (2012). </a:t>
-            </a:r>
-            <a:r>
-              <a:rPr i="1"/>
-              <a:t>I like to move it (original video) madagascar HD</a:t>
-            </a:r>
-            <a:r>
-              <a:rPr/>
-              <a:t>. YouTube. Retrieved from </a:t>
-            </a:r>
-            <a:r>
-              <a:rPr>
-                <a:hlinkClick r:id="rId11"/>
-              </a:rPr>
-              <a:t>https://www.youtube.com/watch?v=hdcTmpvDO0I</a:t>
-            </a:r>
-          </a:p>
-          <a:p>
-            <a:pPr lvl="0" indent="0" marL="0">
-              <a:buNone/>
-            </a:pPr>
-            <a:r>
-              <a:rPr/>
-              <a:t>Xing, D., Truccolo, W., &amp; Borton, D. A. (2022). Emergence of distinct neural subspaces in motor cortical dynamics during volitional adjustments of ongoing locomotion. </a:t>
-            </a:r>
-            <a:r>
-              <a:rPr i="1"/>
-              <a:t>The Journal of Neuroscience: The Official Journal of the Society for Neuroscience</a:t>
-            </a:r>
-            <a:r>
-              <a:rPr/>
-              <a:t>, </a:t>
-            </a:r>
-            <a:r>
-              <a:rPr i="1"/>
-              <a:t>42</a:t>
-            </a:r>
-            <a:r>
-              <a:rPr/>
-              <a:t>, 9142–9157. </a:t>
-            </a:r>
-            <a:r>
-              <a:rPr>
-                <a:hlinkClick r:id="rId12"/>
-              </a:rPr>
-              <a:t>https://doi.org/10.1523/JNEUROSCI.0746-22.2022</a:t>
-            </a:r>
-          </a:p>
-          <a:p>
-            <a:pPr lvl="0" indent="0" marL="0">
-              <a:buNone/>
-            </a:pPr>
-            <a:r>
-              <a:rPr/>
-              <a:t>Zada, Z., Nastase, S. A., Speer, S., Mwilambwe-Tshilobo, L., Tsoi, L., Burns, S. M., … Tamir, D. I. (2025). Linguistic coupling between neural systems for speech production and comprehension during real-time dyadic conversations. </a:t>
-            </a:r>
-            <a:r>
-              <a:rPr i="1"/>
-              <a:t>Neuron</a:t>
-            </a:r>
-            <a:r>
-              <a:rPr/>
-              <a:t>, </a:t>
-            </a:r>
-            <a:r>
-              <a:rPr i="1"/>
-              <a:t>0</a:t>
-            </a:r>
-            <a:r>
-              <a:rPr/>
-              <a:t>. </a:t>
-            </a:r>
-            <a:r>
-              <a:rPr>
-                <a:hlinkClick r:id="rId13"/>
-              </a:rPr>
-              <a:t>https://doi.org/10.1016/j.neuron.2025.11.004</a:t>
+              <a:t>Reaching</a:t>
             </a:r>
           </a:p>
         </p:txBody>
@@ -5938,6 +7446,849 @@
                 <a:hlinkClick r:id="rId2"/>
               </a:rPr>
               <a:t>Canvas dropbox</a:t>
+            </a:r>
+          </a:p>
+        </p:txBody>
+      </p:sp>
+    </p:spTree>
+  </p:cSld>
+</p:sld>
+</file>
+
+<file path=ppt/slides/slide40.xml><?xml version="1.0" encoding="utf-8"?>
+<p:sld xmlns:a="http://schemas.openxmlformats.org/drawingml/2006/main" xmlns:r="http://schemas.openxmlformats.org/officeDocument/2006/relationships" xmlns:p="http://schemas.openxmlformats.org/presentationml/2006/main">
+  <p:cSld>
+    <p:spTree>
+      <p:nvGrpSpPr>
+        <p:cNvPr id="1" name=""/>
+        <p:cNvGrpSpPr/>
+        <p:nvPr/>
+      </p:nvGrpSpPr>
+      <p:grpSpPr>
+        <a:xfrm>
+          <a:off x="0" y="0"/>
+          <a:ext cx="0" cy="0"/>
+          <a:chOff x="0" y="0"/>
+          <a:chExt cx="0" cy="0"/>
+        </a:xfrm>
+      </p:grpSpPr>
+      <p:sp>
+        <p:nvSpPr>
+          <p:cNvPr id="2" name="Title 1"/>
+          <p:cNvSpPr>
+            <a:spLocks noGrp="1"/>
+          </p:cNvSpPr>
+          <p:nvPr>
+            <p:ph type="title"/>
+          </p:nvPr>
+        </p:nvSpPr>
+        <p:spPr/>
+        <p:txBody>
+          <a:bodyPr/>
+          <a:lstStyle/>
+          <a:p>
+            <a:pPr lvl="0" indent="0" marL="0">
+              <a:buNone/>
+            </a:pPr>
+            <a:r>
+              <a:rPr/>
+              <a:t>Locomotion</a:t>
+            </a:r>
+          </a:p>
+        </p:txBody>
+      </p:sp>
+    </p:spTree>
+  </p:cSld>
+</p:sld>
+</file>
+
+<file path=ppt/slides/slide41.xml><?xml version="1.0" encoding="utf-8"?>
+<p:sld xmlns:a="http://schemas.openxmlformats.org/drawingml/2006/main" xmlns:r="http://schemas.openxmlformats.org/officeDocument/2006/relationships" xmlns:p="http://schemas.openxmlformats.org/presentationml/2006/main">
+  <p:cSld>
+    <p:spTree>
+      <p:nvGrpSpPr>
+        <p:cNvPr id="1" name=""/>
+        <p:cNvGrpSpPr/>
+        <p:nvPr/>
+      </p:nvGrpSpPr>
+      <p:grpSpPr>
+        <a:xfrm>
+          <a:off x="0" y="0"/>
+          <a:ext cx="0" cy="0"/>
+          <a:chOff x="0" y="0"/>
+          <a:chExt cx="0" cy="0"/>
+        </a:xfrm>
+      </p:grpSpPr>
+      <p:sp>
+        <p:nvSpPr>
+          <p:cNvPr id="2" name="Title 1"/>
+          <p:cNvSpPr>
+            <a:spLocks noGrp="1"/>
+          </p:cNvSpPr>
+          <p:nvPr>
+            <p:ph type="title"/>
+          </p:nvPr>
+        </p:nvSpPr>
+        <p:spPr/>
+        <p:txBody>
+          <a:bodyPr/>
+          <a:lstStyle/>
+          <a:p>
+            <a:pPr lvl="0" indent="0" marL="0">
+              <a:buNone/>
+            </a:pPr>
+            <a:r>
+              <a:rPr/>
+              <a:t>Speech</a:t>
+            </a:r>
+          </a:p>
+        </p:txBody>
+      </p:sp>
+    </p:spTree>
+  </p:cSld>
+</p:sld>
+</file>
+
+<file path=ppt/slides/slide42.xml><?xml version="1.0" encoding="utf-8"?>
+<p:sld xmlns:a="http://schemas.openxmlformats.org/drawingml/2006/main" xmlns:r="http://schemas.openxmlformats.org/officeDocument/2006/relationships" xmlns:p="http://schemas.openxmlformats.org/presentationml/2006/main">
+  <p:cSld>
+    <p:spTree>
+      <p:nvGrpSpPr>
+        <p:cNvPr id="1" name=""/>
+        <p:cNvGrpSpPr/>
+        <p:nvPr/>
+      </p:nvGrpSpPr>
+      <p:grpSpPr>
+        <a:xfrm>
+          <a:off x="0" y="0"/>
+          <a:ext cx="0" cy="0"/>
+          <a:chOff x="0" y="0"/>
+          <a:chExt cx="0" cy="0"/>
+        </a:xfrm>
+      </p:grpSpPr>
+      <p:sp>
+        <p:nvSpPr>
+          <p:cNvPr id="2" name="Title 1"/>
+          <p:cNvSpPr>
+            <a:spLocks noGrp="1"/>
+          </p:cNvSpPr>
+          <p:nvPr>
+            <p:ph type="title"/>
+          </p:nvPr>
+        </p:nvSpPr>
+        <p:spPr>
+          <a:xfrm>
+            <a:off x="722313" y="3305176"/>
+            <a:ext cx="7772400" cy="1021556"/>
+          </a:xfrm>
+        </p:spPr>
+        <p:txBody>
+          <a:bodyPr/>
+          <a:lstStyle/>
+          <a:p>
+            <a:pPr lvl="0" indent="0" marL="0">
+              <a:buNone/>
+            </a:pPr>
+            <a:r>
+              <a:rPr/>
+              <a:t>Wrap-up</a:t>
+            </a:r>
+          </a:p>
+        </p:txBody>
+      </p:sp>
+    </p:spTree>
+  </p:cSld>
+</p:sld>
+</file>
+
+<file path=ppt/slides/slide43.xml><?xml version="1.0" encoding="utf-8"?>
+<p:sld xmlns:a="http://schemas.openxmlformats.org/drawingml/2006/main" xmlns:r="http://schemas.openxmlformats.org/officeDocument/2006/relationships" xmlns:p="http://schemas.openxmlformats.org/presentationml/2006/main">
+  <p:cSld>
+    <p:spTree>
+      <p:nvGrpSpPr>
+        <p:cNvPr id="1" name=""/>
+        <p:cNvGrpSpPr/>
+        <p:nvPr/>
+      </p:nvGrpSpPr>
+      <p:grpSpPr>
+        <a:xfrm>
+          <a:off x="0" y="0"/>
+          <a:ext cx="0" cy="0"/>
+          <a:chOff x="0" y="0"/>
+          <a:chExt cx="0" cy="0"/>
+        </a:xfrm>
+      </p:grpSpPr>
+      <p:sp>
+        <p:nvSpPr>
+          <p:cNvPr id="2" name="Title 1"/>
+          <p:cNvSpPr>
+            <a:spLocks noGrp="1"/>
+          </p:cNvSpPr>
+          <p:nvPr>
+            <p:ph type="title"/>
+          </p:nvPr>
+        </p:nvSpPr>
+        <p:spPr/>
+        <p:txBody>
+          <a:bodyPr/>
+          <a:lstStyle/>
+          <a:p>
+            <a:pPr lvl="0" indent="0" marL="0">
+              <a:buNone/>
+            </a:pPr>
+            <a:r>
+              <a:rPr/>
+              <a:t>Main points</a:t>
+            </a:r>
+          </a:p>
+        </p:txBody>
+      </p:sp>
+    </p:spTree>
+  </p:cSld>
+</p:sld>
+</file>
+
+<file path=ppt/slides/slide44.xml><?xml version="1.0" encoding="utf-8"?>
+<p:sld xmlns:a="http://schemas.openxmlformats.org/drawingml/2006/main" xmlns:r="http://schemas.openxmlformats.org/officeDocument/2006/relationships" xmlns:p="http://schemas.openxmlformats.org/presentationml/2006/main">
+  <p:cSld>
+    <p:spTree>
+      <p:nvGrpSpPr>
+        <p:cNvPr id="1" name=""/>
+        <p:cNvGrpSpPr/>
+        <p:nvPr/>
+      </p:nvGrpSpPr>
+      <p:grpSpPr>
+        <a:xfrm>
+          <a:off x="0" y="0"/>
+          <a:ext cx="0" cy="0"/>
+          <a:chOff x="0" y="0"/>
+          <a:chExt cx="0" cy="0"/>
+        </a:xfrm>
+      </p:grpSpPr>
+      <p:sp>
+        <p:nvSpPr>
+          <p:cNvPr id="2" name="Title 1"/>
+          <p:cNvSpPr>
+            <a:spLocks noGrp="1"/>
+          </p:cNvSpPr>
+          <p:nvPr>
+            <p:ph type="title"/>
+          </p:nvPr>
+        </p:nvSpPr>
+        <p:spPr/>
+        <p:txBody>
+          <a:bodyPr/>
+          <a:lstStyle/>
+          <a:p>
+            <a:pPr lvl="0" indent="0" marL="0">
+              <a:buNone/>
+            </a:pPr>
+            <a:r>
+              <a:rPr/>
+              <a:t>Next time</a:t>
+            </a:r>
+          </a:p>
+        </p:txBody>
+      </p:sp>
+      <p:sp>
+        <p:nvSpPr>
+          <p:cNvPr id="3" name="Content Placeholder 2"/>
+          <p:cNvSpPr>
+            <a:spLocks noGrp="1"/>
+          </p:cNvSpPr>
+          <p:nvPr>
+            <p:ph idx="1"/>
+          </p:nvPr>
+        </p:nvSpPr>
+        <p:spPr/>
+        <p:txBody>
+          <a:bodyPr/>
+          <a:lstStyle/>
+          <a:p>
+            <a:pPr lvl="0"/>
+            <a:r>
+              <a:rPr/>
+              <a:t>Perception</a:t>
+            </a:r>
+          </a:p>
+        </p:txBody>
+      </p:sp>
+    </p:spTree>
+  </p:cSld>
+</p:sld>
+</file>
+
+<file path=ppt/slides/slide45.xml><?xml version="1.0" encoding="utf-8"?>
+<p:sld xmlns:a="http://schemas.openxmlformats.org/drawingml/2006/main" xmlns:r="http://schemas.openxmlformats.org/officeDocument/2006/relationships" xmlns:p="http://schemas.openxmlformats.org/presentationml/2006/main">
+  <p:cSld>
+    <p:spTree>
+      <p:nvGrpSpPr>
+        <p:cNvPr id="1" name=""/>
+        <p:cNvGrpSpPr/>
+        <p:nvPr/>
+      </p:nvGrpSpPr>
+      <p:grpSpPr>
+        <a:xfrm>
+          <a:off x="0" y="0"/>
+          <a:ext cx="0" cy="0"/>
+          <a:chOff x="0" y="0"/>
+          <a:chExt cx="0" cy="0"/>
+        </a:xfrm>
+      </p:grpSpPr>
+      <p:sp>
+        <p:nvSpPr>
+          <p:cNvPr id="2" name="Title 1"/>
+          <p:cNvSpPr>
+            <a:spLocks noGrp="1"/>
+          </p:cNvSpPr>
+          <p:nvPr>
+            <p:ph type="title"/>
+          </p:nvPr>
+        </p:nvSpPr>
+        <p:spPr>
+          <a:xfrm>
+            <a:off x="722313" y="3305176"/>
+            <a:ext cx="7772400" cy="1021556"/>
+          </a:xfrm>
+        </p:spPr>
+        <p:txBody>
+          <a:bodyPr/>
+          <a:lstStyle/>
+          <a:p>
+            <a:pPr lvl="0" indent="0" marL="0">
+              <a:buNone/>
+            </a:pPr>
+            <a:r>
+              <a:rPr/>
+              <a:t>Resources</a:t>
+            </a:r>
+          </a:p>
+        </p:txBody>
+      </p:sp>
+    </p:spTree>
+  </p:cSld>
+</p:sld>
+</file>
+
+<file path=ppt/slides/slide46.xml><?xml version="1.0" encoding="utf-8"?>
+<p:sld xmlns:a="http://schemas.openxmlformats.org/drawingml/2006/main" xmlns:r="http://schemas.openxmlformats.org/officeDocument/2006/relationships" xmlns:p="http://schemas.openxmlformats.org/presentationml/2006/main">
+  <p:cSld>
+    <p:spTree>
+      <p:nvGrpSpPr>
+        <p:cNvPr id="1" name=""/>
+        <p:cNvGrpSpPr/>
+        <p:nvPr/>
+      </p:nvGrpSpPr>
+      <p:grpSpPr>
+        <a:xfrm>
+          <a:off x="0" y="0"/>
+          <a:ext cx="0" cy="0"/>
+          <a:chOff x="0" y="0"/>
+          <a:chExt cx="0" cy="0"/>
+        </a:xfrm>
+      </p:grpSpPr>
+      <p:sp>
+        <p:nvSpPr>
+          <p:cNvPr id="2" name="Title 1"/>
+          <p:cNvSpPr>
+            <a:spLocks noGrp="1"/>
+          </p:cNvSpPr>
+          <p:nvPr>
+            <p:ph type="title"/>
+          </p:nvPr>
+        </p:nvSpPr>
+        <p:spPr/>
+        <p:txBody>
+          <a:bodyPr/>
+          <a:lstStyle/>
+          <a:p>
+            <a:pPr lvl="0" indent="0" marL="0">
+              <a:buNone/>
+            </a:pPr>
+            <a:r>
+              <a:rPr/>
+              <a:t>About</a:t>
+            </a:r>
+          </a:p>
+        </p:txBody>
+      </p:sp>
+      <p:sp>
+        <p:nvSpPr>
+          <p:cNvPr id="3" name="Content Placeholder 2"/>
+          <p:cNvSpPr>
+            <a:spLocks noGrp="1"/>
+          </p:cNvSpPr>
+          <p:nvPr>
+            <p:ph idx="1"/>
+          </p:nvPr>
+        </p:nvSpPr>
+        <p:spPr/>
+        <p:txBody>
+          <a:bodyPr/>
+          <a:lstStyle/>
+          <a:p>
+            <a:pPr lvl="0" indent="0" marL="0">
+              <a:buNone/>
+            </a:pPr>
+            <a:r>
+              <a:rPr/>
+              <a:t>This talk was produced using </a:t>
+            </a:r>
+            <a:r>
+              <a:rPr>
+                <a:hlinkClick r:id="rId2"/>
+              </a:rPr>
+              <a:t>Quarto</a:t>
+            </a:r>
+            <a:r>
+              <a:rPr/>
+              <a:t>, using the </a:t>
+            </a:r>
+            <a:r>
+              <a:rPr>
+                <a:hlinkClick r:id="rId3"/>
+              </a:rPr>
+              <a:t>RStudio</a:t>
+            </a:r>
+            <a:r>
+              <a:rPr/>
+              <a:t> Integrated Development Environment (IDE), version 2026.1.0.392.</a:t>
+            </a:r>
+          </a:p>
+          <a:p>
+            <a:pPr lvl="0" indent="0" marL="0">
+              <a:buNone/>
+            </a:pPr>
+            <a:r>
+              <a:rPr/>
+              <a:t>The source files are in R and R Markdown, then rendered to HTML using the </a:t>
+            </a:r>
+            <a:r>
+              <a:rPr>
+                <a:hlinkClick r:id="rId4"/>
+              </a:rPr>
+              <a:t>revealJS</a:t>
+            </a:r>
+            <a:r>
+              <a:rPr/>
+              <a:t> framework. The HTML slides are hosted in a </a:t>
+            </a:r>
+            <a:r>
+              <a:rPr>
+                <a:hlinkClick r:id="rId5"/>
+              </a:rPr>
+              <a:t>GitHub repo</a:t>
+            </a:r>
+            <a:r>
+              <a:rPr/>
+              <a:t> and served by GitHub pages: </a:t>
+            </a:r>
+            <a:r>
+              <a:rPr>
+                <a:hlinkClick r:id="rId6"/>
+              </a:rPr>
+              <a:t>https://psu-psychology.github.io/psy-511-scan-fdns-2026-spring/</a:t>
+            </a:r>
+          </a:p>
+        </p:txBody>
+      </p:sp>
+    </p:spTree>
+  </p:cSld>
+</p:sld>
+</file>
+
+<file path=ppt/slides/slide47.xml><?xml version="1.0" encoding="utf-8"?>
+<p:sld xmlns:a="http://schemas.openxmlformats.org/drawingml/2006/main" xmlns:r="http://schemas.openxmlformats.org/officeDocument/2006/relationships" xmlns:p="http://schemas.openxmlformats.org/presentationml/2006/main">
+  <p:cSld>
+    <p:spTree>
+      <p:nvGrpSpPr>
+        <p:cNvPr id="1" name=""/>
+        <p:cNvGrpSpPr/>
+        <p:nvPr/>
+      </p:nvGrpSpPr>
+      <p:grpSpPr>
+        <a:xfrm>
+          <a:off x="0" y="0"/>
+          <a:ext cx="0" cy="0"/>
+          <a:chOff x="0" y="0"/>
+          <a:chExt cx="0" cy="0"/>
+        </a:xfrm>
+      </p:grpSpPr>
+      <p:sp>
+        <p:nvSpPr>
+          <p:cNvPr id="2" name="Title 1"/>
+          <p:cNvSpPr>
+            <a:spLocks noGrp="1"/>
+          </p:cNvSpPr>
+          <p:nvPr>
+            <p:ph type="title"/>
+          </p:nvPr>
+        </p:nvSpPr>
+        <p:spPr/>
+        <p:txBody>
+          <a:bodyPr/>
+          <a:lstStyle/>
+          <a:p>
+            <a:pPr lvl="0" indent="0" marL="0">
+              <a:buNone/>
+            </a:pPr>
+            <a:r>
+              <a:rPr/>
+              <a:t>References</a:t>
+            </a:r>
+          </a:p>
+        </p:txBody>
+      </p:sp>
+      <p:sp>
+        <p:nvSpPr>
+          <p:cNvPr id="3" name="Content Placeholder 2"/>
+          <p:cNvSpPr>
+            <a:spLocks noGrp="1"/>
+          </p:cNvSpPr>
+          <p:nvPr>
+            <p:ph idx="1"/>
+          </p:nvPr>
+        </p:nvSpPr>
+        <p:spPr/>
+        <p:txBody>
+          <a:bodyPr/>
+          <a:lstStyle/>
+          <a:p>
+            <a:pPr lvl="0" indent="0" marL="0">
+              <a:buNone/>
+            </a:pPr>
+            <a:r>
+              <a:rPr/>
+              <a:t>Bress, K. S., &amp; Cascio, C. J. (2024). Sensorimotor regulation of facial expression - an untouched frontier. </a:t>
+            </a:r>
+            <a:r>
+              <a:rPr i="1"/>
+              <a:t>Neuroscience and Biobehavioral Reviews</a:t>
+            </a:r>
+            <a:r>
+              <a:rPr/>
+              <a:t>, </a:t>
+            </a:r>
+            <a:r>
+              <a:rPr i="1"/>
+              <a:t>162</a:t>
+            </a:r>
+            <a:r>
+              <a:rPr/>
+              <a:t>, 105684. </a:t>
+            </a:r>
+            <a:r>
+              <a:rPr>
+                <a:hlinkClick r:id="rId2"/>
+              </a:rPr>
+              <a:t>https://doi.org/10.1016/j.neubiorev.2024.105684</a:t>
+            </a:r>
+          </a:p>
+          <a:p>
+            <a:pPr lvl="0" indent="0" marL="0">
+              <a:buNone/>
+            </a:pPr>
+            <a:r>
+              <a:rPr/>
+              <a:t>Cullen, K. E. (2022, May 31). The neuroscience of balance. Retrieved January 5, 2026, from </a:t>
+            </a:r>
+            <a:r>
+              <a:rPr>
+                <a:hlinkClick r:id="rId3"/>
+              </a:rPr>
+              <a:t>https://www.physoc.org/magazine-articles/the-neuroscience-of-balance/</a:t>
+            </a:r>
+          </a:p>
+          <a:p>
+            <a:pPr lvl="0" indent="0" marL="0">
+              <a:buNone/>
+            </a:pPr>
+            <a:r>
+              <a:rPr/>
+              <a:t>Di Caro, V., Cesari, P., Sala, F., &amp; Cattaneo, L. (2025). The neural bases of the reach-grasp movement in humans: Quantitative evidence from brain lesions. </a:t>
+            </a:r>
+            <a:r>
+              <a:rPr i="1"/>
+              <a:t>Proceedings of the National Academy of Sciences of the United States of America</a:t>
+            </a:r>
+            <a:r>
+              <a:rPr/>
+              <a:t>, </a:t>
+            </a:r>
+            <a:r>
+              <a:rPr i="1"/>
+              <a:t>122</a:t>
+            </a:r>
+            <a:r>
+              <a:rPr/>
+              <a:t>, e2419801122. </a:t>
+            </a:r>
+            <a:r>
+              <a:rPr>
+                <a:hlinkClick r:id="rId4"/>
+              </a:rPr>
+              <a:t>https://doi.org/10.1073/pnas.2419801122</a:t>
+            </a:r>
+          </a:p>
+          <a:p>
+            <a:pPr lvl="0" indent="0" marL="0">
+              <a:buNone/>
+            </a:pPr>
+            <a:r>
+              <a:rPr/>
+              <a:t>Griffin, Z. M. (2024). Language production. In </a:t>
+            </a:r>
+            <a:r>
+              <a:rPr i="1"/>
+              <a:t>Open encyclopedia of cognitive science</a:t>
+            </a:r>
+            <a:r>
+              <a:rPr/>
+              <a:t>. MIT Press. </a:t>
+            </a:r>
+            <a:r>
+              <a:rPr>
+                <a:hlinkClick r:id="rId5"/>
+              </a:rPr>
+              <a:t>https://doi.org/10.21428/e2759450.b076f599</a:t>
+            </a:r>
+          </a:p>
+          <a:p>
+            <a:pPr lvl="0" indent="0" marL="0">
+              <a:buNone/>
+            </a:pPr>
+            <a:r>
+              <a:rPr/>
+              <a:t>Khanna, A. R., Muñoz, W., Kim, Y. J., Kfir, Y., Paulk, A. C., Jamali, M., … Williams, Z. M. (2024). Single-neuronal elements of speech production in humans. </a:t>
+            </a:r>
+            <a:r>
+              <a:rPr i="1"/>
+              <a:t>Nature</a:t>
+            </a:r>
+            <a:r>
+              <a:rPr/>
+              <a:t>, </a:t>
+            </a:r>
+            <a:r>
+              <a:rPr i="1"/>
+              <a:t>626</a:t>
+            </a:r>
+            <a:r>
+              <a:rPr/>
+              <a:t>, 603–610. </a:t>
+            </a:r>
+            <a:r>
+              <a:rPr>
+                <a:hlinkClick r:id="rId6"/>
+              </a:rPr>
+              <a:t>https://doi.org/10.1038/s41586-023-06982-w</a:t>
+            </a:r>
+          </a:p>
+          <a:p>
+            <a:pPr lvl="0" indent="0" marL="0">
+              <a:buNone/>
+            </a:pPr>
+            <a:r>
+              <a:rPr/>
+              <a:t>Kim, H. E., Avraham, G., &amp; Ivry, R. B. (2021). The psychology of reaching: Action selection, movement implementation, and sensorimotor learning. </a:t>
+            </a:r>
+            <a:r>
+              <a:rPr i="1"/>
+              <a:t>Annual Review of Psychology</a:t>
+            </a:r>
+            <a:r>
+              <a:rPr/>
+              <a:t>, </a:t>
+            </a:r>
+            <a:r>
+              <a:rPr i="1"/>
+              <a:t>72</a:t>
+            </a:r>
+            <a:r>
+              <a:rPr/>
+              <a:t>, 61–95. </a:t>
+            </a:r>
+            <a:r>
+              <a:rPr>
+                <a:hlinkClick r:id="rId7"/>
+              </a:rPr>
+              <a:t>https://doi.org/10.1146/annurev-psych-010419-051053</a:t>
+            </a:r>
+          </a:p>
+          <a:p>
+            <a:pPr lvl="0" indent="0" marL="0">
+              <a:buNone/>
+            </a:pPr>
+            <a:r>
+              <a:rPr/>
+              <a:t>Locomotion. (n.d.). Retrieved January 5, 2026, from </a:t>
+            </a:r>
+            <a:r>
+              <a:rPr>
+                <a:hlinkClick r:id="rId8"/>
+              </a:rPr>
+              <a:t>https://www.sciencedirect.com/topics/neuroscience/locomotion</a:t>
+            </a:r>
+          </a:p>
+          <a:p>
+            <a:pPr lvl="0" indent="0" marL="0">
+              <a:buNone/>
+            </a:pPr>
+            <a:r>
+              <a:rPr/>
+              <a:t>Purves, D., Augustine, G. J., Fitzpatrick, D., Katz, L. C., LaMantia, A.-S., McNamara, J. O., &amp; Mark Williams, S. (2001). Spinal cord circuitry and locomotion. In </a:t>
+            </a:r>
+            <a:r>
+              <a:rPr i="1"/>
+              <a:t>Neuroscience. 2nd edition</a:t>
+            </a:r>
+            <a:r>
+              <a:rPr/>
+              <a:t>. Sinauer Associates. Retrieved from </a:t>
+            </a:r>
+            <a:r>
+              <a:rPr>
+                <a:hlinkClick r:id="rId9"/>
+              </a:rPr>
+              <a:t>https://www.ncbi.nlm.nih.gov/books/NBK11015/</a:t>
+            </a:r>
+          </a:p>
+          <a:p>
+            <a:pPr lvl="0" indent="0" marL="0">
+              <a:buNone/>
+            </a:pPr>
+            <a:r>
+              <a:rPr/>
+              <a:t>Quote origin: “To be is to do” “to do is to be” “do be do be do.” (n.d.). Retrieved January 12, 2026, from </a:t>
+            </a:r>
+            <a:r>
+              <a:rPr>
+                <a:hlinkClick r:id="rId10"/>
+              </a:rPr>
+              <a:t>https://quoteinvestigator.com/2013/09/16/do-be-do/</a:t>
+            </a:r>
+          </a:p>
+          <a:p>
+            <a:pPr lvl="0" indent="0" marL="0">
+              <a:buNone/>
+            </a:pPr>
+            <a:r>
+              <a:rPr/>
+              <a:t>Reviews, B. &amp;. T. (2012). </a:t>
+            </a:r>
+            <a:r>
+              <a:rPr i="1"/>
+              <a:t>I like to move it (original video) madagascar HD</a:t>
+            </a:r>
+            <a:r>
+              <a:rPr/>
+              <a:t>. YouTube. Retrieved from </a:t>
+            </a:r>
+            <a:r>
+              <a:rPr>
+                <a:hlinkClick r:id="rId11"/>
+              </a:rPr>
+              <a:t>https://www.youtube.com/watch?v=hdcTmpvDO0I</a:t>
+            </a:r>
+          </a:p>
+          <a:p>
+            <a:pPr lvl="0" indent="0" marL="0">
+              <a:buNone/>
+            </a:pPr>
+            <a:r>
+              <a:rPr/>
+              <a:t>Stanton, J. (2015). </a:t>
+            </a:r>
+            <a:r>
+              <a:rPr i="1"/>
+              <a:t>Optokinetic to the right for projection</a:t>
+            </a:r>
+            <a:r>
+              <a:rPr/>
+              <a:t>. YouTube. Retrieved from </a:t>
+            </a:r>
+            <a:r>
+              <a:rPr>
+                <a:hlinkClick r:id="rId12"/>
+              </a:rPr>
+              <a:t>https://www.youtube.com/watch?v=CG5n516PCXM</a:t>
+            </a:r>
+          </a:p>
+          <a:p>
+            <a:pPr lvl="0" indent="0" marL="0">
+              <a:buNone/>
+            </a:pPr>
+            <a:r>
+              <a:rPr/>
+              <a:t>Wikipedia contributors. (2025, December 19). Saccade. Retrieved from </a:t>
+            </a:r>
+            <a:r>
+              <a:rPr>
+                <a:hlinkClick r:id="rId13"/>
+              </a:rPr>
+              <a:t>https://en.wikipedia.org/wiki/Saccade</a:t>
+            </a:r>
+          </a:p>
+          <a:p>
+            <a:pPr lvl="0" indent="0" marL="0">
+              <a:buNone/>
+            </a:pPr>
+            <a:r>
+              <a:rPr/>
+              <a:t>Xing, D., Truccolo, W., &amp; Borton, D. A. (2022). Emergence of distinct neural subspaces in motor cortical dynamics during volitional adjustments of ongoing locomotion. </a:t>
+            </a:r>
+            <a:r>
+              <a:rPr i="1"/>
+              <a:t>The Journal of Neuroscience: The Official Journal of the Society for Neuroscience</a:t>
+            </a:r>
+            <a:r>
+              <a:rPr/>
+              <a:t>, </a:t>
+            </a:r>
+            <a:r>
+              <a:rPr i="1"/>
+              <a:t>42</a:t>
+            </a:r>
+            <a:r>
+              <a:rPr/>
+              <a:t>, 9142–9157. </a:t>
+            </a:r>
+            <a:r>
+              <a:rPr>
+                <a:hlinkClick r:id="rId14"/>
+              </a:rPr>
+              <a:t>https://doi.org/10.1523/JNEUROSCI.0746-22.2022</a:t>
+            </a:r>
+          </a:p>
+          <a:p>
+            <a:pPr lvl="0" indent="0" marL="0">
+              <a:buNone/>
+            </a:pPr>
+            <a:r>
+              <a:rPr/>
+              <a:t>Zada, Z., Nastase, S. A., Speer, S., Mwilambwe-Tshilobo, L., Tsoi, L., Burns, S. M., … Tamir, D. I. (2025). Linguistic coupling between neural systems for speech production and comprehension during real-time dyadic conversations. </a:t>
+            </a:r>
+            <a:r>
+              <a:rPr i="1"/>
+              <a:t>Neuron</a:t>
+            </a:r>
+            <a:r>
+              <a:rPr/>
+              <a:t>, </a:t>
+            </a:r>
+            <a:r>
+              <a:rPr i="1"/>
+              <a:t>0</a:t>
+            </a:r>
+            <a:r>
+              <a:rPr/>
+              <a:t>. </a:t>
+            </a:r>
+            <a:r>
+              <a:rPr>
+                <a:hlinkClick r:id="rId15"/>
+              </a:rPr>
+              <a:t>https://doi.org/10.1016/j.neuron.2025.11.004</a:t>
             </a:r>
           </a:p>
         </p:txBody>

--- a/docs/slides/wk-03-2026-01-29-action.pptx
+++ b/docs/slides/wk-03-2026-01-29-action.pptx
@@ -123,8 +123,6 @@
     <p:sldId id="371" r:id="rId117"/>
     <p:sldId id="372" r:id="rId118"/>
     <p:sldId id="373" r:id="rId119"/>
-    <p:sldId id="374" r:id="rId120"/>
-    <p:sldId id="375" r:id="rId121"/>
   </p:sldIdLst>
   <p:sldSz cx="9144000" cy="5143500" type="screen16x9"/>
   <p:notesSz cx="6858000" cy="9144000"/>
@@ -242,15 +240,11 @@
 </p:presentation>
 </file>
 
-<file path=ppt/media/image16.txt>Please set a user-agent and respect our robot policy https://w.wiki/4wJS. See also https://phabricator.wikimedia.org/T400119.
+<file path=ppt/media/image17.txt>Please set a user-agent and respect our robot policy https://w.wiki/4wJS. See also https://phabricator.wikimedia.org/T400119.
 
 </file>
 
-<file path=ppt/media/image20.txt>Please set a user-agent and respect our robot policy https://w.wiki/4wJS. See also https://phabricator.wikimedia.org/T400119.
-
-</file>
-
-<file path=ppt/media/image22.txt>Please set a user-agent and respect our robot policy https://w.wiki/4wJS. See also https://phabricator.wikimedia.org/T400119.
+<file path=ppt/media/image21.txt>Please set a user-agent and respect our robot policy https://w.wiki/4wJS. See also https://phabricator.wikimedia.org/T400119.
 
 </file>
 
@@ -258,11 +252,11 @@
 
 </file>
 
-<file path=ppt/media/image25.txt>Please set a user-agent and respect our robot policy https://w.wiki/4wJS. See also https://phabricator.wikimedia.org/T400119.
+<file path=ppt/media/image24.txt>Please set a user-agent and respect our robot policy https://w.wiki/4wJS. See also https://phabricator.wikimedia.org/T400119.
 
 </file>
 
-<file path=ppt/media/image28.txt>Please set a user-agent and respect our robot policy https://w.wiki/4wJS. See also https://phabricator.wikimedia.org/T400119.
+<file path=ppt/media/image26.txt>Please set a user-agent and respect our robot policy https://w.wiki/4wJS. See also https://phabricator.wikimedia.org/T400119.
 
 </file>
 
@@ -274,7 +268,7 @@
 
 </file>
 
-<file path=ppt/media/image33.txt>Please set a user-agent and respect our robot policy https://w.wiki/4wJS. See also https://phabricator.wikimedia.org/T400119.
+<file path=ppt/media/image30.txt>Please set a user-agent and respect our robot policy https://w.wiki/4wJS. See also https://phabricator.wikimedia.org/T400119.
 
 </file>
 
@@ -286,11 +280,19 @@
 
 </file>
 
+<file path=ppt/media/image36.txt>Please set a user-agent and respect our robot policy https://w.wiki/4wJS. See also https://phabricator.wikimedia.org/T400119.
+
+</file>
+
 <file path=ppt/media/image4.txt>Please set a user-agent and respect our robot policy https://w.wiki/4wJS. See also https://phabricator.wikimedia.org/T400119.
 
 </file>
 
-<file path=ppt/media/image41.txt>Please set a user-agent and respect our robot policy https://w.wiki/4wJS. See also https://phabricator.wikimedia.org/T400119.
+<file path=ppt/media/image42.txt>Please set a user-agent and respect our robot policy https://w.wiki/4wJS. See also https://phabricator.wikimedia.org/T400119.
+
+</file>
+
+<file path=ppt/media/image9.txt>Please set a user-agent and respect our robot policy https://w.wiki/4wJS. See also https://phabricator.wikimedia.org/T400119.
 
 </file>
 
@@ -3368,7 +3370,7 @@
             </a:pPr>
             <a:r>
               <a:rPr b="1"/>
-              <a:t>The middle image in A. depicts what plane of section?</a:t>
+              <a:t>The middle image in A in the figure at right depicts what plane of section?</a:t>
             </a:r>
           </a:p>
           <a:p>
@@ -3456,7 +3458,7 @@
             </a:pPr>
             <a:r>
               <a:rPr/>
-              <a:t>Cassidy2012-ue Figure 2</a:t>
+              <a:t>Cassidy &amp; Gutchess (2012) Figure 2</a:t>
             </a:r>
           </a:p>
         </p:txBody>
@@ -3503,67 +3505,65 @@
             </a:pPr>
             <a:r>
               <a:rPr/>
-              <a:t>Or “rotational” patterns…</a:t>
-            </a:r>
-          </a:p>
-        </p:txBody>
-      </p:sp>
-      <p:pic>
-        <p:nvPicPr>
-          <p:cNvPr descr="https://media.nature.com/lw767/magazine-assets/d41586-022-02238-1/d41586-022-02238-1_23580834.png?as=webp" id="0" name="Picture 1"/>
-          <p:cNvPicPr>
-            <a:picLocks noGrp="1" noChangeAspect="1"/>
-          </p:cNvPicPr>
-          <p:nvPr/>
-        </p:nvPicPr>
-        <p:blipFill>
-          <a:blip r:embed="rId2"/>
-          <a:stretch>
-            <a:fillRect/>
-          </a:stretch>
-        </p:blipFill>
-        <p:spPr bwMode="auto">
-          <a:xfrm>
-            <a:off x="2819400" y="1193800"/>
-            <a:ext cx="3505200" cy="2882900"/>
-          </a:xfrm>
-          <a:prstGeom prst="rect">
-            <a:avLst/>
-          </a:prstGeom>
-          <a:noFill/>
-          <a:ln w="9525">
-            <a:noFill/>
-            <a:headEnd/>
-            <a:tailEnd/>
-          </a:ln>
-        </p:spPr>
-      </p:pic>
-      <p:sp>
-        <p:nvSpPr>
-          <p:cNvPr id="1" name="TextBox 3"/>
-          <p:cNvSpPr txBox="1"/>
-          <p:nvPr/>
-        </p:nvSpPr>
-        <p:spPr>
-          <a:xfrm>
-            <a:off x="457200" y="4076700"/>
-            <a:ext cx="8229600" cy="508000"/>
-          </a:xfrm>
-          <a:prstGeom prst="rect">
-            <a:avLst/>
-          </a:prstGeom>
-          <a:noFill/>
-        </p:spPr>
-        <p:txBody>
-          <a:bodyPr/>
-          <a:lstStyle/>
-          <a:p>
-            <a:pPr lvl="0" indent="0" marL="0" algn="ctr">
-              <a:buNone/>
-            </a:pPr>
-            <a:r>
-              <a:rPr/>
-              <a:t>Bagnall (2022)</a:t>
+              <a:t>Speech: Goals</a:t>
+            </a:r>
+          </a:p>
+        </p:txBody>
+      </p:sp>
+      <p:sp>
+        <p:nvSpPr>
+          <p:cNvPr id="3" name="Content Placeholder 2"/>
+          <p:cNvSpPr>
+            <a:spLocks noGrp="1"/>
+          </p:cNvSpPr>
+          <p:nvPr>
+            <p:ph idx="1"/>
+          </p:nvPr>
+        </p:nvSpPr>
+        <p:spPr/>
+        <p:txBody>
+          <a:bodyPr/>
+          <a:lstStyle/>
+          <a:p>
+            <a:pPr lvl="0"/>
+            <a:r>
+              <a:rPr/>
+              <a:t>Involuntary vs. voluntary</a:t>
+            </a:r>
+          </a:p>
+          <a:p>
+            <a:pPr lvl="0"/>
+            <a:r>
+              <a:rPr/>
+              <a:t>Vocalizations types</a:t>
+            </a:r>
+          </a:p>
+          <a:p>
+            <a:pPr lvl="1"/>
+            <a:r>
+              <a:rPr/>
+              <a:t>Linguistic</a:t>
+            </a:r>
+          </a:p>
+          <a:p>
+            <a:pPr lvl="1"/>
+            <a:r>
+              <a:rPr/>
+              <a:t>Paralinguistic</a:t>
+            </a:r>
+          </a:p>
+          <a:p>
+            <a:pPr lvl="2"/>
+            <a:r>
+              <a:rPr/>
+              <a:t>Pitch, tone, rhythm, tempo, etc.</a:t>
+            </a:r>
+          </a:p>
+          <a:p>
+            <a:pPr lvl="1"/>
+            <a:r>
+              <a:rPr/>
+              <a:t>Non-linguistic</a:t>
             </a:r>
           </a:p>
         </p:txBody>
@@ -3610,7 +3610,7 @@
             </a:pPr>
             <a:r>
               <a:rPr/>
-              <a:t>Reaching: Goals</a:t>
+              <a:t>Components</a:t>
             </a:r>
           </a:p>
         </p:txBody>
@@ -3622,7 +3622,7 @@
             <a:spLocks noGrp="1"/>
           </p:cNvSpPr>
           <p:nvPr>
-            <p:ph idx="1" sz="half"/>
+            <p:ph idx="1"/>
           </p:nvPr>
         </p:nvSpPr>
         <p:spPr/>
@@ -3633,39 +3633,28 @@
             <a:pPr lvl="0"/>
             <a:r>
               <a:rPr/>
-              <a:t>Move hand (foot/mouth) to contact target</a:t>
+              <a:t>Lips, tongue, mouth</a:t>
             </a:r>
           </a:p>
           <a:p>
             <a:pPr lvl="0"/>
             <a:r>
               <a:rPr/>
-              <a:t>Avoid obstacles</a:t>
-            </a:r>
-          </a:p>
-        </p:txBody>
-      </p:sp>
-      <p:sp>
-        <p:nvSpPr>
-          <p:cNvPr id="4" name="Content Placeholder 3"/>
-          <p:cNvSpPr>
-            <a:spLocks noGrp="1"/>
-          </p:cNvSpPr>
-          <p:nvPr>
-            <p:ph idx="2" sz="half"/>
-          </p:nvPr>
-        </p:nvSpPr>
-        <p:spPr/>
-        <p:txBody>
-          <a:bodyPr/>
-          <a:lstStyle/>
-          <a:p>
-            <a:pPr lvl="0" indent="0" marL="0">
-              <a:buNone/>
-            </a:pPr>
-            <a:r>
-              <a:rPr/>
-              <a:t>Content</a:t>
+              <a:t>Pharynx</a:t>
+            </a:r>
+          </a:p>
+          <a:p>
+            <a:pPr lvl="0"/>
+            <a:r>
+              <a:rPr/>
+              <a:t>Larynx</a:t>
+            </a:r>
+          </a:p>
+          <a:p>
+            <a:pPr lvl="0"/>
+            <a:r>
+              <a:rPr/>
+              <a:t>Lungs</a:t>
             </a:r>
           </a:p>
         </p:txBody>
@@ -3676,202 +3665,6 @@
 </file>
 
 <file path=ppt/slides/slide102.xml><?xml version="1.0" encoding="utf-8"?>
-<p:sld xmlns:a="http://schemas.openxmlformats.org/drawingml/2006/main" xmlns:r="http://schemas.openxmlformats.org/officeDocument/2006/relationships" xmlns:p="http://schemas.openxmlformats.org/presentationml/2006/main">
-  <p:cSld>
-    <p:spTree>
-      <p:nvGrpSpPr>
-        <p:cNvPr id="1" name=""/>
-        <p:cNvGrpSpPr/>
-        <p:nvPr/>
-      </p:nvGrpSpPr>
-      <p:grpSpPr>
-        <a:xfrm>
-          <a:off x="0" y="0"/>
-          <a:ext cx="0" cy="0"/>
-          <a:chOff x="0" y="0"/>
-          <a:chExt cx="0" cy="0"/>
-        </a:xfrm>
-      </p:grpSpPr>
-      <p:sp>
-        <p:nvSpPr>
-          <p:cNvPr id="2" name="Title 1"/>
-          <p:cNvSpPr>
-            <a:spLocks noGrp="1"/>
-          </p:cNvSpPr>
-          <p:nvPr>
-            <p:ph type="title"/>
-          </p:nvPr>
-        </p:nvSpPr>
-        <p:spPr/>
-        <p:txBody>
-          <a:bodyPr/>
-          <a:lstStyle/>
-          <a:p>
-            <a:pPr lvl="0" indent="0" marL="0">
-              <a:buNone/>
-            </a:pPr>
-            <a:r>
-              <a:rPr/>
-              <a:t>Speech: Goals</a:t>
-            </a:r>
-          </a:p>
-        </p:txBody>
-      </p:sp>
-      <p:sp>
-        <p:nvSpPr>
-          <p:cNvPr id="3" name="Content Placeholder 2"/>
-          <p:cNvSpPr>
-            <a:spLocks noGrp="1"/>
-          </p:cNvSpPr>
-          <p:nvPr>
-            <p:ph idx="1"/>
-          </p:nvPr>
-        </p:nvSpPr>
-        <p:spPr/>
-        <p:txBody>
-          <a:bodyPr/>
-          <a:lstStyle/>
-          <a:p>
-            <a:pPr lvl="0"/>
-            <a:r>
-              <a:rPr/>
-              <a:t>Involuntary vs. voluntary</a:t>
-            </a:r>
-          </a:p>
-          <a:p>
-            <a:pPr lvl="0"/>
-            <a:r>
-              <a:rPr/>
-              <a:t>Vocalizations types</a:t>
-            </a:r>
-          </a:p>
-          <a:p>
-            <a:pPr lvl="1"/>
-            <a:r>
-              <a:rPr/>
-              <a:t>Linguistic</a:t>
-            </a:r>
-          </a:p>
-          <a:p>
-            <a:pPr lvl="1"/>
-            <a:r>
-              <a:rPr/>
-              <a:t>Paralinguistic</a:t>
-            </a:r>
-          </a:p>
-          <a:p>
-            <a:pPr lvl="2"/>
-            <a:r>
-              <a:rPr/>
-              <a:t>Pitch, tone, rhythm, tempo, etc.</a:t>
-            </a:r>
-          </a:p>
-          <a:p>
-            <a:pPr lvl="1"/>
-            <a:r>
-              <a:rPr/>
-              <a:t>Non-linguistic</a:t>
-            </a:r>
-          </a:p>
-        </p:txBody>
-      </p:sp>
-    </p:spTree>
-  </p:cSld>
-</p:sld>
-</file>
-
-<file path=ppt/slides/slide103.xml><?xml version="1.0" encoding="utf-8"?>
-<p:sld xmlns:a="http://schemas.openxmlformats.org/drawingml/2006/main" xmlns:r="http://schemas.openxmlformats.org/officeDocument/2006/relationships" xmlns:p="http://schemas.openxmlformats.org/presentationml/2006/main">
-  <p:cSld>
-    <p:spTree>
-      <p:nvGrpSpPr>
-        <p:cNvPr id="1" name=""/>
-        <p:cNvGrpSpPr/>
-        <p:nvPr/>
-      </p:nvGrpSpPr>
-      <p:grpSpPr>
-        <a:xfrm>
-          <a:off x="0" y="0"/>
-          <a:ext cx="0" cy="0"/>
-          <a:chOff x="0" y="0"/>
-          <a:chExt cx="0" cy="0"/>
-        </a:xfrm>
-      </p:grpSpPr>
-      <p:sp>
-        <p:nvSpPr>
-          <p:cNvPr id="2" name="Title 1"/>
-          <p:cNvSpPr>
-            <a:spLocks noGrp="1"/>
-          </p:cNvSpPr>
-          <p:nvPr>
-            <p:ph type="title"/>
-          </p:nvPr>
-        </p:nvSpPr>
-        <p:spPr/>
-        <p:txBody>
-          <a:bodyPr/>
-          <a:lstStyle/>
-          <a:p>
-            <a:pPr lvl="0" indent="0" marL="0">
-              <a:buNone/>
-            </a:pPr>
-            <a:r>
-              <a:rPr/>
-              <a:t>Components</a:t>
-            </a:r>
-          </a:p>
-        </p:txBody>
-      </p:sp>
-      <p:sp>
-        <p:nvSpPr>
-          <p:cNvPr id="3" name="Content Placeholder 2"/>
-          <p:cNvSpPr>
-            <a:spLocks noGrp="1"/>
-          </p:cNvSpPr>
-          <p:nvPr>
-            <p:ph idx="1"/>
-          </p:nvPr>
-        </p:nvSpPr>
-        <p:spPr/>
-        <p:txBody>
-          <a:bodyPr/>
-          <a:lstStyle/>
-          <a:p>
-            <a:pPr lvl="0"/>
-            <a:r>
-              <a:rPr/>
-              <a:t>Lips, tongue, mouth</a:t>
-            </a:r>
-          </a:p>
-          <a:p>
-            <a:pPr lvl="0"/>
-            <a:r>
-              <a:rPr/>
-              <a:t>Pharynx</a:t>
-            </a:r>
-          </a:p>
-          <a:p>
-            <a:pPr lvl="0"/>
-            <a:r>
-              <a:rPr/>
-              <a:t>Larynx</a:t>
-            </a:r>
-          </a:p>
-          <a:p>
-            <a:pPr lvl="0"/>
-            <a:r>
-              <a:rPr/>
-              <a:t>Lungs</a:t>
-            </a:r>
-          </a:p>
-        </p:txBody>
-      </p:sp>
-    </p:spTree>
-  </p:cSld>
-</p:sld>
-</file>
-
-<file path=ppt/slides/slide104.xml><?xml version="1.0" encoding="utf-8"?>
 <p:sld xmlns:a="http://schemas.openxmlformats.org/drawingml/2006/main" xmlns:r="http://schemas.openxmlformats.org/officeDocument/2006/relationships" xmlns:p="http://schemas.openxmlformats.org/presentationml/2006/main">
   <p:cSld>
     <p:spTree>
@@ -3953,7 +3746,7 @@
 </p:sld>
 </file>
 
-<file path=ppt/slides/slide105.xml><?xml version="1.0" encoding="utf-8"?>
+<file path=ppt/slides/slide103.xml><?xml version="1.0" encoding="utf-8"?>
 <p:sld xmlns:a="http://schemas.openxmlformats.org/drawingml/2006/main" xmlns:r="http://schemas.openxmlformats.org/officeDocument/2006/relationships" xmlns:p="http://schemas.openxmlformats.org/presentationml/2006/main">
   <p:cSld>
     <p:spTree>
@@ -4011,7 +3804,7 @@
 </p:sld>
 </file>
 
-<file path=ppt/slides/slide106.xml><?xml version="1.0" encoding="utf-8"?>
+<file path=ppt/slides/slide104.xml><?xml version="1.0" encoding="utf-8"?>
 <p:sld xmlns:a="http://schemas.openxmlformats.org/drawingml/2006/main" xmlns:r="http://schemas.openxmlformats.org/officeDocument/2006/relationships" xmlns:p="http://schemas.openxmlformats.org/presentationml/2006/main">
   <p:cSld>
     <p:spTree>
@@ -4116,7 +3909,7 @@
 </p:sld>
 </file>
 
-<file path=ppt/slides/slide107.xml><?xml version="1.0" encoding="utf-8"?>
+<file path=ppt/slides/slide105.xml><?xml version="1.0" encoding="utf-8"?>
 <p:sld xmlns:a="http://schemas.openxmlformats.org/drawingml/2006/main" xmlns:r="http://schemas.openxmlformats.org/officeDocument/2006/relationships" xmlns:p="http://schemas.openxmlformats.org/presentationml/2006/main">
   <p:cSld>
     <p:spTree>
@@ -4198,7 +3991,7 @@
 </p:sld>
 </file>
 
-<file path=ppt/slides/slide108.xml><?xml version="1.0" encoding="utf-8"?>
+<file path=ppt/slides/slide106.xml><?xml version="1.0" encoding="utf-8"?>
 <p:sld xmlns:a="http://schemas.openxmlformats.org/drawingml/2006/main" xmlns:r="http://schemas.openxmlformats.org/officeDocument/2006/relationships" xmlns:p="http://schemas.openxmlformats.org/presentationml/2006/main">
   <p:cSld>
     <p:spTree>
@@ -4280,7 +4073,7 @@
 </p:sld>
 </file>
 
-<file path=ppt/slides/slide109.xml><?xml version="1.0" encoding="utf-8"?>
+<file path=ppt/slides/slide107.xml><?xml version="1.0" encoding="utf-8"?>
 <p:sld xmlns:a="http://schemas.openxmlformats.org/drawingml/2006/main" xmlns:r="http://schemas.openxmlformats.org/officeDocument/2006/relationships" xmlns:p="http://schemas.openxmlformats.org/presentationml/2006/main">
   <p:cSld>
     <p:spTree>
@@ -4332,6 +4125,136 @@
 </p:sld>
 </file>
 
+<file path=ppt/slides/slide108.xml><?xml version="1.0" encoding="utf-8"?>
+<p:sld xmlns:a="http://schemas.openxmlformats.org/drawingml/2006/main" xmlns:r="http://schemas.openxmlformats.org/officeDocument/2006/relationships" xmlns:p="http://schemas.openxmlformats.org/presentationml/2006/main">
+  <p:cSld>
+    <p:spTree>
+      <p:nvGrpSpPr>
+        <p:cNvPr id="1" name=""/>
+        <p:cNvGrpSpPr/>
+        <p:nvPr/>
+      </p:nvGrpSpPr>
+      <p:grpSpPr>
+        <a:xfrm>
+          <a:off x="0" y="0"/>
+          <a:ext cx="0" cy="0"/>
+          <a:chOff x="0" y="0"/>
+          <a:chExt cx="0" cy="0"/>
+        </a:xfrm>
+      </p:grpSpPr>
+      <p:sp>
+        <p:nvSpPr>
+          <p:cNvPr id="3" name="Content Placeholder 2"/>
+          <p:cNvSpPr>
+            <a:spLocks noGrp="1"/>
+          </p:cNvSpPr>
+          <p:nvPr>
+            <p:ph idx="1"/>
+          </p:nvPr>
+        </p:nvSpPr>
+        <p:spPr/>
+        <p:txBody>
+          <a:bodyPr/>
+          <a:lstStyle/>
+          <a:p>
+            <a:pPr lvl="0" indent="0" marL="0">
+              <a:buNone/>
+            </a:pPr>
+            <a:r>
+              <a:rPr/>
+              <a:t>Inputs to cranial nerve nuclei involved in speech from cortex and midbrain.</a:t>
+            </a:r>
+          </a:p>
+        </p:txBody>
+      </p:sp>
+    </p:spTree>
+  </p:cSld>
+</p:sld>
+</file>
+
+<file path=ppt/slides/slide109.xml><?xml version="1.0" encoding="utf-8"?>
+<p:sld xmlns:a="http://schemas.openxmlformats.org/drawingml/2006/main" xmlns:r="http://schemas.openxmlformats.org/officeDocument/2006/relationships" xmlns:p="http://schemas.openxmlformats.org/presentationml/2006/main">
+  <p:cSld>
+    <p:spTree>
+      <p:nvGrpSpPr>
+        <p:cNvPr id="1" name=""/>
+        <p:cNvGrpSpPr/>
+        <p:nvPr/>
+      </p:nvGrpSpPr>
+      <p:grpSpPr>
+        <a:xfrm>
+          <a:off x="0" y="0"/>
+          <a:ext cx="0" cy="0"/>
+          <a:chOff x="0" y="0"/>
+          <a:chExt cx="0" cy="0"/>
+        </a:xfrm>
+      </p:grpSpPr>
+      <p:sp>
+        <p:nvSpPr>
+          <p:cNvPr id="2" name="Title 1"/>
+          <p:cNvSpPr>
+            <a:spLocks noGrp="1"/>
+          </p:cNvSpPr>
+          <p:nvPr>
+            <p:ph type="title"/>
+          </p:nvPr>
+        </p:nvSpPr>
+        <p:spPr/>
+        <p:txBody>
+          <a:bodyPr/>
+          <a:lstStyle/>
+          <a:p>
+            <a:pPr lvl="0" indent="0" marL="0">
+              <a:buNone/>
+            </a:pPr>
+            <a:r>
+              <a:rPr/>
+              <a:t>Example</a:t>
+            </a:r>
+          </a:p>
+        </p:txBody>
+      </p:sp>
+      <p:sp>
+        <p:nvSpPr>
+          <p:cNvPr id="3" name="Content Placeholder 2"/>
+          <p:cNvSpPr>
+            <a:spLocks noGrp="1"/>
+          </p:cNvSpPr>
+          <p:nvPr>
+            <p:ph idx="1"/>
+          </p:nvPr>
+        </p:nvSpPr>
+        <p:spPr/>
+        <p:txBody>
+          <a:bodyPr/>
+          <a:lstStyle/>
+          <a:p>
+            <a:pPr lvl="0" indent="0" marL="0">
+              <a:buNone/>
+            </a:pPr>
+            <a:r>
+              <a:rPr>
+                <a:hlinkClick r:id="rId2"/>
+              </a:rPr>
+              <a:t>https://www.youtube.com/watch?v=4X4Fy8YqysY</a:t>
+            </a:r>
+          </a:p>
+          <a:p>
+            <a:pPr lvl="0" indent="0" marL="0">
+              <a:buNone/>
+            </a:pPr>
+            <a:r>
+              <a:rPr/>
+              <a:t>– VideoCollectables (2014)</a:t>
+            </a:r>
+          </a:p>
+        </p:txBody>
+      </p:sp>
+    </p:spTree>
+  </p:cSld>
+</p:sld>
+</file>
+
 <file path=ppt/slides/slide11.xml><?xml version="1.0" encoding="utf-8"?>
 <p:sld xmlns:a="http://schemas.openxmlformats.org/drawingml/2006/main" xmlns:r="http://schemas.openxmlformats.org/officeDocument/2006/relationships" xmlns:p="http://schemas.openxmlformats.org/presentationml/2006/main">
   <p:cSld>
@@ -4372,7 +4295,7 @@
             </a:pPr>
             <a:r>
               <a:rPr b="1"/>
-              <a:t>The middle image in A. depicts what plane of section?</a:t>
+              <a:t>The middle image in A in the figure at right depicts what plane of section?</a:t>
             </a:r>
           </a:p>
           <a:p>
@@ -4460,7 +4383,7 @@
             </a:pPr>
             <a:r>
               <a:rPr/>
-              <a:t>Cassidy2012-ue Figure 2</a:t>
+              <a:t>Cassidy &amp; Gutchess (2012) Figure 2</a:t>
             </a:r>
           </a:p>
         </p:txBody>
@@ -4489,6 +4412,31 @@
       </p:grpSpPr>
       <p:sp>
         <p:nvSpPr>
+          <p:cNvPr id="2" name="Title 1"/>
+          <p:cNvSpPr>
+            <a:spLocks noGrp="1"/>
+          </p:cNvSpPr>
+          <p:nvPr>
+            <p:ph type="title"/>
+          </p:nvPr>
+        </p:nvSpPr>
+        <p:spPr/>
+        <p:txBody>
+          <a:bodyPr/>
+          <a:lstStyle/>
+          <a:p>
+            <a:pPr lvl="0" indent="0" marL="0">
+              <a:buNone/>
+            </a:pPr>
+            <a:r>
+              <a:rPr/>
+              <a:t>Considerations</a:t>
+            </a:r>
+          </a:p>
+        </p:txBody>
+      </p:sp>
+      <p:sp>
+        <p:nvSpPr>
           <p:cNvPr id="3" name="Content Placeholder 2"/>
           <p:cNvSpPr>
             <a:spLocks noGrp="1"/>
@@ -4502,12 +4450,52 @@
           <a:bodyPr/>
           <a:lstStyle/>
           <a:p>
-            <a:pPr lvl="0" indent="0" marL="0">
-              <a:buNone/>
-            </a:pPr>
-            <a:r>
-              <a:rPr/>
-              <a:t>Inputs to cranial nerve nuclei involved in speech from cortex and midbrain.</a:t>
+            <a:pPr lvl="0"/>
+            <a:r>
+              <a:rPr/>
+              <a:t>Hierarchical, parallel control</a:t>
+            </a:r>
+          </a:p>
+          <a:p>
+            <a:pPr lvl="0"/>
+            <a:r>
+              <a:rPr/>
+              <a:t>Sensory feedback</a:t>
+            </a:r>
+          </a:p>
+          <a:p>
+            <a:pPr lvl="1"/>
+            <a:r>
+              <a:rPr/>
+              <a:t>Vocal muscle stretch receptors</a:t>
+            </a:r>
+          </a:p>
+          <a:p>
+            <a:pPr lvl="1"/>
+            <a:r>
+              <a:rPr/>
+              <a:t>Auditory</a:t>
+            </a:r>
+          </a:p>
+          <a:p>
+            <a:pPr lvl="0"/>
+            <a:r>
+              <a:rPr/>
+              <a:t>Vocal muscles like fingers</a:t>
+            </a:r>
+          </a:p>
+          <a:p>
+            <a:pPr lvl="1"/>
+            <a:r>
+              <a:rPr/>
+              <a:t>Large area of M1</a:t>
+            </a:r>
+          </a:p>
+          <a:p>
+            <a:pPr lvl="1"/>
+            <a:r>
+              <a:rPr/>
+              <a:t>Individuated control over</a:t>
             </a:r>
           </a:p>
         </p:txBody>
@@ -4518,201 +4506,6 @@
 </file>
 
 <file path=ppt/slides/slide111.xml><?xml version="1.0" encoding="utf-8"?>
-<p:sld xmlns:a="http://schemas.openxmlformats.org/drawingml/2006/main" xmlns:r="http://schemas.openxmlformats.org/officeDocument/2006/relationships" xmlns:p="http://schemas.openxmlformats.org/presentationml/2006/main">
-  <p:cSld>
-    <p:spTree>
-      <p:nvGrpSpPr>
-        <p:cNvPr id="1" name=""/>
-        <p:cNvGrpSpPr/>
-        <p:nvPr/>
-      </p:nvGrpSpPr>
-      <p:grpSpPr>
-        <a:xfrm>
-          <a:off x="0" y="0"/>
-          <a:ext cx="0" cy="0"/>
-          <a:chOff x="0" y="0"/>
-          <a:chExt cx="0" cy="0"/>
-        </a:xfrm>
-      </p:grpSpPr>
-      <p:sp>
-        <p:nvSpPr>
-          <p:cNvPr id="2" name="Title 1"/>
-          <p:cNvSpPr>
-            <a:spLocks noGrp="1"/>
-          </p:cNvSpPr>
-          <p:nvPr>
-            <p:ph type="title"/>
-          </p:nvPr>
-        </p:nvSpPr>
-        <p:spPr/>
-        <p:txBody>
-          <a:bodyPr/>
-          <a:lstStyle/>
-          <a:p>
-            <a:pPr lvl="0" indent="0" marL="0">
-              <a:buNone/>
-            </a:pPr>
-            <a:r>
-              <a:rPr/>
-              <a:t>Example</a:t>
-            </a:r>
-          </a:p>
-        </p:txBody>
-      </p:sp>
-      <p:sp>
-        <p:nvSpPr>
-          <p:cNvPr id="3" name="Content Placeholder 2"/>
-          <p:cNvSpPr>
-            <a:spLocks noGrp="1"/>
-          </p:cNvSpPr>
-          <p:nvPr>
-            <p:ph idx="1"/>
-          </p:nvPr>
-        </p:nvSpPr>
-        <p:spPr/>
-        <p:txBody>
-          <a:bodyPr/>
-          <a:lstStyle/>
-          <a:p>
-            <a:pPr lvl="0" indent="0" marL="0">
-              <a:buNone/>
-            </a:pPr>
-            <a:r>
-              <a:rPr>
-                <a:hlinkClick r:id="rId2"/>
-              </a:rPr>
-              <a:t>https://www.youtube.com/watch?v=4X4Fy8YqysY</a:t>
-            </a:r>
-          </a:p>
-          <a:p>
-            <a:pPr lvl="0" indent="0" marL="0">
-              <a:buNone/>
-            </a:pPr>
-            <a:r>
-              <a:rPr/>
-              <a:t>– VideoCollectables (2014)</a:t>
-            </a:r>
-          </a:p>
-        </p:txBody>
-      </p:sp>
-    </p:spTree>
-  </p:cSld>
-</p:sld>
-</file>
-
-<file path=ppt/slides/slide112.xml><?xml version="1.0" encoding="utf-8"?>
-<p:sld xmlns:a="http://schemas.openxmlformats.org/drawingml/2006/main" xmlns:r="http://schemas.openxmlformats.org/officeDocument/2006/relationships" xmlns:p="http://schemas.openxmlformats.org/presentationml/2006/main">
-  <p:cSld>
-    <p:spTree>
-      <p:nvGrpSpPr>
-        <p:cNvPr id="1" name=""/>
-        <p:cNvGrpSpPr/>
-        <p:nvPr/>
-      </p:nvGrpSpPr>
-      <p:grpSpPr>
-        <a:xfrm>
-          <a:off x="0" y="0"/>
-          <a:ext cx="0" cy="0"/>
-          <a:chOff x="0" y="0"/>
-          <a:chExt cx="0" cy="0"/>
-        </a:xfrm>
-      </p:grpSpPr>
-      <p:sp>
-        <p:nvSpPr>
-          <p:cNvPr id="2" name="Title 1"/>
-          <p:cNvSpPr>
-            <a:spLocks noGrp="1"/>
-          </p:cNvSpPr>
-          <p:nvPr>
-            <p:ph type="title"/>
-          </p:nvPr>
-        </p:nvSpPr>
-        <p:spPr/>
-        <p:txBody>
-          <a:bodyPr/>
-          <a:lstStyle/>
-          <a:p>
-            <a:pPr lvl="0" indent="0" marL="0">
-              <a:buNone/>
-            </a:pPr>
-            <a:r>
-              <a:rPr/>
-              <a:t>Considerations</a:t>
-            </a:r>
-          </a:p>
-        </p:txBody>
-      </p:sp>
-      <p:sp>
-        <p:nvSpPr>
-          <p:cNvPr id="3" name="Content Placeholder 2"/>
-          <p:cNvSpPr>
-            <a:spLocks noGrp="1"/>
-          </p:cNvSpPr>
-          <p:nvPr>
-            <p:ph idx="1"/>
-          </p:nvPr>
-        </p:nvSpPr>
-        <p:spPr/>
-        <p:txBody>
-          <a:bodyPr/>
-          <a:lstStyle/>
-          <a:p>
-            <a:pPr lvl="0"/>
-            <a:r>
-              <a:rPr/>
-              <a:t>Hierarchical, parallel control</a:t>
-            </a:r>
-          </a:p>
-          <a:p>
-            <a:pPr lvl="0"/>
-            <a:r>
-              <a:rPr/>
-              <a:t>Sensory feedback</a:t>
-            </a:r>
-          </a:p>
-          <a:p>
-            <a:pPr lvl="1"/>
-            <a:r>
-              <a:rPr/>
-              <a:t>Vocal muscle stretch receptors</a:t>
-            </a:r>
-          </a:p>
-          <a:p>
-            <a:pPr lvl="1"/>
-            <a:r>
-              <a:rPr/>
-              <a:t>Auditory</a:t>
-            </a:r>
-          </a:p>
-          <a:p>
-            <a:pPr lvl="0"/>
-            <a:r>
-              <a:rPr/>
-              <a:t>Vocal muscles like fingers</a:t>
-            </a:r>
-          </a:p>
-          <a:p>
-            <a:pPr lvl="1"/>
-            <a:r>
-              <a:rPr/>
-              <a:t>Large area of M1</a:t>
-            </a:r>
-          </a:p>
-          <a:p>
-            <a:pPr lvl="1"/>
-            <a:r>
-              <a:rPr/>
-              <a:t>Individuated control over</a:t>
-            </a:r>
-          </a:p>
-        </p:txBody>
-      </p:sp>
-    </p:spTree>
-  </p:cSld>
-</p:sld>
-</file>
-
-<file path=ppt/slides/slide113.xml><?xml version="1.0" encoding="utf-8"?>
 <p:sld xmlns:a="http://schemas.openxmlformats.org/drawingml/2006/main" xmlns:r="http://schemas.openxmlformats.org/officeDocument/2006/relationships" xmlns:p="http://schemas.openxmlformats.org/presentationml/2006/main">
   <p:cSld>
     <p:spTree>
@@ -4794,6 +4587,181 @@
 </p:sld>
 </file>
 
+<file path=ppt/slides/slide112.xml><?xml version="1.0" encoding="utf-8"?>
+<p:sld xmlns:a="http://schemas.openxmlformats.org/drawingml/2006/main" xmlns:r="http://schemas.openxmlformats.org/officeDocument/2006/relationships" xmlns:p="http://schemas.openxmlformats.org/presentationml/2006/main">
+  <p:cSld>
+    <p:spTree>
+      <p:nvGrpSpPr>
+        <p:cNvPr id="1" name=""/>
+        <p:cNvGrpSpPr/>
+        <p:nvPr/>
+      </p:nvGrpSpPr>
+      <p:grpSpPr>
+        <a:xfrm>
+          <a:off x="0" y="0"/>
+          <a:ext cx="0" cy="0"/>
+          <a:chOff x="0" y="0"/>
+          <a:chExt cx="0" cy="0"/>
+        </a:xfrm>
+      </p:grpSpPr>
+      <p:sp>
+        <p:nvSpPr>
+          <p:cNvPr id="2" name="Title 1"/>
+          <p:cNvSpPr>
+            <a:spLocks noGrp="1"/>
+          </p:cNvSpPr>
+          <p:nvPr>
+            <p:ph type="title"/>
+          </p:nvPr>
+        </p:nvSpPr>
+        <p:spPr/>
+        <p:txBody>
+          <a:bodyPr/>
+          <a:lstStyle/>
+          <a:p>
+            <a:pPr lvl="0" indent="0" marL="0">
+              <a:buNone/>
+            </a:pPr>
+            <a:r>
+              <a:rPr/>
+              <a:t>Illustrative motor systems: Interim summary</a:t>
+            </a:r>
+          </a:p>
+        </p:txBody>
+      </p:sp>
+      <p:sp>
+        <p:nvSpPr>
+          <p:cNvPr id="3" name="Content Placeholder 2"/>
+          <p:cNvSpPr>
+            <a:spLocks noGrp="1"/>
+          </p:cNvSpPr>
+          <p:nvPr>
+            <p:ph idx="1"/>
+          </p:nvPr>
+        </p:nvSpPr>
+        <p:spPr/>
+        <p:txBody>
+          <a:bodyPr/>
+          <a:lstStyle/>
+          <a:p>
+            <a:pPr lvl="0"/>
+            <a:r>
+              <a:rPr/>
+              <a:t>Many (most?) behaviors involve sequences of</a:t>
+            </a:r>
+          </a:p>
+          <a:p>
+            <a:pPr lvl="1"/>
+            <a:r>
+              <a:rPr/>
+              <a:t>looking/orienting + locomotion + reaching/manipulation + vocalization</a:t>
+            </a:r>
+          </a:p>
+          <a:p>
+            <a:pPr lvl="0"/>
+            <a:r>
+              <a:rPr/>
+              <a:t>Parallel, coordinated, sequential outputs to multiple motor systems</a:t>
+            </a:r>
+          </a:p>
+          <a:p>
+            <a:pPr lvl="0"/>
+            <a:r>
+              <a:rPr/>
+              <a:t>Direct (cerebral) cortical control over muscles of eyes, fingers, vocal apparatus</a:t>
+            </a:r>
+          </a:p>
+          <a:p>
+            <a:pPr lvl="0"/>
+            <a:r>
+              <a:rPr/>
+              <a:t>Feedback critical, often multisensory</a:t>
+            </a:r>
+          </a:p>
+          <a:p>
+            <a:pPr lvl="0"/>
+            <a:r>
+              <a:rPr/>
+              <a:t>NS exploits physics of body</a:t>
+            </a:r>
+          </a:p>
+          <a:p>
+            <a:pPr lvl="0" indent="0" marL="0">
+              <a:buNone/>
+            </a:pPr>
+            <a:r>
+              <a:rPr/>
+              <a:t>By The original uploader was Davigoli at English Wikipedia. - Transferred from en.wikipedia to Commons., https://at.or.at/hans/solitude/, GPLv2, https://commons.wikimedia.org/w/index.php?curid=3939703</a:t>
+            </a:r>
+          </a:p>
+          <a:p>
+            <a:pPr lvl="0" indent="0" marL="0">
+              <a:buNone/>
+            </a:pPr>
+            <a:r>
+              <a:rPr/>
+              <a:t>By The original uploader was Davigoli at English Wikipedia. - Transferred from en.wikipedia to Commons., https://at.or.at/hans/solitude/, GPLv2, https://commons.wikimedia.org/w/index.php?curid=3939703</a:t>
+            </a:r>
+          </a:p>
+        </p:txBody>
+      </p:sp>
+    </p:spTree>
+  </p:cSld>
+</p:sld>
+</file>
+
+<file path=ppt/slides/slide113.xml><?xml version="1.0" encoding="utf-8"?>
+<p:sld xmlns:a="http://schemas.openxmlformats.org/drawingml/2006/main" xmlns:r="http://schemas.openxmlformats.org/officeDocument/2006/relationships" xmlns:p="http://schemas.openxmlformats.org/presentationml/2006/main">
+  <p:cSld>
+    <p:spTree>
+      <p:nvGrpSpPr>
+        <p:cNvPr id="1" name=""/>
+        <p:cNvGrpSpPr/>
+        <p:nvPr/>
+      </p:nvGrpSpPr>
+      <p:grpSpPr>
+        <a:xfrm>
+          <a:off x="0" y="0"/>
+          <a:ext cx="0" cy="0"/>
+          <a:chOff x="0" y="0"/>
+          <a:chExt cx="0" cy="0"/>
+        </a:xfrm>
+      </p:grpSpPr>
+      <p:sp>
+        <p:nvSpPr>
+          <p:cNvPr id="2" name="Title 1"/>
+          <p:cNvSpPr>
+            <a:spLocks noGrp="1"/>
+          </p:cNvSpPr>
+          <p:nvPr>
+            <p:ph type="title"/>
+          </p:nvPr>
+        </p:nvSpPr>
+        <p:spPr>
+          <a:xfrm>
+            <a:off x="722313" y="3305176"/>
+            <a:ext cx="7772400" cy="1021556"/>
+          </a:xfrm>
+        </p:spPr>
+        <p:txBody>
+          <a:bodyPr/>
+          <a:lstStyle/>
+          <a:p>
+            <a:pPr lvl="0" indent="0" marL="0">
+              <a:buNone/>
+            </a:pPr>
+            <a:r>
+              <a:rPr/>
+              <a:t>Wrap-up</a:t>
+            </a:r>
+          </a:p>
+        </p:txBody>
+      </p:sp>
+    </p:spTree>
+  </p:cSld>
+</p:sld>
+</file>
+
 <file path=ppt/slides/slide114.xml><?xml version="1.0" encoding="utf-8"?>
 <p:sld xmlns:a="http://schemas.openxmlformats.org/drawingml/2006/main" xmlns:r="http://schemas.openxmlformats.org/officeDocument/2006/relationships" xmlns:p="http://schemas.openxmlformats.org/presentationml/2006/main">
   <p:cSld>
@@ -4831,83 +4799,7 @@
             </a:pPr>
             <a:r>
               <a:rPr/>
-              <a:t>Illustrative motor systems: Interim summary</a:t>
-            </a:r>
-          </a:p>
-        </p:txBody>
-      </p:sp>
-      <p:sp>
-        <p:nvSpPr>
-          <p:cNvPr id="3" name="Content Placeholder 2"/>
-          <p:cNvSpPr>
-            <a:spLocks noGrp="1"/>
-          </p:cNvSpPr>
-          <p:nvPr>
-            <p:ph idx="1"/>
-          </p:nvPr>
-        </p:nvSpPr>
-        <p:spPr/>
-        <p:txBody>
-          <a:bodyPr/>
-          <a:lstStyle/>
-          <a:p>
-            <a:pPr lvl="0"/>
-            <a:r>
-              <a:rPr/>
-              <a:t>Many (most?) behaviors involve sequences of</a:t>
-            </a:r>
-          </a:p>
-          <a:p>
-            <a:pPr lvl="1"/>
-            <a:r>
-              <a:rPr/>
-              <a:t>looking/orienting + locomotion + reaching/manipulation + vocalization</a:t>
-            </a:r>
-          </a:p>
-          <a:p>
-            <a:pPr lvl="0"/>
-            <a:r>
-              <a:rPr/>
-              <a:t>Parallel, coordinated, sequential outputs to multiple motor systems</a:t>
-            </a:r>
-          </a:p>
-          <a:p>
-            <a:pPr lvl="0"/>
-            <a:r>
-              <a:rPr/>
-              <a:t>Direct (cerebral) cortical control over muscles of eyes, fingers, vocal apparatus</a:t>
-            </a:r>
-          </a:p>
-          <a:p>
-            <a:pPr lvl="0"/>
-            <a:r>
-              <a:rPr/>
-              <a:t>Feedback critical, often multisensory</a:t>
-            </a:r>
-          </a:p>
-          <a:p>
-            <a:pPr lvl="0"/>
-            <a:r>
-              <a:rPr/>
-              <a:t>NS exploits physics of body</a:t>
-            </a:r>
-          </a:p>
-          <a:p>
-            <a:pPr lvl="0" indent="0" marL="0">
-              <a:buNone/>
-            </a:pPr>
-            <a:r>
-              <a:rPr/>
-              <a:t>By The original uploader was Davigoli at English Wikipedia. - Transferred from en.wikipedia to Commons., https://at.or.at/hans/solitude/, GPLv2, https://commons.wikimedia.org/w/index.php?curid=3939703</a:t>
-            </a:r>
-          </a:p>
-          <a:p>
-            <a:pPr lvl="0" indent="0" marL="0">
-              <a:buNone/>
-            </a:pPr>
-            <a:r>
-              <a:rPr/>
-              <a:t>By The original uploader was Davigoli at English Wikipedia. - Transferred from en.wikipedia to Commons., https://at.or.at/hans/solitude/, GPLv2, https://commons.wikimedia.org/w/index.php?curid=3939703</a:t>
+              <a:t>Main points</a:t>
             </a:r>
           </a:p>
         </p:txBody>
@@ -4944,12 +4836,7 @@
             <p:ph type="title"/>
           </p:nvPr>
         </p:nvSpPr>
-        <p:spPr>
-          <a:xfrm>
-            <a:off x="722313" y="3305176"/>
-            <a:ext cx="7772400" cy="1021556"/>
-          </a:xfrm>
-        </p:spPr>
+        <p:spPr/>
         <p:txBody>
           <a:bodyPr/>
           <a:lstStyle/>
@@ -4959,7 +4846,30 @@
             </a:pPr>
             <a:r>
               <a:rPr/>
-              <a:t>Wrap-up</a:t>
+              <a:t>Next time</a:t>
+            </a:r>
+          </a:p>
+        </p:txBody>
+      </p:sp>
+      <p:sp>
+        <p:nvSpPr>
+          <p:cNvPr id="3" name="Content Placeholder 2"/>
+          <p:cNvSpPr>
+            <a:spLocks noGrp="1"/>
+          </p:cNvSpPr>
+          <p:nvPr>
+            <p:ph idx="1"/>
+          </p:nvPr>
+        </p:nvSpPr>
+        <p:spPr/>
+        <p:txBody>
+          <a:bodyPr/>
+          <a:lstStyle/>
+          <a:p>
+            <a:pPr lvl="0"/>
+            <a:r>
+              <a:rPr/>
+              <a:t>Perception</a:t>
             </a:r>
           </a:p>
         </p:txBody>
@@ -4996,7 +4906,12 @@
             <p:ph type="title"/>
           </p:nvPr>
         </p:nvSpPr>
-        <p:spPr/>
+        <p:spPr>
+          <a:xfrm>
+            <a:off x="722313" y="3305176"/>
+            <a:ext cx="7772400" cy="1021556"/>
+          </a:xfrm>
+        </p:spPr>
         <p:txBody>
           <a:bodyPr/>
           <a:lstStyle/>
@@ -5006,7 +4921,7 @@
             </a:pPr>
             <a:r>
               <a:rPr/>
-              <a:t>Main points</a:t>
+              <a:t>Resources</a:t>
             </a:r>
           </a:p>
         </p:txBody>
@@ -5053,7 +4968,7 @@
             </a:pPr>
             <a:r>
               <a:rPr/>
-              <a:t>Next time</a:t>
+              <a:t>About</a:t>
             </a:r>
           </a:p>
         </p:txBody>
@@ -5073,10 +4988,67 @@
           <a:bodyPr/>
           <a:lstStyle/>
           <a:p>
-            <a:pPr lvl="0"/>
-            <a:r>
-              <a:rPr/>
-              <a:t>Perception</a:t>
+            <a:pPr lvl="0" indent="0" marL="0">
+              <a:buNone/>
+            </a:pPr>
+            <a:r>
+              <a:rPr/>
+              <a:t>This talk was produced using </a:t>
+            </a:r>
+            <a:r>
+              <a:rPr>
+                <a:hlinkClick r:id="rId2"/>
+              </a:rPr>
+              <a:t>Quarto</a:t>
+            </a:r>
+            <a:r>
+              <a:rPr/>
+              <a:t>, using the </a:t>
+            </a:r>
+            <a:r>
+              <a:rPr>
+                <a:hlinkClick r:id="rId3"/>
+              </a:rPr>
+              <a:t>RStudio</a:t>
+            </a:r>
+            <a:r>
+              <a:rPr/>
+              <a:t> Integrated Development Environment (IDE), version 2026.1.0.392.</a:t>
+            </a:r>
+          </a:p>
+          <a:p>
+            <a:pPr lvl="0" indent="0" marL="0">
+              <a:buNone/>
+            </a:pPr>
+            <a:r>
+              <a:rPr/>
+              <a:t>The source files are in R and R Markdown, then rendered to HTML using the </a:t>
+            </a:r>
+            <a:r>
+              <a:rPr>
+                <a:hlinkClick r:id="rId4"/>
+              </a:rPr>
+              <a:t>revealJS</a:t>
+            </a:r>
+            <a:r>
+              <a:rPr/>
+              <a:t> framework. The HTML slides are hosted in a </a:t>
+            </a:r>
+            <a:r>
+              <a:rPr>
+                <a:hlinkClick r:id="rId5"/>
+              </a:rPr>
+              <a:t>GitHub repo</a:t>
+            </a:r>
+            <a:r>
+              <a:rPr/>
+              <a:t> and served by GitHub pages: </a:t>
+            </a:r>
+            <a:r>
+              <a:rPr>
+                <a:hlinkClick r:id="rId6"/>
+              </a:rPr>
+              <a:t>https://psu-psychology.github.io/psy-511-scan-fdns-2026-spring/</a:t>
             </a:r>
           </a:p>
         </p:txBody>
@@ -5113,12 +5085,7 @@
             <p:ph type="title"/>
           </p:nvPr>
         </p:nvSpPr>
-        <p:spPr>
-          <a:xfrm>
-            <a:off x="722313" y="3305176"/>
-            <a:ext cx="7772400" cy="1021556"/>
-          </a:xfrm>
-        </p:spPr>
+        <p:spPr/>
         <p:txBody>
           <a:bodyPr/>
           <a:lstStyle/>
@@ -5128,41 +5095,19 @@
             </a:pPr>
             <a:r>
               <a:rPr/>
-              <a:t>Resources</a:t>
-            </a:r>
-          </a:p>
-        </p:txBody>
-      </p:sp>
-    </p:spTree>
-  </p:cSld>
-</p:sld>
-</file>
-
-<file path=ppt/slides/slide119.xml><?xml version="1.0" encoding="utf-8"?>
-<p:sld xmlns:a="http://schemas.openxmlformats.org/drawingml/2006/main" xmlns:r="http://schemas.openxmlformats.org/officeDocument/2006/relationships" xmlns:p="http://schemas.openxmlformats.org/presentationml/2006/main">
-  <p:cSld>
-    <p:spTree>
-      <p:nvGrpSpPr>
-        <p:cNvPr id="1" name=""/>
-        <p:cNvGrpSpPr/>
-        <p:nvPr/>
-      </p:nvGrpSpPr>
-      <p:grpSpPr>
-        <a:xfrm>
-          <a:off x="0" y="0"/>
-          <a:ext cx="0" cy="0"/>
-          <a:chOff x="0" y="0"/>
-          <a:chExt cx="0" cy="0"/>
-        </a:xfrm>
-      </p:grpSpPr>
-      <p:sp>
-        <p:nvSpPr>
-          <p:cNvPr id="2" name="Title 1"/>
-          <p:cNvSpPr>
-            <a:spLocks noGrp="1"/>
-          </p:cNvSpPr>
-          <p:nvPr>
-            <p:ph type="title"/>
+              <a:t>References</a:t>
+            </a:r>
+          </a:p>
+        </p:txBody>
+      </p:sp>
+      <p:sp>
+        <p:nvSpPr>
+          <p:cNvPr id="3" name="Content Placeholder 2"/>
+          <p:cNvSpPr>
+            <a:spLocks noGrp="1"/>
+          </p:cNvSpPr>
+          <p:nvPr>
+            <p:ph idx="1"/>
           </p:nvPr>
         </p:nvSpPr>
         <p:spPr/>
@@ -5175,52 +5120,60 @@
             </a:pPr>
             <a:r>
               <a:rPr/>
-              <a:t>About</a:t>
-            </a:r>
-          </a:p>
-        </p:txBody>
-      </p:sp>
-      <p:sp>
-        <p:nvSpPr>
-          <p:cNvPr id="3" name="Content Placeholder 2"/>
-          <p:cNvSpPr>
-            <a:spLocks noGrp="1"/>
-          </p:cNvSpPr>
-          <p:nvPr>
-            <p:ph idx="1"/>
-          </p:nvPr>
-        </p:nvSpPr>
-        <p:spPr/>
-        <p:txBody>
-          <a:bodyPr/>
-          <a:lstStyle/>
-          <a:p>
-            <a:pPr lvl="0" indent="0" marL="0">
-              <a:buNone/>
-            </a:pPr>
-            <a:r>
-              <a:rPr/>
-              <a:t>This talk was produced using </a:t>
+              <a:t>Bagnall, M. W. (2022). Neurons that control walking go round in circles. </a:t>
+            </a:r>
+            <a:r>
+              <a:rPr i="1"/>
+              <a:t>Nature</a:t>
+            </a:r>
+            <a:r>
+              <a:rPr/>
+              <a:t>, </a:t>
+            </a:r>
+            <a:r>
+              <a:rPr i="1"/>
+              <a:t>610</a:t>
+            </a:r>
+            <a:r>
+              <a:rPr/>
+              <a:t>, 453–454. </a:t>
             </a:r>
             <a:r>
               <a:rPr>
                 <a:hlinkClick r:id="rId2"/>
               </a:rPr>
-              <a:t>Quarto</a:t>
-            </a:r>
-            <a:r>
-              <a:rPr/>
-              <a:t>, using the </a:t>
+              <a:t>https://doi.org/10.1038/d41586-022-02238-1</a:t>
+            </a:r>
+          </a:p>
+          <a:p>
+            <a:pPr lvl="0" indent="0" marL="0">
+              <a:buNone/>
+            </a:pPr>
+            <a:r>
+              <a:rPr/>
+              <a:t>Blumberg, M. S., &amp; Adolph, K. E. (2023). Infant action and cognition: What’s at stake? </a:t>
+            </a:r>
+            <a:r>
+              <a:rPr i="1"/>
+              <a:t>Trends in Cognitive Sciences</a:t>
+            </a:r>
+            <a:r>
+              <a:rPr/>
+              <a:t>, </a:t>
+            </a:r>
+            <a:r>
+              <a:rPr i="1"/>
+              <a:t>27</a:t>
+            </a:r>
+            <a:r>
+              <a:rPr/>
+              <a:t>(8), 696–698. </a:t>
             </a:r>
             <a:r>
               <a:rPr>
                 <a:hlinkClick r:id="rId3"/>
               </a:rPr>
-              <a:t>RStudio</a:t>
-            </a:r>
-            <a:r>
-              <a:rPr/>
-              <a:t> Integrated Development Environment (IDE), version 2026.1.0.392.</a:t>
+              <a:t>https://doi.org/10.1016/j.tics.2023.05.008</a:t>
             </a:r>
           </a:p>
           <a:p>
@@ -5229,33 +5182,420 @@
             </a:pPr>
             <a:r>
               <a:rPr/>
-              <a:t>The source files are in R and R Markdown, then rendered to HTML using the </a:t>
+              <a:t>Cantú, H., Nantel, J., Millán, M., Paquette, C., &amp; Côté, J. N. (2019). Abnormal muscle activity and variability before, during, and after the occurrence of freezing in parkinson’s disease. </a:t>
+            </a:r>
+            <a:r>
+              <a:rPr i="1"/>
+              <a:t>Frontiers in Neurology</a:t>
+            </a:r>
+            <a:r>
+              <a:rPr/>
+              <a:t>, </a:t>
+            </a:r>
+            <a:r>
+              <a:rPr i="1"/>
+              <a:t>10</a:t>
+            </a:r>
+            <a:r>
+              <a:rPr/>
+              <a:t>, 951. </a:t>
             </a:r>
             <a:r>
               <a:rPr>
                 <a:hlinkClick r:id="rId4"/>
               </a:rPr>
-              <a:t>revealJS</a:t>
-            </a:r>
-            <a:r>
-              <a:rPr/>
-              <a:t> framework. The HTML slides are hosted in a </a:t>
+              <a:t>https://doi.org/10.3389/fneur.2019.00951</a:t>
+            </a:r>
+          </a:p>
+          <a:p>
+            <a:pPr lvl="0" indent="0" marL="0">
+              <a:buNone/>
+            </a:pPr>
+            <a:r>
+              <a:rPr/>
+              <a:t>Cassidy, B. S., &amp; Gutchess, A. H. (2012). Structural variation within the amygdala and ventromedial prefrontal cortex predicts memory for impressions in older adults. </a:t>
+            </a:r>
+            <a:r>
+              <a:rPr i="1"/>
+              <a:t>Frontiers in Psychology</a:t>
+            </a:r>
+            <a:r>
+              <a:rPr/>
+              <a:t>, </a:t>
+            </a:r>
+            <a:r>
+              <a:rPr i="1"/>
+              <a:t>3</a:t>
+            </a:r>
+            <a:r>
+              <a:rPr/>
+              <a:t>, 319. </a:t>
             </a:r>
             <a:r>
               <a:rPr>
                 <a:hlinkClick r:id="rId5"/>
               </a:rPr>
-              <a:t>GitHub repo</a:t>
-            </a:r>
-            <a:r>
-              <a:rPr/>
-              <a:t> and served by GitHub pages: </a:t>
+              <a:t>https://doi.org/10.3389/fpsyg.2012.00319</a:t>
+            </a:r>
+          </a:p>
+          <a:p>
+            <a:pPr lvl="0" indent="0" marL="0">
+              <a:buNone/>
+            </a:pPr>
+            <a:r>
+              <a:rPr/>
+              <a:t>Farnsworth, B. (2019, January 8). Eye movements explained: Understanding saccades, smooth pursuits, and fixations. Retrieved January 16, 2026, from </a:t>
             </a:r>
             <a:r>
               <a:rPr>
                 <a:hlinkClick r:id="rId6"/>
               </a:rPr>
-              <a:t>https://psu-psychology.github.io/psy-511-scan-fdns-2026-spring/</a:t>
+              <a:t>https://imotions.com/blog/learning/best-practice/types-of-eye-movements/</a:t>
+            </a:r>
+          </a:p>
+          <a:p>
+            <a:pPr lvl="0" indent="0" marL="0">
+              <a:buNone/>
+            </a:pPr>
+            <a:r>
+              <a:rPr/>
+              <a:t>Favela, L. H. (2020). Cognitive science as complexity science. </a:t>
+            </a:r>
+            <a:r>
+              <a:rPr i="1"/>
+              <a:t>Wiley Interdisciplinary Reviews. Cognitive Science</a:t>
+            </a:r>
+            <a:r>
+              <a:rPr/>
+              <a:t>, </a:t>
+            </a:r>
+            <a:r>
+              <a:rPr i="1"/>
+              <a:t>11</a:t>
+            </a:r>
+            <a:r>
+              <a:rPr/>
+              <a:t>(4), e1525. </a:t>
+            </a:r>
+            <a:r>
+              <a:rPr>
+                <a:hlinkClick r:id="rId7"/>
+              </a:rPr>
+              <a:t>https://doi.org/10.1002/wcs.1525</a:t>
+            </a:r>
+          </a:p>
+          <a:p>
+            <a:pPr lvl="0" indent="0" marL="0">
+              <a:buNone/>
+            </a:pPr>
+            <a:r>
+              <a:rPr/>
+              <a:t>Lab., E. C. (2022). </a:t>
+            </a:r>
+            <a:r>
+              <a:rPr i="1"/>
+              <a:t>Triple inverted pendulum (transition control)</a:t>
+            </a:r>
+            <a:r>
+              <a:rPr/>
+              <a:t>. YouTube. Retrieved from </a:t>
+            </a:r>
+            <a:r>
+              <a:rPr>
+                <a:hlinkClick r:id="rId8"/>
+              </a:rPr>
+              <a:t>https://www.youtube.com/watch?v=Rh7JuL3PRSY</a:t>
+            </a:r>
+          </a:p>
+          <a:p>
+            <a:pPr lvl="0" indent="0" marL="0">
+              <a:buNone/>
+            </a:pPr>
+            <a:r>
+              <a:rPr/>
+              <a:t>Lu, W.-C., &amp; Lin, P.-C. (2024). The generalized spring-loaded inverted pendulum model for analysis of various planar reduced-order models and for optimal robot leg design. </a:t>
+            </a:r>
+            <a:r>
+              <a:rPr i="1"/>
+              <a:t>Bioinspiration &amp; Biomimetics</a:t>
+            </a:r>
+            <a:r>
+              <a:rPr/>
+              <a:t>, </a:t>
+            </a:r>
+            <a:r>
+              <a:rPr i="1"/>
+              <a:t>19</a:t>
+            </a:r>
+            <a:r>
+              <a:rPr/>
+              <a:t>, 026017. </a:t>
+            </a:r>
+            <a:r>
+              <a:rPr>
+                <a:hlinkClick r:id="rId9"/>
+              </a:rPr>
+              <a:t>https://doi.org/10.1088/1748-3190/ad2869</a:t>
+            </a:r>
+          </a:p>
+          <a:p>
+            <a:pPr lvl="0" indent="0" marL="0">
+              <a:buNone/>
+            </a:pPr>
+            <a:r>
+              <a:rPr/>
+              <a:t>Motion, M. A. (2024). </a:t>
+            </a:r>
+            <a:r>
+              <a:rPr i="1"/>
+              <a:t>Mastering balance: The science of center of gravity and base of support</a:t>
+            </a:r>
+            <a:r>
+              <a:rPr/>
+              <a:t>. Youtube. Retrieved from </a:t>
+            </a:r>
+            <a:r>
+              <a:rPr>
+                <a:hlinkClick r:id="rId10"/>
+              </a:rPr>
+              <a:t>https://www.youtube.com/watch?v=5s1gEi5wfLg&amp;t=11s</a:t>
+            </a:r>
+          </a:p>
+          <a:p>
+            <a:pPr lvl="0" indent="0" marL="0">
+              <a:buNone/>
+            </a:pPr>
+            <a:r>
+              <a:rPr/>
+              <a:t>Nielsen, J. B. (2016). Human spinal motor control. </a:t>
+            </a:r>
+            <a:r>
+              <a:rPr i="1"/>
+              <a:t>Annual Review of Neuroscience</a:t>
+            </a:r>
+            <a:r>
+              <a:rPr/>
+              <a:t>, </a:t>
+            </a:r>
+            <a:r>
+              <a:rPr i="1"/>
+              <a:t>39</a:t>
+            </a:r>
+            <a:r>
+              <a:rPr/>
+              <a:t>, 81–101. </a:t>
+            </a:r>
+            <a:r>
+              <a:rPr>
+                <a:hlinkClick r:id="rId11"/>
+              </a:rPr>
+              <a:t>https://doi.org/10.1146/annurev-neuro-070815-013913</a:t>
+            </a:r>
+          </a:p>
+          <a:p>
+            <a:pPr lvl="0" indent="0" marL="0">
+              <a:buNone/>
+            </a:pPr>
+            <a:r>
+              <a:rPr/>
+              <a:t>Quote origin: “To be is to do” “to do is to be” “do be do be do.” (n.d.). Retrieved January 12, 2026, from </a:t>
+            </a:r>
+            <a:r>
+              <a:rPr>
+                <a:hlinkClick r:id="rId12"/>
+              </a:rPr>
+              <a:t>https://quoteinvestigator.com/2013/09/16/do-be-do/</a:t>
+            </a:r>
+          </a:p>
+          <a:p>
+            <a:pPr lvl="0" indent="0" marL="0">
+              <a:buNone/>
+            </a:pPr>
+            <a:r>
+              <a:rPr/>
+              <a:t>Reviews, B. &amp;. T. (2012). </a:t>
+            </a:r>
+            <a:r>
+              <a:rPr i="1"/>
+              <a:t>I like to move it (original video) madagascar HD</a:t>
+            </a:r>
+            <a:r>
+              <a:rPr/>
+              <a:t>. YouTube. Retrieved from </a:t>
+            </a:r>
+            <a:r>
+              <a:rPr>
+                <a:hlinkClick r:id="rId13"/>
+              </a:rPr>
+              <a:t>https://www.youtube.com/watch?v=hdcTmpvDO0I</a:t>
+            </a:r>
+          </a:p>
+          <a:p>
+            <a:pPr lvl="0" indent="0" marL="0">
+              <a:buNone/>
+            </a:pPr>
+            <a:r>
+              <a:rPr/>
+              <a:t>Simonyan, K., Ackermann, H., Chang, E. F., &amp; Greenlee, J. D. (2016). New developments in understanding the complexity of human speech production. </a:t>
+            </a:r>
+            <a:r>
+              <a:rPr i="1"/>
+              <a:t>The Journal of Neuroscience: The Official Journal of the Society for Neuroscience</a:t>
+            </a:r>
+            <a:r>
+              <a:rPr/>
+              <a:t>, </a:t>
+            </a:r>
+            <a:r>
+              <a:rPr i="1"/>
+              <a:t>36</a:t>
+            </a:r>
+            <a:r>
+              <a:rPr/>
+              <a:t>, 11440–11448. </a:t>
+            </a:r>
+            <a:r>
+              <a:rPr>
+                <a:hlinkClick r:id="rId14"/>
+              </a:rPr>
+              <a:t>https://doi.org/10.1523/JNEUROSCI.2424-16.2016</a:t>
+            </a:r>
+          </a:p>
+          <a:p>
+            <a:pPr lvl="0" indent="0" marL="0">
+              <a:buNone/>
+            </a:pPr>
+            <a:r>
+              <a:rPr/>
+              <a:t>Stanton, J. (2015). </a:t>
+            </a:r>
+            <a:r>
+              <a:rPr i="1"/>
+              <a:t>Optokinetic to the right for projection</a:t>
+            </a:r>
+            <a:r>
+              <a:rPr/>
+              <a:t>. YouTube. Retrieved from </a:t>
+            </a:r>
+            <a:r>
+              <a:rPr>
+                <a:hlinkClick r:id="rId15"/>
+              </a:rPr>
+              <a:t>https://www.youtube.com/watch?v=CG5n516PCXM</a:t>
+            </a:r>
+          </a:p>
+          <a:p>
+            <a:pPr lvl="0" indent="0" marL="0">
+              <a:buNone/>
+            </a:pPr>
+            <a:r>
+              <a:rPr/>
+              <a:t>VideoCollectables. (2014). </a:t>
+            </a:r>
+            <a:r>
+              <a:rPr i="1"/>
+              <a:t>World’s fastest talking man sings michael jackson’s BAD in 20 seconds @VideoScrapbookOfOurTimes</a:t>
+            </a:r>
+            <a:r>
+              <a:rPr/>
+              <a:t>. Youtube. Retrieved from </a:t>
+            </a:r>
+            <a:r>
+              <a:rPr>
+                <a:hlinkClick r:id="rId16"/>
+              </a:rPr>
+              <a:t>https://www.youtube.com/watch?v=4X4Fy8YqysY</a:t>
+            </a:r>
+          </a:p>
+          <a:p>
+            <a:pPr lvl="0" indent="0" marL="0">
+              <a:buNone/>
+            </a:pPr>
+            <a:r>
+              <a:rPr/>
+              <a:t>Wikipedia contributors. (2025a, August 30). Nerve conduction velocity. Retrieved from </a:t>
+            </a:r>
+            <a:r>
+              <a:rPr>
+                <a:hlinkClick r:id="rId17"/>
+              </a:rPr>
+              <a:t>https://en.wikipedia.org/wiki/Nerve_conduction_velocity</a:t>
+            </a:r>
+          </a:p>
+          <a:p>
+            <a:pPr lvl="0" indent="0" marL="0">
+              <a:buNone/>
+            </a:pPr>
+            <a:r>
+              <a:rPr/>
+              <a:t>Wikipedia contributors. (2025b, December 19). Saccade. Retrieved from </a:t>
+            </a:r>
+            <a:r>
+              <a:rPr>
+                <a:hlinkClick r:id="rId18"/>
+              </a:rPr>
+              <a:t>https://en.wikipedia.org/wiki/Saccade</a:t>
+            </a:r>
+          </a:p>
+          <a:p>
+            <a:pPr lvl="0" indent="0" marL="0">
+              <a:buNone/>
+            </a:pPr>
+            <a:r>
+              <a:rPr/>
+              <a:t>Wikipedia contributors. (2026, January 11). Articulatory phonetics. Retrieved from </a:t>
+            </a:r>
+            <a:r>
+              <a:rPr>
+                <a:hlinkClick r:id="rId19"/>
+              </a:rPr>
+              <a:t>https://en.wikipedia.org/wiki/Articulatory_phonetics</a:t>
+            </a:r>
+          </a:p>
+          <a:p>
+            <a:pPr lvl="0" indent="0" marL="0">
+              <a:buNone/>
+            </a:pPr>
+            <a:r>
+              <a:rPr/>
+              <a:t>Wolpert, D. (2011). </a:t>
+            </a:r>
+            <a:r>
+              <a:rPr i="1"/>
+              <a:t>Daniel wolpert: The real reason for brains</a:t>
+            </a:r>
+            <a:r>
+              <a:rPr/>
+              <a:t>. YouTube. Retrieved from </a:t>
+            </a:r>
+            <a:r>
+              <a:rPr>
+                <a:hlinkClick r:id="rId20"/>
+              </a:rPr>
+              <a:t>https://www.youtube.com/watch?v=7s0CpRfyYp8</a:t>
+            </a:r>
+          </a:p>
+          <a:p>
+            <a:pPr lvl="0" indent="0" marL="0">
+              <a:buNone/>
+            </a:pPr>
+            <a:r>
+              <a:rPr/>
+              <a:t>牛津基礎生物學O. M. B. (2021). </a:t>
+            </a:r>
+            <a:r>
+              <a:rPr i="1"/>
+              <a:t>Animation 16.3 knee jerk reflex</a:t>
+            </a:r>
+            <a:r>
+              <a:rPr/>
+              <a:t>. Youtube. Retrieved from </a:t>
+            </a:r>
+            <a:r>
+              <a:rPr>
+                <a:hlinkClick r:id="rId21"/>
+              </a:rPr>
+              <a:t>https://www.youtube.com/watch?v=DJLmVSeZ5-c</a:t>
             </a:r>
           </a:p>
         </p:txBody>
@@ -5347,784 +5687,6 @@
 </p:sld>
 </file>
 
-<file path=ppt/slides/slide120.xml><?xml version="1.0" encoding="utf-8"?>
-<p:sld xmlns:a="http://schemas.openxmlformats.org/drawingml/2006/main" xmlns:r="http://schemas.openxmlformats.org/officeDocument/2006/relationships" xmlns:p="http://schemas.openxmlformats.org/presentationml/2006/main">
-  <p:cSld>
-    <p:spTree>
-      <p:nvGrpSpPr>
-        <p:cNvPr id="1" name=""/>
-        <p:cNvGrpSpPr/>
-        <p:nvPr/>
-      </p:nvGrpSpPr>
-      <p:grpSpPr>
-        <a:xfrm>
-          <a:off x="0" y="0"/>
-          <a:ext cx="0" cy="0"/>
-          <a:chOff x="0" y="0"/>
-          <a:chExt cx="0" cy="0"/>
-        </a:xfrm>
-      </p:grpSpPr>
-      <p:sp>
-        <p:nvSpPr>
-          <p:cNvPr id="2" name="Title 1"/>
-          <p:cNvSpPr>
-            <a:spLocks noGrp="1"/>
-          </p:cNvSpPr>
-          <p:nvPr>
-            <p:ph type="title"/>
-          </p:nvPr>
-        </p:nvSpPr>
-        <p:spPr/>
-        <p:txBody>
-          <a:bodyPr/>
-          <a:lstStyle/>
-          <a:p>
-            <a:pPr lvl="0" indent="0" marL="0">
-              <a:buNone/>
-            </a:pPr>
-            <a:r>
-              <a:rPr/>
-              <a:t>References</a:t>
-            </a:r>
-          </a:p>
-        </p:txBody>
-      </p:sp>
-      <p:sp>
-        <p:nvSpPr>
-          <p:cNvPr id="3" name="Content Placeholder 2"/>
-          <p:cNvSpPr>
-            <a:spLocks noGrp="1"/>
-          </p:cNvSpPr>
-          <p:nvPr>
-            <p:ph idx="1"/>
-          </p:nvPr>
-        </p:nvSpPr>
-        <p:spPr/>
-        <p:txBody>
-          <a:bodyPr/>
-          <a:lstStyle/>
-          <a:p>
-            <a:pPr lvl="0" indent="0" marL="0">
-              <a:buNone/>
-            </a:pPr>
-            <a:r>
-              <a:rPr/>
-              <a:t>Bagnall, M. W. (2022). Neurons that control walking go round in circles. </a:t>
-            </a:r>
-            <a:r>
-              <a:rPr i="1"/>
-              <a:t>Nature</a:t>
-            </a:r>
-            <a:r>
-              <a:rPr/>
-              <a:t>, </a:t>
-            </a:r>
-            <a:r>
-              <a:rPr i="1"/>
-              <a:t>610</a:t>
-            </a:r>
-            <a:r>
-              <a:rPr/>
-              <a:t>, 453–454. </a:t>
-            </a:r>
-            <a:r>
-              <a:rPr>
-                <a:hlinkClick r:id="rId2"/>
-              </a:rPr>
-              <a:t>https://doi.org/10.1038/d41586-022-02238-1</a:t>
-            </a:r>
-          </a:p>
-          <a:p>
-            <a:pPr lvl="0" indent="0" marL="0">
-              <a:buNone/>
-            </a:pPr>
-            <a:r>
-              <a:rPr/>
-              <a:t>Blumberg, M. S., &amp; Adolph, K. E. (2023). Infant action and cognition: What’s at stake? </a:t>
-            </a:r>
-            <a:r>
-              <a:rPr i="1"/>
-              <a:t>Trends in Cognitive Sciences</a:t>
-            </a:r>
-            <a:r>
-              <a:rPr/>
-              <a:t>, </a:t>
-            </a:r>
-            <a:r>
-              <a:rPr i="1"/>
-              <a:t>27</a:t>
-            </a:r>
-            <a:r>
-              <a:rPr/>
-              <a:t>(8), 696–698. </a:t>
-            </a:r>
-            <a:r>
-              <a:rPr>
-                <a:hlinkClick r:id="rId3"/>
-              </a:rPr>
-              <a:t>https://doi.org/10.1016/j.tics.2023.05.008</a:t>
-            </a:r>
-          </a:p>
-          <a:p>
-            <a:pPr lvl="0" indent="0" marL="0">
-              <a:buNone/>
-            </a:pPr>
-            <a:r>
-              <a:rPr/>
-              <a:t>Bress, K. S., &amp; Cascio, C. J. (2024). Sensorimotor regulation of facial expression - an untouched frontier. </a:t>
-            </a:r>
-            <a:r>
-              <a:rPr i="1"/>
-              <a:t>Neuroscience and Biobehavioral Reviews</a:t>
-            </a:r>
-            <a:r>
-              <a:rPr/>
-              <a:t>, </a:t>
-            </a:r>
-            <a:r>
-              <a:rPr i="1"/>
-              <a:t>162</a:t>
-            </a:r>
-            <a:r>
-              <a:rPr/>
-              <a:t>, 105684. </a:t>
-            </a:r>
-            <a:r>
-              <a:rPr>
-                <a:hlinkClick r:id="rId4"/>
-              </a:rPr>
-              <a:t>https://doi.org/10.1016/j.neubiorev.2024.105684</a:t>
-            </a:r>
-          </a:p>
-          <a:p>
-            <a:pPr lvl="0" indent="0" marL="0">
-              <a:buNone/>
-            </a:pPr>
-            <a:r>
-              <a:rPr/>
-              <a:t>Cantú, H., Nantel, J., Millán, M., Paquette, C., &amp; Côté, J. N. (2019). Abnormal muscle activity and variability before, during, and after the occurrence of freezing in parkinson’s disease. </a:t>
-            </a:r>
-            <a:r>
-              <a:rPr i="1"/>
-              <a:t>Frontiers in Neurology</a:t>
-            </a:r>
-            <a:r>
-              <a:rPr/>
-              <a:t>, </a:t>
-            </a:r>
-            <a:r>
-              <a:rPr i="1"/>
-              <a:t>10</a:t>
-            </a:r>
-            <a:r>
-              <a:rPr/>
-              <a:t>, 951. </a:t>
-            </a:r>
-            <a:r>
-              <a:rPr>
-                <a:hlinkClick r:id="rId5"/>
-              </a:rPr>
-              <a:t>https://doi.org/10.3389/fneur.2019.00951</a:t>
-            </a:r>
-          </a:p>
-          <a:p>
-            <a:pPr lvl="0" indent="0" marL="0">
-              <a:buNone/>
-            </a:pPr>
-            <a:r>
-              <a:rPr/>
-              <a:t>Cullen, K. E. (2022, May 31). The neuroscience of balance. Retrieved January 5, 2026, from </a:t>
-            </a:r>
-            <a:r>
-              <a:rPr>
-                <a:hlinkClick r:id="rId6"/>
-              </a:rPr>
-              <a:t>https://www.physoc.org/magazine-articles/the-neuroscience-of-balance/</a:t>
-            </a:r>
-          </a:p>
-          <a:p>
-            <a:pPr lvl="0" indent="0" marL="0">
-              <a:buNone/>
-            </a:pPr>
-            <a:r>
-              <a:rPr/>
-              <a:t>Di Caro, V., Cesari, P., Sala, F., &amp; Cattaneo, L. (2025). The neural bases of the reach-grasp movement in humans: Quantitative evidence from brain lesions. </a:t>
-            </a:r>
-            <a:r>
-              <a:rPr i="1"/>
-              <a:t>Proceedings of the National Academy of Sciences of the United States of America</a:t>
-            </a:r>
-            <a:r>
-              <a:rPr/>
-              <a:t>, </a:t>
-            </a:r>
-            <a:r>
-              <a:rPr i="1"/>
-              <a:t>122</a:t>
-            </a:r>
-            <a:r>
-              <a:rPr/>
-              <a:t>, e2419801122. </a:t>
-            </a:r>
-            <a:r>
-              <a:rPr>
-                <a:hlinkClick r:id="rId7"/>
-              </a:rPr>
-              <a:t>https://doi.org/10.1073/pnas.2419801122</a:t>
-            </a:r>
-          </a:p>
-          <a:p>
-            <a:pPr lvl="0" indent="0" marL="0">
-              <a:buNone/>
-            </a:pPr>
-            <a:r>
-              <a:rPr/>
-              <a:t>Farnsworth, B. (2019, January 8). Eye movements explained: Understanding saccades, smooth pursuits, and fixations. Retrieved January 16, 2026, from </a:t>
-            </a:r>
-            <a:r>
-              <a:rPr>
-                <a:hlinkClick r:id="rId8"/>
-              </a:rPr>
-              <a:t>https://imotions.com/blog/learning/best-practice/types-of-eye-movements/</a:t>
-            </a:r>
-          </a:p>
-          <a:p>
-            <a:pPr lvl="0" indent="0" marL="0">
-              <a:buNone/>
-            </a:pPr>
-            <a:r>
-              <a:rPr/>
-              <a:t>Favela, L. H. (2020). Cognitive science as complexity science. </a:t>
-            </a:r>
-            <a:r>
-              <a:rPr i="1"/>
-              <a:t>Wiley Interdisciplinary Reviews. Cognitive Science</a:t>
-            </a:r>
-            <a:r>
-              <a:rPr/>
-              <a:t>, </a:t>
-            </a:r>
-            <a:r>
-              <a:rPr i="1"/>
-              <a:t>11</a:t>
-            </a:r>
-            <a:r>
-              <a:rPr/>
-              <a:t>(4), e1525. </a:t>
-            </a:r>
-            <a:r>
-              <a:rPr>
-                <a:hlinkClick r:id="rId9"/>
-              </a:rPr>
-              <a:t>https://doi.org/10.1002/wcs.1525</a:t>
-            </a:r>
-          </a:p>
-          <a:p>
-            <a:pPr lvl="0" indent="0" marL="0">
-              <a:buNone/>
-            </a:pPr>
-            <a:r>
-              <a:rPr/>
-              <a:t>Griffin, Z. M. (2024). Language production. In </a:t>
-            </a:r>
-            <a:r>
-              <a:rPr i="1"/>
-              <a:t>Open encyclopedia of cognitive science</a:t>
-            </a:r>
-            <a:r>
-              <a:rPr/>
-              <a:t>. MIT Press. </a:t>
-            </a:r>
-            <a:r>
-              <a:rPr>
-                <a:hlinkClick r:id="rId10"/>
-              </a:rPr>
-              <a:t>https://doi.org/10.21428/e2759450.b076f599</a:t>
-            </a:r>
-          </a:p>
-          <a:p>
-            <a:pPr lvl="0" indent="0" marL="0">
-              <a:buNone/>
-            </a:pPr>
-            <a:r>
-              <a:rPr/>
-              <a:t>Khanna, A. R., Muñoz, W., Kim, Y. J., Kfir, Y., Paulk, A. C., Jamali, M., … Williams, Z. M. (2024). Single-neuronal elements of speech production in humans. </a:t>
-            </a:r>
-            <a:r>
-              <a:rPr i="1"/>
-              <a:t>Nature</a:t>
-            </a:r>
-            <a:r>
-              <a:rPr/>
-              <a:t>, </a:t>
-            </a:r>
-            <a:r>
-              <a:rPr i="1"/>
-              <a:t>626</a:t>
-            </a:r>
-            <a:r>
-              <a:rPr/>
-              <a:t>, 603–610. </a:t>
-            </a:r>
-            <a:r>
-              <a:rPr>
-                <a:hlinkClick r:id="rId11"/>
-              </a:rPr>
-              <a:t>https://doi.org/10.1038/s41586-023-06982-w</a:t>
-            </a:r>
-          </a:p>
-          <a:p>
-            <a:pPr lvl="0" indent="0" marL="0">
-              <a:buNone/>
-            </a:pPr>
-            <a:r>
-              <a:rPr/>
-              <a:t>Kim, H. E., Avraham, G., &amp; Ivry, R. B. (2021). The psychology of reaching: Action selection, movement implementation, and sensorimotor learning. </a:t>
-            </a:r>
-            <a:r>
-              <a:rPr i="1"/>
-              <a:t>Annual Review of Psychology</a:t>
-            </a:r>
-            <a:r>
-              <a:rPr/>
-              <a:t>, </a:t>
-            </a:r>
-            <a:r>
-              <a:rPr i="1"/>
-              <a:t>72</a:t>
-            </a:r>
-            <a:r>
-              <a:rPr/>
-              <a:t>, 61–95. </a:t>
-            </a:r>
-            <a:r>
-              <a:rPr>
-                <a:hlinkClick r:id="rId12"/>
-              </a:rPr>
-              <a:t>https://doi.org/10.1146/annurev-psych-010419-051053</a:t>
-            </a:r>
-          </a:p>
-          <a:p>
-            <a:pPr lvl="0" indent="0" marL="0">
-              <a:buNone/>
-            </a:pPr>
-            <a:r>
-              <a:rPr/>
-              <a:t>Lab., E. C. (2022). </a:t>
-            </a:r>
-            <a:r>
-              <a:rPr i="1"/>
-              <a:t>Triple inverted pendulum (transition control)</a:t>
-            </a:r>
-            <a:r>
-              <a:rPr/>
-              <a:t>. YouTube. Retrieved from </a:t>
-            </a:r>
-            <a:r>
-              <a:rPr>
-                <a:hlinkClick r:id="rId13"/>
-              </a:rPr>
-              <a:t>https://www.youtube.com/watch?v=Rh7JuL3PRSY</a:t>
-            </a:r>
-          </a:p>
-          <a:p>
-            <a:pPr lvl="0" indent="0" marL="0">
-              <a:buNone/>
-            </a:pPr>
-            <a:r>
-              <a:rPr/>
-              <a:t>Locomotion. (n.d.). Retrieved January 5, 2026, from </a:t>
-            </a:r>
-            <a:r>
-              <a:rPr>
-                <a:hlinkClick r:id="rId14"/>
-              </a:rPr>
-              <a:t>https://www.sciencedirect.com/topics/neuroscience/locomotion</a:t>
-            </a:r>
-          </a:p>
-          <a:p>
-            <a:pPr lvl="0" indent="0" marL="0">
-              <a:buNone/>
-            </a:pPr>
-            <a:r>
-              <a:rPr/>
-              <a:t>Lu, W.-C., &amp; Lin, P.-C. (2024). The generalized spring-loaded inverted pendulum model for analysis of various planar reduced-order models and for optimal robot leg design. </a:t>
-            </a:r>
-            <a:r>
-              <a:rPr i="1"/>
-              <a:t>Bioinspiration &amp; Biomimetics</a:t>
-            </a:r>
-            <a:r>
-              <a:rPr/>
-              <a:t>, </a:t>
-            </a:r>
-            <a:r>
-              <a:rPr i="1"/>
-              <a:t>19</a:t>
-            </a:r>
-            <a:r>
-              <a:rPr/>
-              <a:t>, 026017. </a:t>
-            </a:r>
-            <a:r>
-              <a:rPr>
-                <a:hlinkClick r:id="rId15"/>
-              </a:rPr>
-              <a:t>https://doi.org/10.1088/1748-3190/ad2869</a:t>
-            </a:r>
-          </a:p>
-          <a:p>
-            <a:pPr lvl="0" indent="0" marL="0">
-              <a:buNone/>
-            </a:pPr>
-            <a:r>
-              <a:rPr/>
-              <a:t>Motion, M. A. (2024). </a:t>
-            </a:r>
-            <a:r>
-              <a:rPr i="1"/>
-              <a:t>Mastering balance: The science of center of gravity and base of support</a:t>
-            </a:r>
-            <a:r>
-              <a:rPr/>
-              <a:t>. Youtube. Retrieved from </a:t>
-            </a:r>
-            <a:r>
-              <a:rPr>
-                <a:hlinkClick r:id="rId16"/>
-              </a:rPr>
-              <a:t>https://www.youtube.com/watch?v=5s1gEi5wfLg&amp;t=11s</a:t>
-            </a:r>
-          </a:p>
-          <a:p>
-            <a:pPr lvl="0" indent="0" marL="0">
-              <a:buNone/>
-            </a:pPr>
-            <a:r>
-              <a:rPr/>
-              <a:t>Nielsen, J. B. (2016). Human spinal motor control. </a:t>
-            </a:r>
-            <a:r>
-              <a:rPr i="1"/>
-              <a:t>Annual Review of Neuroscience</a:t>
-            </a:r>
-            <a:r>
-              <a:rPr/>
-              <a:t>, </a:t>
-            </a:r>
-            <a:r>
-              <a:rPr i="1"/>
-              <a:t>39</a:t>
-            </a:r>
-            <a:r>
-              <a:rPr/>
-              <a:t>, 81–101. </a:t>
-            </a:r>
-            <a:r>
-              <a:rPr>
-                <a:hlinkClick r:id="rId17"/>
-              </a:rPr>
-              <a:t>https://doi.org/10.1146/annurev-neuro-070815-013913</a:t>
-            </a:r>
-          </a:p>
-          <a:p>
-            <a:pPr lvl="0" indent="0" marL="0">
-              <a:buNone/>
-            </a:pPr>
-            <a:r>
-              <a:rPr/>
-              <a:t>Purves, D., Augustine, G. J., Fitzpatrick, D., Katz, L. C., LaMantia, A.-S., McNamara, J. O., &amp; Mark Williams, S. (2001). Spinal cord circuitry and locomotion. In </a:t>
-            </a:r>
-            <a:r>
-              <a:rPr i="1"/>
-              <a:t>Neuroscience. 2nd edition</a:t>
-            </a:r>
-            <a:r>
-              <a:rPr/>
-              <a:t>. Sinauer Associates. Retrieved from </a:t>
-            </a:r>
-            <a:r>
-              <a:rPr>
-                <a:hlinkClick r:id="rId18"/>
-              </a:rPr>
-              <a:t>https://www.ncbi.nlm.nih.gov/books/NBK11015/</a:t>
-            </a:r>
-          </a:p>
-          <a:p>
-            <a:pPr lvl="0" indent="0" marL="0">
-              <a:buNone/>
-            </a:pPr>
-            <a:r>
-              <a:rPr/>
-              <a:t>Quote origin: “To be is to do” “to do is to be” “do be do be do.” (n.d.). Retrieved January 12, 2026, from </a:t>
-            </a:r>
-            <a:r>
-              <a:rPr>
-                <a:hlinkClick r:id="rId19"/>
-              </a:rPr>
-              <a:t>https://quoteinvestigator.com/2013/09/16/do-be-do/</a:t>
-            </a:r>
-          </a:p>
-          <a:p>
-            <a:pPr lvl="0" indent="0" marL="0">
-              <a:buNone/>
-            </a:pPr>
-            <a:r>
-              <a:rPr/>
-              <a:t>Reviews, B. &amp;. T. (2012). </a:t>
-            </a:r>
-            <a:r>
-              <a:rPr i="1"/>
-              <a:t>I like to move it (original video) madagascar HD</a:t>
-            </a:r>
-            <a:r>
-              <a:rPr/>
-              <a:t>. YouTube. Retrieved from </a:t>
-            </a:r>
-            <a:r>
-              <a:rPr>
-                <a:hlinkClick r:id="rId20"/>
-              </a:rPr>
-              <a:t>https://www.youtube.com/watch?v=hdcTmpvDO0I</a:t>
-            </a:r>
-          </a:p>
-          <a:p>
-            <a:pPr lvl="0" indent="0" marL="0">
-              <a:buNone/>
-            </a:pPr>
-            <a:r>
-              <a:rPr/>
-              <a:t>Simonyan, K., Ackermann, H., Chang, E. F., &amp; Greenlee, J. D. (2016). New developments in understanding the complexity of human speech production. </a:t>
-            </a:r>
-            <a:r>
-              <a:rPr i="1"/>
-              <a:t>The Journal of Neuroscience: The Official Journal of the Society for Neuroscience</a:t>
-            </a:r>
-            <a:r>
-              <a:rPr/>
-              <a:t>, </a:t>
-            </a:r>
-            <a:r>
-              <a:rPr i="1"/>
-              <a:t>36</a:t>
-            </a:r>
-            <a:r>
-              <a:rPr/>
-              <a:t>, 11440–11448. </a:t>
-            </a:r>
-            <a:r>
-              <a:rPr>
-                <a:hlinkClick r:id="rId21"/>
-              </a:rPr>
-              <a:t>https://doi.org/10.1523/JNEUROSCI.2424-16.2016</a:t>
-            </a:r>
-          </a:p>
-          <a:p>
-            <a:pPr lvl="0" indent="0" marL="0">
-              <a:buNone/>
-            </a:pPr>
-            <a:r>
-              <a:rPr/>
-              <a:t>Stanton, J. (2015). </a:t>
-            </a:r>
-            <a:r>
-              <a:rPr i="1"/>
-              <a:t>Optokinetic to the right for projection</a:t>
-            </a:r>
-            <a:r>
-              <a:rPr/>
-              <a:t>. YouTube. Retrieved from </a:t>
-            </a:r>
-            <a:r>
-              <a:rPr>
-                <a:hlinkClick r:id="rId22"/>
-              </a:rPr>
-              <a:t>https://www.youtube.com/watch?v=CG5n516PCXM</a:t>
-            </a:r>
-          </a:p>
-          <a:p>
-            <a:pPr lvl="0" indent="0" marL="0">
-              <a:buNone/>
-            </a:pPr>
-            <a:r>
-              <a:rPr/>
-              <a:t>VideoCollectables. (2014). </a:t>
-            </a:r>
-            <a:r>
-              <a:rPr i="1"/>
-              <a:t>World’s fastest talking man sings michael jackson’s BAD in 20 seconds @VideoScrapbookOfOurTimes</a:t>
-            </a:r>
-            <a:r>
-              <a:rPr/>
-              <a:t>. Youtube. Retrieved from </a:t>
-            </a:r>
-            <a:r>
-              <a:rPr>
-                <a:hlinkClick r:id="rId23"/>
-              </a:rPr>
-              <a:t>https://www.youtube.com/watch?v=4X4Fy8YqysY</a:t>
-            </a:r>
-          </a:p>
-          <a:p>
-            <a:pPr lvl="0" indent="0" marL="0">
-              <a:buNone/>
-            </a:pPr>
-            <a:r>
-              <a:rPr/>
-              <a:t>Wikipedia contributors. (2025a, August 30). Nerve conduction velocity. Retrieved from </a:t>
-            </a:r>
-            <a:r>
-              <a:rPr>
-                <a:hlinkClick r:id="rId24"/>
-              </a:rPr>
-              <a:t>https://en.wikipedia.org/wiki/Nerve_conduction_velocity</a:t>
-            </a:r>
-          </a:p>
-          <a:p>
-            <a:pPr lvl="0" indent="0" marL="0">
-              <a:buNone/>
-            </a:pPr>
-            <a:r>
-              <a:rPr/>
-              <a:t>Wikipedia contributors. (2025b, December 19). Saccade. Retrieved from </a:t>
-            </a:r>
-            <a:r>
-              <a:rPr>
-                <a:hlinkClick r:id="rId25"/>
-              </a:rPr>
-              <a:t>https://en.wikipedia.org/wiki/Saccade</a:t>
-            </a:r>
-          </a:p>
-          <a:p>
-            <a:pPr lvl="0" indent="0" marL="0">
-              <a:buNone/>
-            </a:pPr>
-            <a:r>
-              <a:rPr/>
-              <a:t>Wikipedia contributors. (2026, January 11). Articulatory phonetics. Retrieved from </a:t>
-            </a:r>
-            <a:r>
-              <a:rPr>
-                <a:hlinkClick r:id="rId26"/>
-              </a:rPr>
-              <a:t>https://en.wikipedia.org/wiki/Articulatory_phonetics</a:t>
-            </a:r>
-          </a:p>
-          <a:p>
-            <a:pPr lvl="0" indent="0" marL="0">
-              <a:buNone/>
-            </a:pPr>
-            <a:r>
-              <a:rPr/>
-              <a:t>Wolpert, D. (2011). </a:t>
-            </a:r>
-            <a:r>
-              <a:rPr i="1"/>
-              <a:t>Daniel wolpert: The real reason for brains</a:t>
-            </a:r>
-            <a:r>
-              <a:rPr/>
-              <a:t>. YouTube. Retrieved from </a:t>
-            </a:r>
-            <a:r>
-              <a:rPr>
-                <a:hlinkClick r:id="rId27"/>
-              </a:rPr>
-              <a:t>https://www.youtube.com/watch?v=7s0CpRfyYp8</a:t>
-            </a:r>
-          </a:p>
-          <a:p>
-            <a:pPr lvl="0" indent="0" marL="0">
-              <a:buNone/>
-            </a:pPr>
-            <a:r>
-              <a:rPr/>
-              <a:t>Xing, D., Truccolo, W., &amp; Borton, D. A. (2022). Emergence of distinct neural subspaces in motor cortical dynamics during volitional adjustments of ongoing locomotion. </a:t>
-            </a:r>
-            <a:r>
-              <a:rPr i="1"/>
-              <a:t>The Journal of Neuroscience: The Official Journal of the Society for Neuroscience</a:t>
-            </a:r>
-            <a:r>
-              <a:rPr/>
-              <a:t>, </a:t>
-            </a:r>
-            <a:r>
-              <a:rPr i="1"/>
-              <a:t>42</a:t>
-            </a:r>
-            <a:r>
-              <a:rPr/>
-              <a:t>, 9142–9157. </a:t>
-            </a:r>
-            <a:r>
-              <a:rPr>
-                <a:hlinkClick r:id="rId28"/>
-              </a:rPr>
-              <a:t>https://doi.org/10.1523/JNEUROSCI.0746-22.2022</a:t>
-            </a:r>
-          </a:p>
-          <a:p>
-            <a:pPr lvl="0" indent="0" marL="0">
-              <a:buNone/>
-            </a:pPr>
-            <a:r>
-              <a:rPr/>
-              <a:t>Zada, Z., Nastase, S. A., Speer, S., Mwilambwe-Tshilobo, L., Tsoi, L., Burns, S. M., … Tamir, D. I. (2025). Linguistic coupling between neural systems for speech production and comprehension during real-time dyadic conversations. </a:t>
-            </a:r>
-            <a:r>
-              <a:rPr i="1"/>
-              <a:t>Neuron</a:t>
-            </a:r>
-            <a:r>
-              <a:rPr/>
-              <a:t>, </a:t>
-            </a:r>
-            <a:r>
-              <a:rPr i="1"/>
-              <a:t>0</a:t>
-            </a:r>
-            <a:r>
-              <a:rPr/>
-              <a:t>. </a:t>
-            </a:r>
-            <a:r>
-              <a:rPr>
-                <a:hlinkClick r:id="rId29"/>
-              </a:rPr>
-              <a:t>https://doi.org/10.1016/j.neuron.2025.11.004</a:t>
-            </a:r>
-          </a:p>
-          <a:p>
-            <a:pPr lvl="0" indent="0" marL="0">
-              <a:buNone/>
-            </a:pPr>
-            <a:r>
-              <a:rPr/>
-              <a:t>牛津基礎生物學O. M. B. (2021). </a:t>
-            </a:r>
-            <a:r>
-              <a:rPr i="1"/>
-              <a:t>Animation 16.3 knee jerk reflex</a:t>
-            </a:r>
-            <a:r>
-              <a:rPr/>
-              <a:t>. Youtube. Retrieved from </a:t>
-            </a:r>
-            <a:r>
-              <a:rPr>
-                <a:hlinkClick r:id="rId30"/>
-              </a:rPr>
-              <a:t>https://www.youtube.com/watch?v=DJLmVSeZ5-c</a:t>
-            </a:r>
-          </a:p>
-        </p:txBody>
-      </p:sp>
-    </p:spTree>
-  </p:cSld>
-</p:sld>
-</file>
-
 <file path=ppt/slides/slide13.xml><?xml version="1.0" encoding="utf-8"?>
 <p:sld xmlns:a="http://schemas.openxmlformats.org/drawingml/2006/main" xmlns:r="http://schemas.openxmlformats.org/officeDocument/2006/relationships" xmlns:p="http://schemas.openxmlformats.org/presentationml/2006/main">
   <p:cSld>
@@ -6370,7 +5932,7 @@
             </a:pPr>
             <a:r>
               <a:rPr/>
-              <a:t>Why start with action?</a:t>
+              <a:t>Why action?</a:t>
             </a:r>
           </a:p>
         </p:txBody>
@@ -6772,6 +6334,20 @@
                 <a:pPr lvl="1"/>
                 <a:r>
                   <a:rPr/>
+                  <a:t>Their own bodies, </a:t>
+                </a:r>
+                <a14:m>
+                  <m:oMath xmlns:m="http://schemas.openxmlformats.org/officeDocument/2006/math">
+                    <m:r>
+                      <m:t>B</m:t>
+                    </m:r>
+                  </m:oMath>
+                </a14:m>
+              </a:p>
+              <a:p>
+                <a:pPr lvl="2"/>
+                <a:r>
+                  <a:rPr/>
                   <a:t>The external world, </a:t>
                 </a:r>
                 <a14:m>
@@ -6783,18 +6359,11 @@
                 </a14:m>
               </a:p>
               <a:p>
-                <a:pPr lvl="1"/>
+                <a:pPr lvl="0"/>
                 <a:r>
                   <a:rPr/>
-                  <a:t>Their own bodies, </a:t>
+                  <a:t>The nervous system controls the body and its effects on the world</a:t>
                 </a:r>
-                <a14:m>
-                  <m:oMath xmlns:m="http://schemas.openxmlformats.org/officeDocument/2006/math">
-                    <m:r>
-                      <m:t>B</m:t>
-                    </m:r>
-                  </m:oMath>
-                </a14:m>
               </a:p>
             </p:txBody>
           </p:sp>
@@ -6893,7 +6462,7 @@
             </a:pPr>
             <a:r>
               <a:rPr/>
-              <a:t>Animal movement a function of</a:t>
+              <a:t>Animal movement lawful</a:t>
             </a:r>
           </a:p>
         </p:txBody>
@@ -6931,6 +6500,24 @@
             <a:r>
               <a:rPr/>
               <a:t>Psychology</a:t>
+            </a:r>
+          </a:p>
+          <a:p>
+            <a:pPr lvl="0" indent="0" marL="1270000">
+              <a:buNone/>
+            </a:pPr>
+            <a:r>
+              <a:rPr sz="2000" b="1"/>
+              <a:t>Your turn</a:t>
+            </a:r>
+          </a:p>
+          <a:p>
+            <a:pPr lvl="0" indent="0" marL="1270000">
+              <a:buNone/>
+            </a:pPr>
+            <a:r>
+              <a:rPr sz="2000"/>
+              <a:t>Can you name a physical law that applies to movement? A biological law? A psychological law?</a:t>
             </a:r>
           </a:p>
         </p:txBody>
@@ -6977,7 +6564,7 @@
             </a:pPr>
             <a:r>
               <a:rPr/>
-              <a:t>Movement one result of nervous system output</a:t>
+              <a:t>Movement one class of nervous system output</a:t>
             </a:r>
           </a:p>
         </p:txBody>
@@ -6989,7 +6576,7 @@
             <a:spLocks noGrp="1"/>
           </p:cNvSpPr>
           <p:nvPr>
-            <p:ph idx="1" sz="half"/>
+            <p:ph idx="1"/>
           </p:nvPr>
         </p:nvSpPr>
         <p:spPr/>
@@ -7028,38 +6615,22 @@
               <a:t>Somatic</a:t>
             </a:r>
           </a:p>
-        </p:txBody>
-      </p:sp>
-      <p:pic>
-        <p:nvPicPr>
-          <p:cNvPr descr="wk-03-2026-01-29-action_files/figure-pptx/mermaid-figure-7.png" id="0" name="Picture 1"/>
-          <p:cNvPicPr>
-            <a:picLocks noGrp="1" noChangeAspect="1"/>
-          </p:cNvPicPr>
-          <p:nvPr/>
-        </p:nvPicPr>
-        <p:blipFill>
-          <a:blip r:embed="rId2"/>
-          <a:stretch>
-            <a:fillRect/>
-          </a:stretch>
-        </p:blipFill>
-        <p:spPr bwMode="auto">
-          <a:xfrm>
-            <a:off x="4648200" y="1333500"/>
-            <a:ext cx="4038600" cy="3111500"/>
-          </a:xfrm>
-          <a:prstGeom prst="rect">
-            <a:avLst/>
-          </a:prstGeom>
-          <a:noFill/>
-          <a:ln w="9525">
-            <a:noFill/>
-            <a:headEnd/>
-            <a:tailEnd/>
-          </a:ln>
-        </p:spPr>
-      </p:pic>
+          <a:p>
+            <a:pPr lvl="0" indent="0" marL="0">
+              <a:buNone/>
+            </a:pPr>
+          </a:p>
+          <a:p>
+            <a:pPr lvl="0" indent="0" marL="0">
+              <a:buNone/>
+            </a:pPr>
+            <a:r>
+              <a:rPr/>
+              <a:t>Three classes of outputs from the nervous system.</a:t>
+            </a:r>
+          </a:p>
+        </p:txBody>
+      </p:sp>
     </p:spTree>
   </p:cSld>
 </p:sld>
@@ -7129,7 +6700,7 @@
       </p:sp>
       <p:pic>
         <p:nvPicPr>
-          <p:cNvPr descr="wk-03-2026-01-29-action_files/figure-pptx/mermaid-figure-6.png" id="0" name="Picture 1"/>
+          <p:cNvPr descr="wk-03-2026-01-29-action_files/figure-pptx/mermaid-figure-7.png" id="0" name="Picture 1"/>
           <p:cNvPicPr>
             <a:picLocks noGrp="1" noChangeAspect="1"/>
           </p:cNvPicPr>
@@ -7209,7 +6780,7 @@
       </p:sp>
       <p:pic>
         <p:nvPicPr>
-          <p:cNvPr descr="wk-03-2026-01-29-action_files/figure-pptx/mermaid-figure-5.png" id="0" name="Picture 1"/>
+          <p:cNvPr descr="wk-03-2026-01-29-action_files/figure-pptx/mermaid-figure-6.png" id="0" name="Picture 1"/>
           <p:cNvPicPr>
             <a:picLocks noGrp="1" noChangeAspect="1"/>
           </p:cNvPicPr>
@@ -7223,8 +6794,8 @@
         </p:blipFill>
         <p:spPr bwMode="auto">
           <a:xfrm>
-            <a:off x="3581400" y="203200"/>
-            <a:ext cx="5092700" cy="4381500"/>
+            <a:off x="3568700" y="1854200"/>
+            <a:ext cx="5105400" cy="1079500"/>
           </a:xfrm>
           <a:prstGeom prst="rect">
             <a:avLst/>
@@ -7279,7 +6850,7 @@
             </a:pPr>
             <a:r>
               <a:rPr/>
-              <a:t>Schematic of information flows into and out of the nervous system.</a:t>
+              <a:t>Schematic of information flows into and out of the nervous system. Note: This figure ignores flows specifically related to metabolism.</a:t>
             </a:r>
           </a:p>
         </p:txBody>
@@ -7306,6 +6877,31 @@
           <a:chExt cx="0" cy="0"/>
         </a:xfrm>
       </p:grpSpPr>
+      <p:sp>
+        <p:nvSpPr>
+          <p:cNvPr id="2" name="Title 1"/>
+          <p:cNvSpPr>
+            <a:spLocks noGrp="1"/>
+          </p:cNvSpPr>
+          <p:nvPr>
+            <p:ph type="title"/>
+          </p:nvPr>
+        </p:nvSpPr>
+        <p:spPr/>
+        <p:txBody>
+          <a:bodyPr/>
+          <a:lstStyle/>
+          <a:p>
+            <a:pPr lvl="0" indent="0" marL="0">
+              <a:buNone/>
+            </a:pPr>
+            <a:r>
+              <a:rPr/>
+              <a:t>Computational perspective</a:t>
+            </a:r>
+          </a:p>
+        </p:txBody>
+      </p:sp>
       <p:pic>
         <p:nvPicPr>
           <p:cNvPr descr="../include/img/wcs1525-fig-0003-m.jpg" id="0" name="Picture 1"/>
@@ -8064,7 +7660,15 @@
             </a:pPr>
             <a:r>
               <a:rPr/>
-              <a:t>Movement is the real reason for brains</a:t>
+              <a:t>Movement is the </a:t>
+            </a:r>
+            <a:r>
+              <a:rPr i="1"/>
+              <a:t>real</a:t>
+            </a:r>
+            <a:r>
+              <a:rPr/>
+              <a:t> reason for brains</a:t>
             </a:r>
           </a:p>
         </p:txBody>
@@ -8318,6 +7922,383 @@
       </p:sp>
     </p:spTree>
   </p:cSld>
+  <p:timing>
+    <p:tnLst>
+      <p:par>
+        <p:cTn id="1" dur="indefinite" restart="never" nodeType="tmRoot">
+          <p:childTnLst>
+            <p:seq concurrent="1" nextAc="seek">
+              <p:cTn id="2" dur="indefinite" nodeType="mainSeq">
+                <p:childTnLst>
+                  <p:par>
+                    <p:cTn id="3" fill="hold">
+                      <p:stCondLst>
+                        <p:cond delay="indefinite"/>
+                      </p:stCondLst>
+                      <p:childTnLst>
+                        <p:par>
+                          <p:cTn id="4" fill="hold">
+                            <p:stCondLst>
+                              <p:cond delay="0"/>
+                            </p:stCondLst>
+                            <p:childTnLst>
+                              <p:par>
+                                <p:cTn id="5" presetID="1" presetClass="entr" presetSubtype="0" fill="hold" grpId="0" nodeType="clickEffect">
+                                  <p:stCondLst>
+                                    <p:cond delay="0"/>
+                                  </p:stCondLst>
+                                  <p:childTnLst>
+                                    <p:set>
+                                      <p:cBhvr>
+                                        <p:cTn id="6" dur="1" fill="hold">
+                                          <p:stCondLst>
+                                            <p:cond delay="0"/>
+                                          </p:stCondLst>
+                                        </p:cTn>
+                                        <p:tgtEl>
+                                          <p:spTgt spid="3">
+                                            <p:txEl>
+                                              <p:pRg st="0" end="0"/>
+                                            </p:txEl>
+                                          </p:spTgt>
+                                        </p:tgtEl>
+                                        <p:attrNameLst>
+                                          <p:attrName>style.visibility</p:attrName>
+                                        </p:attrNameLst>
+                                      </p:cBhvr>
+                                      <p:to>
+                                        <p:strVal val="visible"/>
+                                      </p:to>
+                                    </p:set>
+                                  </p:childTnLst>
+                                </p:cTn>
+                              </p:par>
+                            </p:childTnLst>
+                          </p:cTn>
+                        </p:par>
+                      </p:childTnLst>
+                    </p:cTn>
+                  </p:par>
+                  <p:par>
+                    <p:cTn id="7" fill="hold">
+                      <p:stCondLst>
+                        <p:cond delay="indefinite"/>
+                      </p:stCondLst>
+                      <p:childTnLst>
+                        <p:par>
+                          <p:cTn id="8" fill="hold">
+                            <p:stCondLst>
+                              <p:cond delay="0"/>
+                            </p:stCondLst>
+                            <p:childTnLst>
+                              <p:par>
+                                <p:cTn id="9" presetID="1" presetClass="entr" presetSubtype="0" fill="hold" grpId="0" nodeType="clickEffect">
+                                  <p:stCondLst>
+                                    <p:cond delay="0"/>
+                                  </p:stCondLst>
+                                  <p:childTnLst>
+                                    <p:set>
+                                      <p:cBhvr>
+                                        <p:cTn id="10" dur="1" fill="hold">
+                                          <p:stCondLst>
+                                            <p:cond delay="0"/>
+                                          </p:stCondLst>
+                                        </p:cTn>
+                                        <p:tgtEl>
+                                          <p:spTgt spid="3">
+                                            <p:txEl>
+                                              <p:pRg st="1" end="1"/>
+                                            </p:txEl>
+                                          </p:spTgt>
+                                        </p:tgtEl>
+                                        <p:attrNameLst>
+                                          <p:attrName>style.visibility</p:attrName>
+                                        </p:attrNameLst>
+                                      </p:cBhvr>
+                                      <p:to>
+                                        <p:strVal val="visible"/>
+                                      </p:to>
+                                    </p:set>
+                                  </p:childTnLst>
+                                </p:cTn>
+                              </p:par>
+                            </p:childTnLst>
+                          </p:cTn>
+                        </p:par>
+                      </p:childTnLst>
+                    </p:cTn>
+                  </p:par>
+                  <p:par>
+                    <p:cTn id="11" fill="hold">
+                      <p:stCondLst>
+                        <p:cond delay="indefinite"/>
+                      </p:stCondLst>
+                      <p:childTnLst>
+                        <p:par>
+                          <p:cTn id="12" fill="hold">
+                            <p:stCondLst>
+                              <p:cond delay="0"/>
+                            </p:stCondLst>
+                            <p:childTnLst>
+                              <p:par>
+                                <p:cTn id="13" presetID="1" presetClass="entr" presetSubtype="0" fill="hold" grpId="0" nodeType="clickEffect">
+                                  <p:stCondLst>
+                                    <p:cond delay="0"/>
+                                  </p:stCondLst>
+                                  <p:childTnLst>
+                                    <p:set>
+                                      <p:cBhvr>
+                                        <p:cTn id="14" dur="1" fill="hold">
+                                          <p:stCondLst>
+                                            <p:cond delay="0"/>
+                                          </p:stCondLst>
+                                        </p:cTn>
+                                        <p:tgtEl>
+                                          <p:spTgt spid="3">
+                                            <p:txEl>
+                                              <p:pRg st="2" end="2"/>
+                                            </p:txEl>
+                                          </p:spTgt>
+                                        </p:tgtEl>
+                                        <p:attrNameLst>
+                                          <p:attrName>style.visibility</p:attrName>
+                                        </p:attrNameLst>
+                                      </p:cBhvr>
+                                      <p:to>
+                                        <p:strVal val="visible"/>
+                                      </p:to>
+                                    </p:set>
+                                  </p:childTnLst>
+                                </p:cTn>
+                              </p:par>
+                            </p:childTnLst>
+                          </p:cTn>
+                        </p:par>
+                      </p:childTnLst>
+                    </p:cTn>
+                  </p:par>
+                  <p:par>
+                    <p:cTn id="15" fill="hold">
+                      <p:stCondLst>
+                        <p:cond delay="indefinite"/>
+                      </p:stCondLst>
+                      <p:childTnLst>
+                        <p:par>
+                          <p:cTn id="16" fill="hold">
+                            <p:stCondLst>
+                              <p:cond delay="0"/>
+                            </p:stCondLst>
+                            <p:childTnLst>
+                              <p:par>
+                                <p:cTn id="17" presetID="1" presetClass="entr" presetSubtype="0" fill="hold" grpId="0" nodeType="clickEffect">
+                                  <p:stCondLst>
+                                    <p:cond delay="0"/>
+                                  </p:stCondLst>
+                                  <p:childTnLst>
+                                    <p:set>
+                                      <p:cBhvr>
+                                        <p:cTn id="18" dur="1" fill="hold">
+                                          <p:stCondLst>
+                                            <p:cond delay="0"/>
+                                          </p:stCondLst>
+                                        </p:cTn>
+                                        <p:tgtEl>
+                                          <p:spTgt spid="3">
+                                            <p:txEl>
+                                              <p:pRg st="3" end="3"/>
+                                            </p:txEl>
+                                          </p:spTgt>
+                                        </p:tgtEl>
+                                        <p:attrNameLst>
+                                          <p:attrName>style.visibility</p:attrName>
+                                        </p:attrNameLst>
+                                      </p:cBhvr>
+                                      <p:to>
+                                        <p:strVal val="visible"/>
+                                      </p:to>
+                                    </p:set>
+                                  </p:childTnLst>
+                                </p:cTn>
+                              </p:par>
+                            </p:childTnLst>
+                          </p:cTn>
+                        </p:par>
+                      </p:childTnLst>
+                    </p:cTn>
+                  </p:par>
+                  <p:par>
+                    <p:cTn id="19" fill="hold">
+                      <p:stCondLst>
+                        <p:cond delay="indefinite"/>
+                      </p:stCondLst>
+                      <p:childTnLst>
+                        <p:par>
+                          <p:cTn id="20" fill="hold">
+                            <p:stCondLst>
+                              <p:cond delay="0"/>
+                            </p:stCondLst>
+                            <p:childTnLst>
+                              <p:par>
+                                <p:cTn id="21" presetID="1" presetClass="entr" presetSubtype="0" fill="hold" grpId="0" nodeType="clickEffect">
+                                  <p:stCondLst>
+                                    <p:cond delay="0"/>
+                                  </p:stCondLst>
+                                  <p:childTnLst>
+                                    <p:set>
+                                      <p:cBhvr>
+                                        <p:cTn id="22" dur="1" fill="hold">
+                                          <p:stCondLst>
+                                            <p:cond delay="0"/>
+                                          </p:stCondLst>
+                                        </p:cTn>
+                                        <p:tgtEl>
+                                          <p:spTgt spid="4">
+                                            <p:txEl>
+                                              <p:pRg st="0" end="0"/>
+                                            </p:txEl>
+                                          </p:spTgt>
+                                        </p:tgtEl>
+                                        <p:attrNameLst>
+                                          <p:attrName>style.visibility</p:attrName>
+                                        </p:attrNameLst>
+                                      </p:cBhvr>
+                                      <p:to>
+                                        <p:strVal val="visible"/>
+                                      </p:to>
+                                    </p:set>
+                                  </p:childTnLst>
+                                </p:cTn>
+                              </p:par>
+                            </p:childTnLst>
+                          </p:cTn>
+                        </p:par>
+                      </p:childTnLst>
+                    </p:cTn>
+                  </p:par>
+                  <p:par>
+                    <p:cTn id="23" fill="hold">
+                      <p:stCondLst>
+                        <p:cond delay="indefinite"/>
+                      </p:stCondLst>
+                      <p:childTnLst>
+                        <p:par>
+                          <p:cTn id="24" fill="hold">
+                            <p:stCondLst>
+                              <p:cond delay="0"/>
+                            </p:stCondLst>
+                            <p:childTnLst>
+                              <p:par>
+                                <p:cTn id="25" presetID="1" presetClass="entr" presetSubtype="0" fill="hold" grpId="0" nodeType="clickEffect">
+                                  <p:stCondLst>
+                                    <p:cond delay="0"/>
+                                  </p:stCondLst>
+                                  <p:childTnLst>
+                                    <p:set>
+                                      <p:cBhvr>
+                                        <p:cTn id="26" dur="1" fill="hold">
+                                          <p:stCondLst>
+                                            <p:cond delay="0"/>
+                                          </p:stCondLst>
+                                        </p:cTn>
+                                        <p:tgtEl>
+                                          <p:spTgt spid="4">
+                                            <p:txEl>
+                                              <p:pRg st="1" end="1"/>
+                                            </p:txEl>
+                                          </p:spTgt>
+                                        </p:tgtEl>
+                                        <p:attrNameLst>
+                                          <p:attrName>style.visibility</p:attrName>
+                                        </p:attrNameLst>
+                                      </p:cBhvr>
+                                      <p:to>
+                                        <p:strVal val="visible"/>
+                                      </p:to>
+                                    </p:set>
+                                  </p:childTnLst>
+                                </p:cTn>
+                              </p:par>
+                            </p:childTnLst>
+                          </p:cTn>
+                        </p:par>
+                      </p:childTnLst>
+                    </p:cTn>
+                  </p:par>
+                  <p:par>
+                    <p:cTn id="27" fill="hold">
+                      <p:stCondLst>
+                        <p:cond delay="indefinite"/>
+                      </p:stCondLst>
+                      <p:childTnLst>
+                        <p:par>
+                          <p:cTn id="28" fill="hold">
+                            <p:stCondLst>
+                              <p:cond delay="0"/>
+                            </p:stCondLst>
+                            <p:childTnLst>
+                              <p:par>
+                                <p:cTn id="29" presetID="1" presetClass="entr" presetSubtype="0" fill="hold" grpId="0" nodeType="clickEffect">
+                                  <p:stCondLst>
+                                    <p:cond delay="0"/>
+                                  </p:stCondLst>
+                                  <p:childTnLst>
+                                    <p:set>
+                                      <p:cBhvr>
+                                        <p:cTn id="30" dur="1" fill="hold">
+                                          <p:stCondLst>
+                                            <p:cond delay="0"/>
+                                          </p:stCondLst>
+                                        </p:cTn>
+                                        <p:tgtEl>
+                                          <p:spTgt spid="4">
+                                            <p:txEl>
+                                              <p:pRg st="2" end="2"/>
+                                            </p:txEl>
+                                          </p:spTgt>
+                                        </p:tgtEl>
+                                        <p:attrNameLst>
+                                          <p:attrName>style.visibility</p:attrName>
+                                        </p:attrNameLst>
+                                      </p:cBhvr>
+                                      <p:to>
+                                        <p:strVal val="visible"/>
+                                      </p:to>
+                                    </p:set>
+                                  </p:childTnLst>
+                                </p:cTn>
+                              </p:par>
+                            </p:childTnLst>
+                          </p:cTn>
+                        </p:par>
+                      </p:childTnLst>
+                    </p:cTn>
+                  </p:par>
+                </p:childTnLst>
+              </p:cTn>
+              <p:prevCondLst>
+                <p:cond evt="onPrev" delay="0">
+                  <p:tgtEl>
+                    <p:sldTgt/>
+                  </p:tgtEl>
+                </p:cond>
+              </p:prevCondLst>
+              <p:nextCondLst>
+                <p:cond evt="onNext" delay="0">
+                  <p:tgtEl>
+                    <p:sldTgt/>
+                  </p:tgtEl>
+                </p:cond>
+              </p:nextCondLst>
+            </p:seq>
+          </p:childTnLst>
+        </p:cTn>
+      </p:par>
+    </p:tnLst>
+    <p:bldLst>
+      <p:bldP spid="3" grpId="0" uiExpand="1" build="p"/>
+      <p:bldP spid="4" grpId="0" uiExpand="1" build="p"/>
+    </p:bldLst>
+  </p:timing>
 </p:sld>
 </file>
 
@@ -8340,12 +8321,12 @@
       </p:grpSpPr>
       <p:sp>
         <p:nvSpPr>
-          <p:cNvPr id="2" name="Title 1"/>
-          <p:cNvSpPr>
-            <a:spLocks noGrp="1"/>
-          </p:cNvSpPr>
-          <p:nvPr>
-            <p:ph type="title"/>
+          <p:cNvPr id="3" name="Content Placeholder 2"/>
+          <p:cNvSpPr>
+            <a:spLocks noGrp="1"/>
+          </p:cNvSpPr>
+          <p:nvPr>
+            <p:ph idx="1"/>
           </p:nvPr>
         </p:nvSpPr>
         <p:spPr/>
@@ -8353,56 +8334,21 @@
           <a:bodyPr/>
           <a:lstStyle/>
           <a:p>
-            <a:pPr lvl="0" indent="0" marL="0">
-              <a:buNone/>
-            </a:pPr>
-            <a:r>
-              <a:rPr/>
-              <a:t>Orienting, info gathering</a:t>
-            </a:r>
-          </a:p>
-        </p:txBody>
-      </p:sp>
-      <p:sp>
-        <p:nvSpPr>
-          <p:cNvPr id="3" name="Content Placeholder 2"/>
-          <p:cNvSpPr>
-            <a:spLocks noGrp="1"/>
-          </p:cNvSpPr>
-          <p:nvPr>
-            <p:ph idx="1"/>
-          </p:nvPr>
-        </p:nvSpPr>
-        <p:spPr/>
-        <p:txBody>
-          <a:bodyPr/>
-          <a:lstStyle/>
-          <a:p>
-            <a:pPr lvl="0"/>
-            <a:r>
-              <a:rPr/>
-              <a:t>Eye movements</a:t>
-            </a:r>
-          </a:p>
-          <a:p>
-            <a:pPr lvl="0"/>
-            <a:r>
-              <a:rPr/>
-              <a:t>Head movements</a:t>
-            </a:r>
-          </a:p>
-          <a:p>
-            <a:pPr lvl="0"/>
-            <a:r>
-              <a:rPr/>
-              <a:t>Active touch</a:t>
-            </a:r>
-          </a:p>
-          <a:p>
-            <a:pPr lvl="0"/>
-            <a:r>
-              <a:rPr/>
-              <a:t>Sniffing &amp; tasting</a:t>
+            <a:pPr lvl="0" indent="0" marL="1270000">
+              <a:buNone/>
+            </a:pPr>
+            <a:r>
+              <a:rPr sz="2000" b="1"/>
+              <a:t>Your turn</a:t>
+            </a:r>
+          </a:p>
+          <a:p>
+            <a:pPr lvl="0" indent="0" marL="1270000">
+              <a:buNone/>
+            </a:pPr>
+            <a:r>
+              <a:rPr sz="2000"/>
+              <a:t>Does this miss any major classes of behavior?</a:t>
             </a:r>
           </a:p>
         </p:txBody>
@@ -8449,30 +8395,67 @@
             </a:pPr>
             <a:r>
               <a:rPr/>
-              <a:t>Balance</a:t>
-            </a:r>
-          </a:p>
-        </p:txBody>
-      </p:sp>
-      <p:sp>
-        <p:nvSpPr>
-          <p:cNvPr id="3" name="Content Placeholder 2"/>
-          <p:cNvSpPr>
-            <a:spLocks noGrp="1"/>
-          </p:cNvSpPr>
-          <p:nvPr>
-            <p:ph idx="1"/>
-          </p:nvPr>
-        </p:nvSpPr>
-        <p:spPr/>
-        <p:txBody>
-          <a:bodyPr/>
-          <a:lstStyle/>
-          <a:p>
-            <a:pPr lvl="0"/>
-            <a:r>
-              <a:rPr/>
-              <a:t>Cullen (2022);</a:t>
+              <a:t>Muscles: Engines of animal motion</a:t>
+            </a:r>
+          </a:p>
+        </p:txBody>
+      </p:sp>
+      <p:pic>
+        <p:nvPicPr>
+          <p:cNvPr descr="https://upload.wikimedia.org/wikipedia/commons/c/c4/Anterior_View_of_Muscles.jpg" id="0" name="Picture 1"/>
+          <p:cNvPicPr>
+            <a:picLocks noGrp="1" noChangeAspect="1"/>
+          </p:cNvPicPr>
+          <p:nvPr/>
+        </p:nvPicPr>
+        <p:blipFill>
+          <a:blip r:embed="rId2"/>
+          <a:stretch>
+            <a:fillRect/>
+          </a:stretch>
+        </p:blipFill>
+        <p:spPr bwMode="auto">
+          <a:xfrm>
+            <a:off x="457200" y="1295400"/>
+            <a:ext cx="4038600" cy="2692400"/>
+          </a:xfrm>
+          <a:prstGeom prst="rect">
+            <a:avLst/>
+          </a:prstGeom>
+          <a:noFill/>
+          <a:ln w="9525">
+            <a:noFill/>
+            <a:headEnd/>
+            <a:tailEnd/>
+          </a:ln>
+        </p:spPr>
+      </p:pic>
+      <p:sp>
+        <p:nvSpPr>
+          <p:cNvPr id="1" name="TextBox 3"/>
+          <p:cNvSpPr txBox="1"/>
+          <p:nvPr/>
+        </p:nvSpPr>
+        <p:spPr>
+          <a:xfrm>
+            <a:off x="457200" y="4076700"/>
+            <a:ext cx="4038600" cy="508000"/>
+          </a:xfrm>
+          <a:prstGeom prst="rect">
+            <a:avLst/>
+          </a:prstGeom>
+          <a:noFill/>
+        </p:spPr>
+        <p:txBody>
+          <a:bodyPr/>
+          <a:lstStyle/>
+          <a:p>
+            <a:pPr lvl="0" indent="0" marL="0" algn="ctr">
+              <a:buNone/>
+            </a:pPr>
+            <a:r>
+              <a:rPr/>
+              <a:t>By CFCF - Own work, CC BY-SA 4.0, https://commons.wikimedia.org/w/index.php?curid=37700550</a:t>
             </a:r>
           </a:p>
         </p:txBody>
@@ -8509,7 +8492,12 @@
             <p:ph type="title"/>
           </p:nvPr>
         </p:nvSpPr>
-        <p:spPr/>
+        <p:spPr>
+          <a:xfrm>
+            <a:off x="722313" y="3305176"/>
+            <a:ext cx="7772400" cy="1021556"/>
+          </a:xfrm>
+        </p:spPr>
         <p:txBody>
           <a:bodyPr/>
           <a:lstStyle/>
@@ -8519,30 +8507,7 @@
             </a:pPr>
             <a:r>
               <a:rPr/>
-              <a:t>Reaching &amp; grasping</a:t>
-            </a:r>
-          </a:p>
-        </p:txBody>
-      </p:sp>
-      <p:sp>
-        <p:nvSpPr>
-          <p:cNvPr id="3" name="Content Placeholder 2"/>
-          <p:cNvSpPr>
-            <a:spLocks noGrp="1"/>
-          </p:cNvSpPr>
-          <p:nvPr>
-            <p:ph idx="1"/>
-          </p:nvPr>
-        </p:nvSpPr>
-        <p:spPr/>
-        <p:txBody>
-          <a:bodyPr/>
-          <a:lstStyle/>
-          <a:p>
-            <a:pPr lvl="0"/>
-            <a:r>
-              <a:rPr/>
-              <a:t>Kim, Avraham, &amp; Ivry (2021); Di Caro, Cesari, Sala, &amp; Cattaneo (2025)</a:t>
+              <a:t>How muscles work</a:t>
             </a:r>
           </a:p>
         </p:txBody>
@@ -8589,7 +8554,7 @@
             </a:pPr>
             <a:r>
               <a:rPr/>
-              <a:t>Locomotion</a:t>
+              <a:t>Muscles are machines that</a:t>
             </a:r>
           </a:p>
         </p:txBody>
@@ -8601,7 +8566,7 @@
             <a:spLocks noGrp="1"/>
           </p:cNvSpPr>
           <p:nvPr>
-            <p:ph idx="1"/>
+            <p:ph idx="1" sz="half"/>
           </p:nvPr>
         </p:nvSpPr>
         <p:spPr/>
@@ -8612,234 +8577,7 @@
             <a:pPr lvl="0"/>
             <a:r>
               <a:rPr/>
-              <a:t>Purves et al. (2001); “Locomotion” (n.d.); Xing, Truccolo, &amp; Borton (2022)</a:t>
-            </a:r>
-          </a:p>
-        </p:txBody>
-      </p:sp>
-    </p:spTree>
-  </p:cSld>
-</p:sld>
-</file>
-
-<file path=ppt/slides/slide35.xml><?xml version="1.0" encoding="utf-8"?>
-<p:sld xmlns:a="http://schemas.openxmlformats.org/drawingml/2006/main" xmlns:r="http://schemas.openxmlformats.org/officeDocument/2006/relationships" xmlns:p="http://schemas.openxmlformats.org/presentationml/2006/main">
-  <p:cSld>
-    <p:spTree>
-      <p:nvGrpSpPr>
-        <p:cNvPr id="1" name=""/>
-        <p:cNvGrpSpPr/>
-        <p:nvPr/>
-      </p:nvGrpSpPr>
-      <p:grpSpPr>
-        <a:xfrm>
-          <a:off x="0" y="0"/>
-          <a:ext cx="0" cy="0"/>
-          <a:chOff x="0" y="0"/>
-          <a:chExt cx="0" cy="0"/>
-        </a:xfrm>
-      </p:grpSpPr>
-      <p:sp>
-        <p:nvSpPr>
-          <p:cNvPr id="2" name="Title 1"/>
-          <p:cNvSpPr>
-            <a:spLocks noGrp="1"/>
-          </p:cNvSpPr>
-          <p:nvPr>
-            <p:ph type="title"/>
-          </p:nvPr>
-        </p:nvSpPr>
-        <p:spPr/>
-        <p:txBody>
-          <a:bodyPr/>
-          <a:lstStyle/>
-          <a:p>
-            <a:pPr lvl="0" indent="0" marL="0">
-              <a:buNone/>
-            </a:pPr>
-            <a:r>
-              <a:rPr/>
-              <a:t>Communication</a:t>
-            </a:r>
-          </a:p>
-        </p:txBody>
-      </p:sp>
-      <p:sp>
-        <p:nvSpPr>
-          <p:cNvPr id="3" name="Content Placeholder 2"/>
-          <p:cNvSpPr>
-            <a:spLocks noGrp="1"/>
-          </p:cNvSpPr>
-          <p:nvPr>
-            <p:ph idx="1"/>
-          </p:nvPr>
-        </p:nvSpPr>
-        <p:spPr/>
-        <p:txBody>
-          <a:bodyPr/>
-          <a:lstStyle/>
-          <a:p>
-            <a:pPr lvl="0"/>
-            <a:r>
-              <a:rPr/>
-              <a:t>Speech</a:t>
-            </a:r>
-          </a:p>
-          <a:p>
-            <a:pPr lvl="1"/>
-            <a:r>
-              <a:rPr/>
-              <a:t>Khanna et al. (2024); Griffin (2024)</a:t>
-            </a:r>
-          </a:p>
-          <a:p>
-            <a:pPr lvl="1"/>
-            <a:r>
-              <a:rPr/>
-              <a:t>Zada et al. (2025)</a:t>
-            </a:r>
-          </a:p>
-          <a:p>
-            <a:pPr lvl="0"/>
-            <a:r>
-              <a:rPr/>
-              <a:t>Facial expression</a:t>
-            </a:r>
-          </a:p>
-          <a:p>
-            <a:pPr lvl="1"/>
-            <a:r>
-              <a:rPr/>
-              <a:t>Bress &amp; Cascio (2024)</a:t>
-            </a:r>
-          </a:p>
-          <a:p>
-            <a:pPr lvl="0"/>
-            <a:r>
-              <a:rPr/>
-              <a:t>Gesture</a:t>
-            </a:r>
-          </a:p>
-        </p:txBody>
-      </p:sp>
-    </p:spTree>
-  </p:cSld>
-</p:sld>
-</file>
-
-<file path=ppt/slides/slide36.xml><?xml version="1.0" encoding="utf-8"?>
-<p:sld xmlns:a="http://schemas.openxmlformats.org/drawingml/2006/main" xmlns:r="http://schemas.openxmlformats.org/officeDocument/2006/relationships" xmlns:p="http://schemas.openxmlformats.org/presentationml/2006/main">
-  <p:cSld>
-    <p:spTree>
-      <p:nvGrpSpPr>
-        <p:cNvPr id="1" name=""/>
-        <p:cNvGrpSpPr/>
-        <p:nvPr/>
-      </p:nvGrpSpPr>
-      <p:grpSpPr>
-        <a:xfrm>
-          <a:off x="0" y="0"/>
-          <a:ext cx="0" cy="0"/>
-          <a:chOff x="0" y="0"/>
-          <a:chExt cx="0" cy="0"/>
-        </a:xfrm>
-      </p:grpSpPr>
-      <p:sp>
-        <p:nvSpPr>
-          <p:cNvPr id="2" name="Title 1"/>
-          <p:cNvSpPr>
-            <a:spLocks noGrp="1"/>
-          </p:cNvSpPr>
-          <p:nvPr>
-            <p:ph type="title"/>
-          </p:nvPr>
-        </p:nvSpPr>
-        <p:spPr>
-          <a:xfrm>
-            <a:off x="722313" y="3305176"/>
-            <a:ext cx="7772400" cy="1021556"/>
-          </a:xfrm>
-        </p:spPr>
-        <p:txBody>
-          <a:bodyPr/>
-          <a:lstStyle/>
-          <a:p>
-            <a:pPr lvl="0" indent="0" marL="0">
-              <a:buNone/>
-            </a:pPr>
-            <a:r>
-              <a:rPr/>
-              <a:t>How muscles work</a:t>
-            </a:r>
-          </a:p>
-        </p:txBody>
-      </p:sp>
-    </p:spTree>
-  </p:cSld>
-</p:sld>
-</file>
-
-<file path=ppt/slides/slide37.xml><?xml version="1.0" encoding="utf-8"?>
-<p:sld xmlns:a="http://schemas.openxmlformats.org/drawingml/2006/main" xmlns:r="http://schemas.openxmlformats.org/officeDocument/2006/relationships" xmlns:p="http://schemas.openxmlformats.org/presentationml/2006/main">
-  <p:cSld>
-    <p:spTree>
-      <p:nvGrpSpPr>
-        <p:cNvPr id="1" name=""/>
-        <p:cNvGrpSpPr/>
-        <p:nvPr/>
-      </p:nvGrpSpPr>
-      <p:grpSpPr>
-        <a:xfrm>
-          <a:off x="0" y="0"/>
-          <a:ext cx="0" cy="0"/>
-          <a:chOff x="0" y="0"/>
-          <a:chExt cx="0" cy="0"/>
-        </a:xfrm>
-      </p:grpSpPr>
-      <p:sp>
-        <p:nvSpPr>
-          <p:cNvPr id="2" name="Title 1"/>
-          <p:cNvSpPr>
-            <a:spLocks noGrp="1"/>
-          </p:cNvSpPr>
-          <p:nvPr>
-            <p:ph type="title"/>
-          </p:nvPr>
-        </p:nvSpPr>
-        <p:spPr/>
-        <p:txBody>
-          <a:bodyPr/>
-          <a:lstStyle/>
-          <a:p>
-            <a:pPr lvl="0" indent="0" marL="0">
-              <a:buNone/>
-            </a:pPr>
-            <a:r>
-              <a:rPr/>
-              <a:t>Muscles are machines that</a:t>
-            </a:r>
-          </a:p>
-        </p:txBody>
-      </p:sp>
-      <p:sp>
-        <p:nvSpPr>
-          <p:cNvPr id="3" name="Content Placeholder 2"/>
-          <p:cNvSpPr>
-            <a:spLocks noGrp="1"/>
-          </p:cNvSpPr>
-          <p:nvPr>
-            <p:ph idx="1" sz="half"/>
-          </p:nvPr>
-        </p:nvSpPr>
-        <p:spPr/>
-        <p:txBody>
-          <a:bodyPr/>
-          <a:lstStyle/>
-          <a:p>
-            <a:pPr lvl="0"/>
-            <a:r>
-              <a:rPr/>
-              <a:t>Generate forces in one direction</a:t>
+              <a:t>Generate force…in one direction</a:t>
             </a:r>
           </a:p>
           <a:p>
@@ -8914,7 +8652,7 @@
 </p:sld>
 </file>
 
-<file path=ppt/slides/slide38.xml><?xml version="1.0" encoding="utf-8"?>
+<file path=ppt/slides/slide35.xml><?xml version="1.0" encoding="utf-8"?>
 <p:sld xmlns:a="http://schemas.openxmlformats.org/drawingml/2006/main" xmlns:r="http://schemas.openxmlformats.org/officeDocument/2006/relationships" xmlns:p="http://schemas.openxmlformats.org/presentationml/2006/main">
   <p:cSld>
     <p:spTree>
@@ -9019,7 +8757,7 @@
 </p:sld>
 </file>
 
-<file path=ppt/slides/slide39.xml><?xml version="1.0" encoding="utf-8"?>
+<file path=ppt/slides/slide36.xml><?xml version="1.0" encoding="utf-8"?>
 <p:sld xmlns:a="http://schemas.openxmlformats.org/drawingml/2006/main" xmlns:r="http://schemas.openxmlformats.org/officeDocument/2006/relationships" xmlns:p="http://schemas.openxmlformats.org/presentationml/2006/main">
   <p:cSld>
     <p:spTree>
@@ -9101,94 +8839,7 @@
 </p:sld>
 </file>
 
-<file path=ppt/slides/slide4.xml><?xml version="1.0" encoding="utf-8"?>
-<p:sld xmlns:a="http://schemas.openxmlformats.org/drawingml/2006/main" xmlns:r="http://schemas.openxmlformats.org/officeDocument/2006/relationships" xmlns:p="http://schemas.openxmlformats.org/presentationml/2006/main">
-  <p:cSld>
-    <p:spTree>
-      <p:nvGrpSpPr>
-        <p:cNvPr id="1" name=""/>
-        <p:cNvGrpSpPr/>
-        <p:nvPr/>
-      </p:nvGrpSpPr>
-      <p:grpSpPr>
-        <a:xfrm>
-          <a:off x="0" y="0"/>
-          <a:ext cx="0" cy="0"/>
-          <a:chOff x="0" y="0"/>
-          <a:chExt cx="0" cy="0"/>
-        </a:xfrm>
-      </p:grpSpPr>
-      <p:sp>
-        <p:nvSpPr>
-          <p:cNvPr id="2" name="Title 1"/>
-          <p:cNvSpPr>
-            <a:spLocks noGrp="1"/>
-          </p:cNvSpPr>
-          <p:nvPr>
-            <p:ph type="title"/>
-          </p:nvPr>
-        </p:nvSpPr>
-        <p:spPr/>
-        <p:txBody>
-          <a:bodyPr/>
-          <a:lstStyle/>
-          <a:p>
-            <a:pPr lvl="0" indent="0" marL="0">
-              <a:buNone/>
-            </a:pPr>
-            <a:r>
-              <a:rPr/>
-              <a:t>Announcements</a:t>
-            </a:r>
-          </a:p>
-        </p:txBody>
-      </p:sp>
-      <p:sp>
-        <p:nvSpPr>
-          <p:cNvPr id="3" name="Content Placeholder 2"/>
-          <p:cNvSpPr>
-            <a:spLocks noGrp="1"/>
-          </p:cNvSpPr>
-          <p:nvPr>
-            <p:ph idx="1"/>
-          </p:nvPr>
-        </p:nvSpPr>
-        <p:spPr/>
-        <p:txBody>
-          <a:bodyPr/>
-          <a:lstStyle/>
-          <a:p>
-            <a:pPr lvl="0"/>
-            <a:r>
-              <a:rPr/>
-              <a:t>Exercise ANAT due </a:t>
-            </a:r>
-            <a:r>
-              <a:rPr b="1"/>
-              <a:t>today</a:t>
-            </a:r>
-            <a:r>
-              <a:rPr/>
-              <a:t>.</a:t>
-            </a:r>
-          </a:p>
-          <a:p>
-            <a:pPr lvl="1"/>
-            <a:r>
-              <a:rPr>
-                <a:hlinkClick r:id="rId2"/>
-              </a:rPr>
-              <a:t>Canvas dropbox</a:t>
-            </a:r>
-          </a:p>
-        </p:txBody>
-      </p:sp>
-    </p:spTree>
-  </p:cSld>
-</p:sld>
-</file>
-
-<file path=ppt/slides/slide40.xml><?xml version="1.0" encoding="utf-8"?>
+<file path=ppt/slides/slide37.xml><?xml version="1.0" encoding="utf-8"?>
 <p:sld xmlns:a="http://schemas.openxmlformats.org/drawingml/2006/main" xmlns:r="http://schemas.openxmlformats.org/officeDocument/2006/relationships" xmlns:p="http://schemas.openxmlformats.org/presentationml/2006/main">
   <p:cSld>
     <p:spTree>
@@ -9265,7 +8916,7 @@
 </p:sld>
 </file>
 
-<file path=ppt/slides/slide41.xml><?xml version="1.0" encoding="utf-8"?>
+<file path=ppt/slides/slide38.xml><?xml version="1.0" encoding="utf-8"?>
 <p:sld xmlns:a="http://schemas.openxmlformats.org/drawingml/2006/main" xmlns:r="http://schemas.openxmlformats.org/officeDocument/2006/relationships" xmlns:p="http://schemas.openxmlformats.org/presentationml/2006/main">
   <p:cSld>
     <p:spTree>
@@ -9338,12 +8989,12 @@
           <a:p>
             <a:pPr lvl="1"/>
             <a:r>
-              <a:rPr/>
-              <a:t>Motor neuron + muscle fibers = </a:t>
-            </a:r>
-            <a:r>
               <a:rPr i="1"/>
-              <a:t>motor unit</a:t>
+              <a:t>Motor unit</a:t>
+            </a:r>
+            <a:r>
+              <a:rPr/>
+              <a:t> == Motor neuron + muscle fibers</a:t>
             </a:r>
           </a:p>
           <a:p>
@@ -9375,10 +9026,337 @@
       </p:sp>
     </p:spTree>
   </p:cSld>
+  <p:timing>
+    <p:tnLst>
+      <p:par>
+        <p:cTn id="1" dur="indefinite" restart="never" nodeType="tmRoot">
+          <p:childTnLst>
+            <p:seq concurrent="1" nextAc="seek">
+              <p:cTn id="2" dur="indefinite" nodeType="mainSeq">
+                <p:childTnLst>
+                  <p:par>
+                    <p:cTn id="3" fill="hold">
+                      <p:stCondLst>
+                        <p:cond delay="indefinite"/>
+                      </p:stCondLst>
+                      <p:childTnLst>
+                        <p:par>
+                          <p:cTn id="4" fill="hold">
+                            <p:stCondLst>
+                              <p:cond delay="0"/>
+                            </p:stCondLst>
+                            <p:childTnLst>
+                              <p:par>
+                                <p:cTn id="5" presetID="1" presetClass="entr" presetSubtype="0" fill="hold" grpId="0" nodeType="clickEffect">
+                                  <p:stCondLst>
+                                    <p:cond delay="0"/>
+                                  </p:stCondLst>
+                                  <p:childTnLst>
+                                    <p:set>
+                                      <p:cBhvr>
+                                        <p:cTn id="6" dur="1" fill="hold">
+                                          <p:stCondLst>
+                                            <p:cond delay="0"/>
+                                          </p:stCondLst>
+                                        </p:cTn>
+                                        <p:tgtEl>
+                                          <p:spTgt spid="3">
+                                            <p:txEl>
+                                              <p:pRg st="0" end="0"/>
+                                            </p:txEl>
+                                          </p:spTgt>
+                                        </p:tgtEl>
+                                        <p:attrNameLst>
+                                          <p:attrName>style.visibility</p:attrName>
+                                        </p:attrNameLst>
+                                      </p:cBhvr>
+                                      <p:to>
+                                        <p:strVal val="visible"/>
+                                      </p:to>
+                                    </p:set>
+                                  </p:childTnLst>
+                                </p:cTn>
+                              </p:par>
+                            </p:childTnLst>
+                          </p:cTn>
+                        </p:par>
+                      </p:childTnLst>
+                    </p:cTn>
+                  </p:par>
+                  <p:par>
+                    <p:cTn id="7" fill="hold">
+                      <p:stCondLst>
+                        <p:cond delay="indefinite"/>
+                      </p:stCondLst>
+                      <p:childTnLst>
+                        <p:par>
+                          <p:cTn id="8" fill="hold">
+                            <p:stCondLst>
+                              <p:cond delay="0"/>
+                            </p:stCondLst>
+                            <p:childTnLst>
+                              <p:par>
+                                <p:cTn id="9" presetID="1" presetClass="entr" presetSubtype="0" fill="hold" grpId="0" nodeType="clickEffect">
+                                  <p:stCondLst>
+                                    <p:cond delay="0"/>
+                                  </p:stCondLst>
+                                  <p:childTnLst>
+                                    <p:set>
+                                      <p:cBhvr>
+                                        <p:cTn id="10" dur="1" fill="hold">
+                                          <p:stCondLst>
+                                            <p:cond delay="0"/>
+                                          </p:stCondLst>
+                                        </p:cTn>
+                                        <p:tgtEl>
+                                          <p:spTgt spid="3">
+                                            <p:txEl>
+                                              <p:pRg st="1" end="1"/>
+                                            </p:txEl>
+                                          </p:spTgt>
+                                        </p:tgtEl>
+                                        <p:attrNameLst>
+                                          <p:attrName>style.visibility</p:attrName>
+                                        </p:attrNameLst>
+                                      </p:cBhvr>
+                                      <p:to>
+                                        <p:strVal val="visible"/>
+                                      </p:to>
+                                    </p:set>
+                                  </p:childTnLst>
+                                </p:cTn>
+                              </p:par>
+                            </p:childTnLst>
+                          </p:cTn>
+                        </p:par>
+                      </p:childTnLst>
+                    </p:cTn>
+                  </p:par>
+                  <p:par>
+                    <p:cTn id="11" fill="hold">
+                      <p:stCondLst>
+                        <p:cond delay="indefinite"/>
+                      </p:stCondLst>
+                      <p:childTnLst>
+                        <p:par>
+                          <p:cTn id="12" fill="hold">
+                            <p:stCondLst>
+                              <p:cond delay="0"/>
+                            </p:stCondLst>
+                            <p:childTnLst>
+                              <p:par>
+                                <p:cTn id="13" presetID="1" presetClass="entr" presetSubtype="0" fill="hold" grpId="0" nodeType="clickEffect">
+                                  <p:stCondLst>
+                                    <p:cond delay="0"/>
+                                  </p:stCondLst>
+                                  <p:childTnLst>
+                                    <p:set>
+                                      <p:cBhvr>
+                                        <p:cTn id="14" dur="1" fill="hold">
+                                          <p:stCondLst>
+                                            <p:cond delay="0"/>
+                                          </p:stCondLst>
+                                        </p:cTn>
+                                        <p:tgtEl>
+                                          <p:spTgt spid="3">
+                                            <p:txEl>
+                                              <p:pRg st="2" end="2"/>
+                                            </p:txEl>
+                                          </p:spTgt>
+                                        </p:tgtEl>
+                                        <p:attrNameLst>
+                                          <p:attrName>style.visibility</p:attrName>
+                                        </p:attrNameLst>
+                                      </p:cBhvr>
+                                      <p:to>
+                                        <p:strVal val="visible"/>
+                                      </p:to>
+                                    </p:set>
+                                  </p:childTnLst>
+                                </p:cTn>
+                              </p:par>
+                            </p:childTnLst>
+                          </p:cTn>
+                        </p:par>
+                      </p:childTnLst>
+                    </p:cTn>
+                  </p:par>
+                  <p:par>
+                    <p:cTn id="15" fill="hold">
+                      <p:stCondLst>
+                        <p:cond delay="indefinite"/>
+                      </p:stCondLst>
+                      <p:childTnLst>
+                        <p:par>
+                          <p:cTn id="16" fill="hold">
+                            <p:stCondLst>
+                              <p:cond delay="0"/>
+                            </p:stCondLst>
+                            <p:childTnLst>
+                              <p:par>
+                                <p:cTn id="17" presetID="1" presetClass="entr" presetSubtype="0" fill="hold" grpId="0" nodeType="clickEffect">
+                                  <p:stCondLst>
+                                    <p:cond delay="0"/>
+                                  </p:stCondLst>
+                                  <p:childTnLst>
+                                    <p:set>
+                                      <p:cBhvr>
+                                        <p:cTn id="18" dur="1" fill="hold">
+                                          <p:stCondLst>
+                                            <p:cond delay="0"/>
+                                          </p:stCondLst>
+                                        </p:cTn>
+                                        <p:tgtEl>
+                                          <p:spTgt spid="3">
+                                            <p:txEl>
+                                              <p:pRg st="3" end="3"/>
+                                            </p:txEl>
+                                          </p:spTgt>
+                                        </p:tgtEl>
+                                        <p:attrNameLst>
+                                          <p:attrName>style.visibility</p:attrName>
+                                        </p:attrNameLst>
+                                      </p:cBhvr>
+                                      <p:to>
+                                        <p:strVal val="visible"/>
+                                      </p:to>
+                                    </p:set>
+                                  </p:childTnLst>
+                                </p:cTn>
+                              </p:par>
+                            </p:childTnLst>
+                          </p:cTn>
+                        </p:par>
+                      </p:childTnLst>
+                    </p:cTn>
+                  </p:par>
+                  <p:par>
+                    <p:cTn id="19" fill="hold">
+                      <p:stCondLst>
+                        <p:cond delay="indefinite"/>
+                      </p:stCondLst>
+                      <p:childTnLst>
+                        <p:par>
+                          <p:cTn id="20" fill="hold">
+                            <p:stCondLst>
+                              <p:cond delay="0"/>
+                            </p:stCondLst>
+                            <p:childTnLst>
+                              <p:par>
+                                <p:cTn id="21" presetID="1" presetClass="entr" presetSubtype="0" fill="hold" grpId="0" nodeType="clickEffect">
+                                  <p:stCondLst>
+                                    <p:cond delay="0"/>
+                                  </p:stCondLst>
+                                  <p:childTnLst>
+                                    <p:set>
+                                      <p:cBhvr>
+                                        <p:cTn id="22" dur="1" fill="hold">
+                                          <p:stCondLst>
+                                            <p:cond delay="0"/>
+                                          </p:stCondLst>
+                                        </p:cTn>
+                                        <p:tgtEl>
+                                          <p:spTgt spid="3">
+                                            <p:txEl>
+                                              <p:pRg st="4" end="4"/>
+                                            </p:txEl>
+                                          </p:spTgt>
+                                        </p:tgtEl>
+                                        <p:attrNameLst>
+                                          <p:attrName>style.visibility</p:attrName>
+                                        </p:attrNameLst>
+                                      </p:cBhvr>
+                                      <p:to>
+                                        <p:strVal val="visible"/>
+                                      </p:to>
+                                    </p:set>
+                                  </p:childTnLst>
+                                </p:cTn>
+                              </p:par>
+                            </p:childTnLst>
+                          </p:cTn>
+                        </p:par>
+                      </p:childTnLst>
+                    </p:cTn>
+                  </p:par>
+                  <p:par>
+                    <p:cTn id="23" fill="hold">
+                      <p:stCondLst>
+                        <p:cond delay="indefinite"/>
+                      </p:stCondLst>
+                      <p:childTnLst>
+                        <p:par>
+                          <p:cTn id="24" fill="hold">
+                            <p:stCondLst>
+                              <p:cond delay="0"/>
+                            </p:stCondLst>
+                            <p:childTnLst>
+                              <p:par>
+                                <p:cTn id="25" presetID="1" presetClass="entr" presetSubtype="0" fill="hold" grpId="0" nodeType="clickEffect">
+                                  <p:stCondLst>
+                                    <p:cond delay="0"/>
+                                  </p:stCondLst>
+                                  <p:childTnLst>
+                                    <p:set>
+                                      <p:cBhvr>
+                                        <p:cTn id="26" dur="1" fill="hold">
+                                          <p:stCondLst>
+                                            <p:cond delay="0"/>
+                                          </p:stCondLst>
+                                        </p:cTn>
+                                        <p:tgtEl>
+                                          <p:spTgt spid="3">
+                                            <p:txEl>
+                                              <p:pRg st="5" end="5"/>
+                                            </p:txEl>
+                                          </p:spTgt>
+                                        </p:tgtEl>
+                                        <p:attrNameLst>
+                                          <p:attrName>style.visibility</p:attrName>
+                                        </p:attrNameLst>
+                                      </p:cBhvr>
+                                      <p:to>
+                                        <p:strVal val="visible"/>
+                                      </p:to>
+                                    </p:set>
+                                  </p:childTnLst>
+                                </p:cTn>
+                              </p:par>
+                            </p:childTnLst>
+                          </p:cTn>
+                        </p:par>
+                      </p:childTnLst>
+                    </p:cTn>
+                  </p:par>
+                </p:childTnLst>
+              </p:cTn>
+              <p:prevCondLst>
+                <p:cond evt="onPrev" delay="0">
+                  <p:tgtEl>
+                    <p:sldTgt/>
+                  </p:tgtEl>
+                </p:cond>
+              </p:prevCondLst>
+              <p:nextCondLst>
+                <p:cond evt="onNext" delay="0">
+                  <p:tgtEl>
+                    <p:sldTgt/>
+                  </p:tgtEl>
+                </p:cond>
+              </p:nextCondLst>
+            </p:seq>
+          </p:childTnLst>
+        </p:cTn>
+      </p:par>
+    </p:tnLst>
+    <p:bldLst>
+      <p:bldP spid="3" grpId="0" uiExpand="1" build="p"/>
+    </p:bldLst>
+  </p:timing>
 </p:sld>
 </file>
 
-<file path=ppt/slides/slide42.xml><?xml version="1.0" encoding="utf-8"?>
+<file path=ppt/slides/slide39.xml><?xml version="1.0" encoding="utf-8"?>
 <p:sld xmlns:a="http://schemas.openxmlformats.org/drawingml/2006/main" xmlns:r="http://schemas.openxmlformats.org/officeDocument/2006/relationships" xmlns:p="http://schemas.openxmlformats.org/presentationml/2006/main">
   <p:cSld>
     <p:spTree>
@@ -9460,7 +9438,94 @@
 </p:sld>
 </file>
 
-<file path=ppt/slides/slide43.xml><?xml version="1.0" encoding="utf-8"?>
+<file path=ppt/slides/slide4.xml><?xml version="1.0" encoding="utf-8"?>
+<p:sld xmlns:a="http://schemas.openxmlformats.org/drawingml/2006/main" xmlns:r="http://schemas.openxmlformats.org/officeDocument/2006/relationships" xmlns:p="http://schemas.openxmlformats.org/presentationml/2006/main">
+  <p:cSld>
+    <p:spTree>
+      <p:nvGrpSpPr>
+        <p:cNvPr id="1" name=""/>
+        <p:cNvGrpSpPr/>
+        <p:nvPr/>
+      </p:nvGrpSpPr>
+      <p:grpSpPr>
+        <a:xfrm>
+          <a:off x="0" y="0"/>
+          <a:ext cx="0" cy="0"/>
+          <a:chOff x="0" y="0"/>
+          <a:chExt cx="0" cy="0"/>
+        </a:xfrm>
+      </p:grpSpPr>
+      <p:sp>
+        <p:nvSpPr>
+          <p:cNvPr id="2" name="Title 1"/>
+          <p:cNvSpPr>
+            <a:spLocks noGrp="1"/>
+          </p:cNvSpPr>
+          <p:nvPr>
+            <p:ph type="title"/>
+          </p:nvPr>
+        </p:nvSpPr>
+        <p:spPr/>
+        <p:txBody>
+          <a:bodyPr/>
+          <a:lstStyle/>
+          <a:p>
+            <a:pPr lvl="0" indent="0" marL="0">
+              <a:buNone/>
+            </a:pPr>
+            <a:r>
+              <a:rPr/>
+              <a:t>Announcements</a:t>
+            </a:r>
+          </a:p>
+        </p:txBody>
+      </p:sp>
+      <p:sp>
+        <p:nvSpPr>
+          <p:cNvPr id="3" name="Content Placeholder 2"/>
+          <p:cNvSpPr>
+            <a:spLocks noGrp="1"/>
+          </p:cNvSpPr>
+          <p:nvPr>
+            <p:ph idx="1"/>
+          </p:nvPr>
+        </p:nvSpPr>
+        <p:spPr/>
+        <p:txBody>
+          <a:bodyPr/>
+          <a:lstStyle/>
+          <a:p>
+            <a:pPr lvl="0"/>
+            <a:r>
+              <a:rPr/>
+              <a:t>Exercise ANAT due </a:t>
+            </a:r>
+            <a:r>
+              <a:rPr b="1"/>
+              <a:t>today</a:t>
+            </a:r>
+            <a:r>
+              <a:rPr/>
+              <a:t>.</a:t>
+            </a:r>
+          </a:p>
+          <a:p>
+            <a:pPr lvl="1"/>
+            <a:r>
+              <a:rPr>
+                <a:hlinkClick r:id="rId2"/>
+              </a:rPr>
+              <a:t>Canvas dropbox</a:t>
+            </a:r>
+          </a:p>
+        </p:txBody>
+      </p:sp>
+    </p:spTree>
+  </p:cSld>
+</p:sld>
+</file>
+
+<file path=ppt/slides/slide40.xml><?xml version="1.0" encoding="utf-8"?>
 <p:sld xmlns:a="http://schemas.openxmlformats.org/drawingml/2006/main" xmlns:r="http://schemas.openxmlformats.org/officeDocument/2006/relationships" xmlns:p="http://schemas.openxmlformats.org/presentationml/2006/main">
   <p:cSld>
     <p:spTree>
@@ -9595,7 +9660,7 @@
 </p:sld>
 </file>
 
-<file path=ppt/slides/slide44.xml><?xml version="1.0" encoding="utf-8"?>
+<file path=ppt/slides/slide41.xml><?xml version="1.0" encoding="utf-8"?>
 <p:sld xmlns:a="http://schemas.openxmlformats.org/drawingml/2006/main" xmlns:r="http://schemas.openxmlformats.org/officeDocument/2006/relationships" xmlns:p="http://schemas.openxmlformats.org/presentationml/2006/main">
   <p:cSld>
     <p:spTree>
@@ -9654,15 +9719,37 @@
           <a:p>
             <a:pPr lvl="0"/>
             <a:r>
-              <a:rPr/>
-              <a:t>Extrafusal fibers generate force</a:t>
+              <a:rPr i="1"/>
+              <a:t>Extrafusal</a:t>
+            </a:r>
+            <a:r>
+              <a:rPr/>
+              <a:t> fibers</a:t>
+            </a:r>
+          </a:p>
+          <a:p>
+            <a:pPr lvl="1"/>
+            <a:r>
+              <a:rPr/>
+              <a:t>Generate force</a:t>
             </a:r>
           </a:p>
           <a:p>
             <a:pPr lvl="0"/>
             <a:r>
-              <a:rPr/>
-              <a:t>Intrafusal fibers contain stretch receptors</a:t>
+              <a:rPr i="1"/>
+              <a:t>Intrafusal</a:t>
+            </a:r>
+            <a:r>
+              <a:rPr/>
+              <a:t> fibers</a:t>
+            </a:r>
+          </a:p>
+          <a:p>
+            <a:pPr lvl="1"/>
+            <a:r>
+              <a:rPr/>
+              <a:t>Contain stretch receptors</a:t>
             </a:r>
           </a:p>
           <a:p>
@@ -9709,91 +9796,7 @@
 </p:sld>
 </file>
 
-<file path=ppt/slides/slide45.xml><?xml version="1.0" encoding="utf-8"?>
-<p:sld xmlns:a="http://schemas.openxmlformats.org/drawingml/2006/main" xmlns:r="http://schemas.openxmlformats.org/officeDocument/2006/relationships" xmlns:p="http://schemas.openxmlformats.org/presentationml/2006/main">
-  <p:cSld>
-    <p:spTree>
-      <p:nvGrpSpPr>
-        <p:cNvPr id="1" name=""/>
-        <p:cNvGrpSpPr/>
-        <p:nvPr/>
-      </p:nvGrpSpPr>
-      <p:grpSpPr>
-        <a:xfrm>
-          <a:off x="0" y="0"/>
-          <a:ext cx="0" cy="0"/>
-          <a:chOff x="0" y="0"/>
-          <a:chExt cx="0" cy="0"/>
-        </a:xfrm>
-      </p:grpSpPr>
-      <p:sp>
-        <p:nvSpPr>
-          <p:cNvPr id="2" name="Title 1"/>
-          <p:cNvSpPr>
-            <a:spLocks noGrp="1"/>
-          </p:cNvSpPr>
-          <p:nvPr>
-            <p:ph type="title"/>
-          </p:nvPr>
-        </p:nvSpPr>
-        <p:spPr/>
-        <p:txBody>
-          <a:bodyPr/>
-          <a:lstStyle/>
-          <a:p>
-            <a:pPr lvl="0" indent="0" marL="0">
-              <a:buNone/>
-            </a:pPr>
-            <a:r>
-              <a:rPr/>
-              <a:t>Intrafusal fibers</a:t>
-            </a:r>
-          </a:p>
-        </p:txBody>
-      </p:sp>
-      <p:sp>
-        <p:nvSpPr>
-          <p:cNvPr id="3" name="Content Placeholder 2"/>
-          <p:cNvSpPr>
-            <a:spLocks noGrp="1"/>
-          </p:cNvSpPr>
-          <p:nvPr>
-            <p:ph idx="1"/>
-          </p:nvPr>
-        </p:nvSpPr>
-        <p:spPr/>
-        <p:txBody>
-          <a:bodyPr/>
-          <a:lstStyle/>
-          <a:p>
-            <a:pPr lvl="0"/>
-            <a:r>
-              <a:rPr/>
-              <a:t>Sense muscle length and change in length, e.g. “stretch”</a:t>
-            </a:r>
-          </a:p>
-          <a:p>
-            <a:pPr lvl="0"/>
-            <a:r>
-              <a:rPr/>
-              <a:t>Also called muscle spindles</a:t>
-            </a:r>
-          </a:p>
-          <a:p>
-            <a:pPr lvl="0"/>
-            <a:r>
-              <a:rPr/>
-              <a:t>Provide muscle proprioception (perception about the self, a form of interoception)</a:t>
-            </a:r>
-          </a:p>
-        </p:txBody>
-      </p:sp>
-    </p:spTree>
-  </p:cSld>
-</p:sld>
-</file>
-
-<file path=ppt/slides/slide46.xml><?xml version="1.0" encoding="utf-8"?>
+<file path=ppt/slides/slide42.xml><?xml version="1.0" encoding="utf-8"?>
 <p:sld xmlns:a="http://schemas.openxmlformats.org/drawingml/2006/main" xmlns:r="http://schemas.openxmlformats.org/officeDocument/2006/relationships" xmlns:p="http://schemas.openxmlformats.org/presentationml/2006/main">
   <p:cSld>
     <p:spTree>
@@ -9855,14 +9858,116 @@
                 <a:pPr lvl="0"/>
                 <a:r>
                   <a:rPr/>
-                  <a:t>Muscle spindles are stretch receptors</a:t>
+                  <a:t>Sense muscle length and </a:t>
+                </a:r>
+                <a14:m>
+                  <m:oMath xmlns:m="http://schemas.openxmlformats.org/officeDocument/2006/math">
+                    <m:r>
+                      <m:t>δ</m:t>
+                    </m:r>
+                    <m:r>
+                      <m:t>l</m:t>
+                    </m:r>
+                  </m:oMath>
+                </a14:m>
+                <a:r>
+                  <a:rPr/>
+                  <a:t>, e.g. “stretch”</a:t>
+                </a:r>
+              </a:p>
+              <a:p>
+                <a:pPr lvl="0"/>
+                <a:r>
+                  <a:rPr/>
+                  <a:t>Provide muscle proprioception (perception about the self)</a:t>
+                </a:r>
+              </a:p>
+              <a:p>
+                <a:pPr lvl="0"/>
+                <a:r>
+                  <a:rPr/>
+                  <a:t>Proprioception a form of interoception</a:t>
+                </a:r>
+              </a:p>
+            </p:txBody>
+          </p:sp>
+        </mc:Choice>
+      </mc:AlternateContent>
+    </p:spTree>
+  </p:cSld>
+</p:sld>
+</file>
+
+<file path=ppt/slides/slide43.xml><?xml version="1.0" encoding="utf-8"?>
+<p:sld xmlns:a="http://schemas.openxmlformats.org/drawingml/2006/main" xmlns:r="http://schemas.openxmlformats.org/officeDocument/2006/relationships" xmlns:p="http://schemas.openxmlformats.org/presentationml/2006/main">
+  <p:cSld>
+    <p:spTree>
+      <p:nvGrpSpPr>
+        <p:cNvPr id="1" name=""/>
+        <p:cNvGrpSpPr/>
+        <p:nvPr/>
+      </p:nvGrpSpPr>
+      <p:grpSpPr>
+        <a:xfrm>
+          <a:off x="0" y="0"/>
+          <a:ext cx="0" cy="0"/>
+          <a:chOff x="0" y="0"/>
+          <a:chExt cx="0" cy="0"/>
+        </a:xfrm>
+      </p:grpSpPr>
+      <p:sp>
+        <p:nvSpPr>
+          <p:cNvPr id="2" name="Title 1"/>
+          <p:cNvSpPr>
+            <a:spLocks noGrp="1"/>
+          </p:cNvSpPr>
+          <p:nvPr>
+            <p:ph type="title"/>
+          </p:nvPr>
+        </p:nvSpPr>
+        <p:spPr/>
+        <p:txBody>
+          <a:bodyPr/>
+          <a:lstStyle/>
+          <a:p>
+            <a:pPr lvl="0" indent="0" marL="0">
+              <a:buNone/>
+            </a:pPr>
+            <a:r>
+              <a:rPr/>
+              <a:t>Intrafusal fibers</a:t>
+            </a:r>
+          </a:p>
+        </p:txBody>
+      </p:sp>
+      <mc:AlternateContent xmlns:mc="http://schemas.openxmlformats.org/markup-compatibility/2006">
+        <mc:Choice xmlns:a14="http://schemas.microsoft.com/office/drawing/2010/main" Requires="a14">
+          <p:sp>
+            <p:nvSpPr>
+              <p:cNvPr id="3" name="Content Placeholder 2"/>
+              <p:cNvSpPr>
+                <a:spLocks noGrp="1"/>
+              </p:cNvSpPr>
+              <p:nvPr>
+                <p:ph idx="1"/>
+              </p:nvPr>
+            </p:nvSpPr>
+            <p:spPr/>
+            <p:txBody>
+              <a:bodyPr/>
+              <a:lstStyle/>
+              <a:p>
+                <a:pPr lvl="0"/>
+                <a:r>
+                  <a:rPr/>
+                  <a:t>Stretch receptors (also called muscle spindles)</a:t>
                 </a:r>
               </a:p>
               <a:p>
                 <a:pPr lvl="1"/>
                 <a:r>
                   <a:rPr/>
-                  <a:t>Ennervated by by primary Ia afferents (sensory output from muscle)</a:t>
+                  <a:t>Ennervated by by primary Ia afferents (sensory output from muscle to CNS)</a:t>
                 </a:r>
               </a:p>
               <a:p>
@@ -9876,7 +9981,7 @@
                 <a:pPr lvl="0"/>
                 <a:r>
                   <a:rPr/>
-                  <a:t>Motor fiber</a:t>
+                  <a:t>Force-producing motor fiber</a:t>
                 </a:r>
               </a:p>
               <a:p>
@@ -9906,7 +10011,7 @@
 </p:sld>
 </file>
 
-<file path=ppt/slides/slide47.xml><?xml version="1.0" encoding="utf-8"?>
+<file path=ppt/slides/slide44.xml><?xml version="1.0" encoding="utf-8"?>
 <p:sld xmlns:a="http://schemas.openxmlformats.org/drawingml/2006/main" xmlns:r="http://schemas.openxmlformats.org/officeDocument/2006/relationships" xmlns:p="http://schemas.openxmlformats.org/presentationml/2006/main">
   <p:cSld>
     <p:spTree>
@@ -9998,7 +10103,84 @@
 </p:sld>
 </file>
 
-<file path=ppt/slides/slide48.xml><?xml version="1.0" encoding="utf-8"?>
+<file path=ppt/slides/slide45.xml><?xml version="1.0" encoding="utf-8"?>
+<p:sld xmlns:a="http://schemas.openxmlformats.org/drawingml/2006/main" xmlns:r="http://schemas.openxmlformats.org/officeDocument/2006/relationships" xmlns:p="http://schemas.openxmlformats.org/presentationml/2006/main">
+  <p:cSld>
+    <p:spTree>
+      <p:nvGrpSpPr>
+        <p:cNvPr id="1" name=""/>
+        <p:cNvGrpSpPr/>
+        <p:nvPr/>
+      </p:nvGrpSpPr>
+      <p:grpSpPr>
+        <a:xfrm>
+          <a:off x="0" y="0"/>
+          <a:ext cx="0" cy="0"/>
+          <a:chOff x="0" y="0"/>
+          <a:chExt cx="0" cy="0"/>
+        </a:xfrm>
+      </p:grpSpPr>
+      <p:sp>
+        <p:nvSpPr>
+          <p:cNvPr id="2" name="Title 1"/>
+          <p:cNvSpPr>
+            <a:spLocks noGrp="1"/>
+          </p:cNvSpPr>
+          <p:nvPr>
+            <p:ph type="title"/>
+          </p:nvPr>
+        </p:nvSpPr>
+        <p:spPr/>
+        <p:txBody>
+          <a:bodyPr/>
+          <a:lstStyle/>
+          <a:p>
+            <a:pPr lvl="0" indent="0" marL="0">
+              <a:buNone/>
+            </a:pPr>
+            <a:r>
+              <a:rPr/>
+              <a:t>Circuit</a:t>
+            </a:r>
+          </a:p>
+        </p:txBody>
+      </p:sp>
+      <p:pic>
+        <p:nvPicPr>
+          <p:cNvPr descr="wk-03-2026-01-29-action_files/figure-pptx/mermaid-figure-5.png" id="0" name="Picture 1"/>
+          <p:cNvPicPr>
+            <a:picLocks noGrp="1" noChangeAspect="1"/>
+          </p:cNvPicPr>
+          <p:nvPr/>
+        </p:nvPicPr>
+        <p:blipFill>
+          <a:blip r:embed="rId2"/>
+          <a:stretch>
+            <a:fillRect/>
+          </a:stretch>
+        </p:blipFill>
+        <p:spPr bwMode="auto">
+          <a:xfrm>
+            <a:off x="457200" y="2019300"/>
+            <a:ext cx="8229600" cy="1739900"/>
+          </a:xfrm>
+          <a:prstGeom prst="rect">
+            <a:avLst/>
+          </a:prstGeom>
+          <a:noFill/>
+          <a:ln w="9525">
+            <a:noFill/>
+            <a:headEnd/>
+            <a:tailEnd/>
+          </a:ln>
+        </p:spPr>
+      </p:pic>
+    </p:spTree>
+  </p:cSld>
+</p:sld>
+</file>
+
+<file path=ppt/slides/slide46.xml><?xml version="1.0" encoding="utf-8"?>
 <p:sld xmlns:a="http://schemas.openxmlformats.org/drawingml/2006/main" xmlns:r="http://schemas.openxmlformats.org/officeDocument/2006/relationships" xmlns:p="http://schemas.openxmlformats.org/presentationml/2006/main">
   <p:cSld>
     <p:spTree>
@@ -10110,6 +10292,27 @@
                 </a:r>
               </a:p>
               <a:p>
+                <a:pPr lvl="1"/>
+                <a:r>
+                  <a:rPr/>
+                  <a:t>1 synapse </a:t>
+                </a:r>
+                <a14:m>
+                  <m:oMath xmlns:m="http://schemas.openxmlformats.org/officeDocument/2006/math">
+                    <m:r>
+                      <m:rPr>
+                        <m:sty m:val="p"/>
+                      </m:rPr>
+                      <m:t>→</m:t>
+                    </m:r>
+                  </m:oMath>
+                </a14:m>
+                <a:r>
+                  <a:rPr/>
+                  <a:t> monosynaptic</a:t>
+                </a:r>
+              </a:p>
+              <a:p>
                 <a:pPr lvl="0"/>
                 <a14:m>
                   <m:oMath xmlns:m="http://schemas.openxmlformats.org/officeDocument/2006/math">
@@ -10136,10 +10339,386 @@
       </mc:AlternateContent>
     </p:spTree>
   </p:cSld>
+  <p:timing>
+    <p:tnLst>
+      <p:par>
+        <p:cTn id="1" dur="indefinite" restart="never" nodeType="tmRoot">
+          <p:childTnLst>
+            <p:seq concurrent="1" nextAc="seek">
+              <p:cTn id="2" dur="indefinite" nodeType="mainSeq">
+                <p:childTnLst>
+                  <p:par>
+                    <p:cTn id="3" fill="hold">
+                      <p:stCondLst>
+                        <p:cond delay="indefinite"/>
+                      </p:stCondLst>
+                      <p:childTnLst>
+                        <p:par>
+                          <p:cTn id="4" fill="hold">
+                            <p:stCondLst>
+                              <p:cond delay="0"/>
+                            </p:stCondLst>
+                            <p:childTnLst>
+                              <p:par>
+                                <p:cTn id="5" presetID="1" presetClass="entr" presetSubtype="0" fill="hold" grpId="0" nodeType="clickEffect">
+                                  <p:stCondLst>
+                                    <p:cond delay="0"/>
+                                  </p:stCondLst>
+                                  <p:childTnLst>
+                                    <p:set>
+                                      <p:cBhvr>
+                                        <p:cTn id="6" dur="1" fill="hold">
+                                          <p:stCondLst>
+                                            <p:cond delay="0"/>
+                                          </p:stCondLst>
+                                        </p:cTn>
+                                        <p:tgtEl>
+                                          <p:spTgt spid="3">
+                                            <p:txEl>
+                                              <p:pRg st="0" end="0"/>
+                                            </p:txEl>
+                                          </p:spTgt>
+                                        </p:tgtEl>
+                                        <p:attrNameLst>
+                                          <p:attrName>style.visibility</p:attrName>
+                                        </p:attrNameLst>
+                                      </p:cBhvr>
+                                      <p:to>
+                                        <p:strVal val="visible"/>
+                                      </p:to>
+                                    </p:set>
+                                  </p:childTnLst>
+                                </p:cTn>
+                              </p:par>
+                            </p:childTnLst>
+                          </p:cTn>
+                        </p:par>
+                      </p:childTnLst>
+                    </p:cTn>
+                  </p:par>
+                  <p:par>
+                    <p:cTn id="7" fill="hold">
+                      <p:stCondLst>
+                        <p:cond delay="indefinite"/>
+                      </p:stCondLst>
+                      <p:childTnLst>
+                        <p:par>
+                          <p:cTn id="8" fill="hold">
+                            <p:stCondLst>
+                              <p:cond delay="0"/>
+                            </p:stCondLst>
+                            <p:childTnLst>
+                              <p:par>
+                                <p:cTn id="9" presetID="1" presetClass="entr" presetSubtype="0" fill="hold" grpId="0" nodeType="clickEffect">
+                                  <p:stCondLst>
+                                    <p:cond delay="0"/>
+                                  </p:stCondLst>
+                                  <p:childTnLst>
+                                    <p:set>
+                                      <p:cBhvr>
+                                        <p:cTn id="10" dur="1" fill="hold">
+                                          <p:stCondLst>
+                                            <p:cond delay="0"/>
+                                          </p:stCondLst>
+                                        </p:cTn>
+                                        <p:tgtEl>
+                                          <p:spTgt spid="3">
+                                            <p:txEl>
+                                              <p:pRg st="1" end="1"/>
+                                            </p:txEl>
+                                          </p:spTgt>
+                                        </p:tgtEl>
+                                        <p:attrNameLst>
+                                          <p:attrName>style.visibility</p:attrName>
+                                        </p:attrNameLst>
+                                      </p:cBhvr>
+                                      <p:to>
+                                        <p:strVal val="visible"/>
+                                      </p:to>
+                                    </p:set>
+                                  </p:childTnLst>
+                                </p:cTn>
+                              </p:par>
+                            </p:childTnLst>
+                          </p:cTn>
+                        </p:par>
+                      </p:childTnLst>
+                    </p:cTn>
+                  </p:par>
+                  <p:par>
+                    <p:cTn id="11" fill="hold">
+                      <p:stCondLst>
+                        <p:cond delay="indefinite"/>
+                      </p:stCondLst>
+                      <p:childTnLst>
+                        <p:par>
+                          <p:cTn id="12" fill="hold">
+                            <p:stCondLst>
+                              <p:cond delay="0"/>
+                            </p:stCondLst>
+                            <p:childTnLst>
+                              <p:par>
+                                <p:cTn id="13" presetID="1" presetClass="entr" presetSubtype="0" fill="hold" grpId="0" nodeType="clickEffect">
+                                  <p:stCondLst>
+                                    <p:cond delay="0"/>
+                                  </p:stCondLst>
+                                  <p:childTnLst>
+                                    <p:set>
+                                      <p:cBhvr>
+                                        <p:cTn id="14" dur="1" fill="hold">
+                                          <p:stCondLst>
+                                            <p:cond delay="0"/>
+                                          </p:stCondLst>
+                                        </p:cTn>
+                                        <p:tgtEl>
+                                          <p:spTgt spid="3">
+                                            <p:txEl>
+                                              <p:pRg st="2" end="2"/>
+                                            </p:txEl>
+                                          </p:spTgt>
+                                        </p:tgtEl>
+                                        <p:attrNameLst>
+                                          <p:attrName>style.visibility</p:attrName>
+                                        </p:attrNameLst>
+                                      </p:cBhvr>
+                                      <p:to>
+                                        <p:strVal val="visible"/>
+                                      </p:to>
+                                    </p:set>
+                                  </p:childTnLst>
+                                </p:cTn>
+                              </p:par>
+                            </p:childTnLst>
+                          </p:cTn>
+                        </p:par>
+                      </p:childTnLst>
+                    </p:cTn>
+                  </p:par>
+                  <p:par>
+                    <p:cTn id="15" fill="hold">
+                      <p:stCondLst>
+                        <p:cond delay="indefinite"/>
+                      </p:stCondLst>
+                      <p:childTnLst>
+                        <p:par>
+                          <p:cTn id="16" fill="hold">
+                            <p:stCondLst>
+                              <p:cond delay="0"/>
+                            </p:stCondLst>
+                            <p:childTnLst>
+                              <p:par>
+                                <p:cTn id="17" presetID="1" presetClass="entr" presetSubtype="0" fill="hold" grpId="0" nodeType="clickEffect">
+                                  <p:stCondLst>
+                                    <p:cond delay="0"/>
+                                  </p:stCondLst>
+                                  <p:childTnLst>
+                                    <p:set>
+                                      <p:cBhvr>
+                                        <p:cTn id="18" dur="1" fill="hold">
+                                          <p:stCondLst>
+                                            <p:cond delay="0"/>
+                                          </p:stCondLst>
+                                        </p:cTn>
+                                        <p:tgtEl>
+                                          <p:spTgt spid="3">
+                                            <p:txEl>
+                                              <p:pRg st="3" end="3"/>
+                                            </p:txEl>
+                                          </p:spTgt>
+                                        </p:tgtEl>
+                                        <p:attrNameLst>
+                                          <p:attrName>style.visibility</p:attrName>
+                                        </p:attrNameLst>
+                                      </p:cBhvr>
+                                      <p:to>
+                                        <p:strVal val="visible"/>
+                                      </p:to>
+                                    </p:set>
+                                  </p:childTnLst>
+                                </p:cTn>
+                              </p:par>
+                            </p:childTnLst>
+                          </p:cTn>
+                        </p:par>
+                      </p:childTnLst>
+                    </p:cTn>
+                  </p:par>
+                  <p:par>
+                    <p:cTn id="19" fill="hold">
+                      <p:stCondLst>
+                        <p:cond delay="indefinite"/>
+                      </p:stCondLst>
+                      <p:childTnLst>
+                        <p:par>
+                          <p:cTn id="20" fill="hold">
+                            <p:stCondLst>
+                              <p:cond delay="0"/>
+                            </p:stCondLst>
+                            <p:childTnLst>
+                              <p:par>
+                                <p:cTn id="21" presetID="1" presetClass="entr" presetSubtype="0" fill="hold" grpId="0" nodeType="clickEffect">
+                                  <p:stCondLst>
+                                    <p:cond delay="0"/>
+                                  </p:stCondLst>
+                                  <p:childTnLst>
+                                    <p:set>
+                                      <p:cBhvr>
+                                        <p:cTn id="22" dur="1" fill="hold">
+                                          <p:stCondLst>
+                                            <p:cond delay="0"/>
+                                          </p:stCondLst>
+                                        </p:cTn>
+                                        <p:tgtEl>
+                                          <p:spTgt spid="3">
+                                            <p:txEl>
+                                              <p:pRg st="4" end="4"/>
+                                            </p:txEl>
+                                          </p:spTgt>
+                                        </p:tgtEl>
+                                        <p:attrNameLst>
+                                          <p:attrName>style.visibility</p:attrName>
+                                        </p:attrNameLst>
+                                      </p:cBhvr>
+                                      <p:to>
+                                        <p:strVal val="visible"/>
+                                      </p:to>
+                                    </p:set>
+                                  </p:childTnLst>
+                                </p:cTn>
+                              </p:par>
+                            </p:childTnLst>
+                          </p:cTn>
+                        </p:par>
+                      </p:childTnLst>
+                    </p:cTn>
+                  </p:par>
+                  <p:par>
+                    <p:cTn id="23" fill="hold">
+                      <p:stCondLst>
+                        <p:cond delay="indefinite"/>
+                      </p:stCondLst>
+                      <p:childTnLst>
+                        <p:par>
+                          <p:cTn id="24" fill="hold">
+                            <p:stCondLst>
+                              <p:cond delay="0"/>
+                            </p:stCondLst>
+                            <p:childTnLst>
+                              <p:par>
+                                <p:cTn id="25" presetID="1" presetClass="entr" presetSubtype="0" fill="hold" grpId="0" nodeType="clickEffect">
+                                  <p:stCondLst>
+                                    <p:cond delay="0"/>
+                                  </p:stCondLst>
+                                  <p:childTnLst>
+                                    <p:set>
+                                      <p:cBhvr>
+                                        <p:cTn id="26" dur="1" fill="hold">
+                                          <p:stCondLst>
+                                            <p:cond delay="0"/>
+                                          </p:stCondLst>
+                                        </p:cTn>
+                                        <p:tgtEl>
+                                          <p:spTgt spid="3">
+                                            <p:txEl>
+                                              <p:pRg st="5" end="5"/>
+                                            </p:txEl>
+                                          </p:spTgt>
+                                        </p:tgtEl>
+                                        <p:attrNameLst>
+                                          <p:attrName>style.visibility</p:attrName>
+                                        </p:attrNameLst>
+                                      </p:cBhvr>
+                                      <p:to>
+                                        <p:strVal val="visible"/>
+                                      </p:to>
+                                    </p:set>
+                                  </p:childTnLst>
+                                </p:cTn>
+                              </p:par>
+                            </p:childTnLst>
+                          </p:cTn>
+                        </p:par>
+                      </p:childTnLst>
+                    </p:cTn>
+                  </p:par>
+                  <p:par>
+                    <p:cTn id="27" fill="hold">
+                      <p:stCondLst>
+                        <p:cond delay="indefinite"/>
+                      </p:stCondLst>
+                      <p:childTnLst>
+                        <p:par>
+                          <p:cTn id="28" fill="hold">
+                            <p:stCondLst>
+                              <p:cond delay="0"/>
+                            </p:stCondLst>
+                            <p:childTnLst>
+                              <p:par>
+                                <p:cTn id="29" presetID="1" presetClass="entr" presetSubtype="0" fill="hold" grpId="0" nodeType="clickEffect">
+                                  <p:stCondLst>
+                                    <p:cond delay="0"/>
+                                  </p:stCondLst>
+                                  <p:childTnLst>
+                                    <p:set>
+                                      <p:cBhvr>
+                                        <p:cTn id="30" dur="1" fill="hold">
+                                          <p:stCondLst>
+                                            <p:cond delay="0"/>
+                                          </p:stCondLst>
+                                        </p:cTn>
+                                        <p:tgtEl>
+                                          <p:spTgt spid="3">
+                                            <p:txEl>
+                                              <p:pRg st="6" end="6"/>
+                                            </p:txEl>
+                                          </p:spTgt>
+                                        </p:tgtEl>
+                                        <p:attrNameLst>
+                                          <p:attrName>style.visibility</p:attrName>
+                                        </p:attrNameLst>
+                                      </p:cBhvr>
+                                      <p:to>
+                                        <p:strVal val="visible"/>
+                                      </p:to>
+                                    </p:set>
+                                  </p:childTnLst>
+                                </p:cTn>
+                              </p:par>
+                            </p:childTnLst>
+                          </p:cTn>
+                        </p:par>
+                      </p:childTnLst>
+                    </p:cTn>
+                  </p:par>
+                </p:childTnLst>
+              </p:cTn>
+              <p:prevCondLst>
+                <p:cond evt="onPrev" delay="0">
+                  <p:tgtEl>
+                    <p:sldTgt/>
+                  </p:tgtEl>
+                </p:cond>
+              </p:prevCondLst>
+              <p:nextCondLst>
+                <p:cond evt="onNext" delay="0">
+                  <p:tgtEl>
+                    <p:sldTgt/>
+                  </p:tgtEl>
+                </p:cond>
+              </p:nextCondLst>
+            </p:seq>
+          </p:childTnLst>
+        </p:cTn>
+      </p:par>
+    </p:tnLst>
+    <p:bldLst>
+      <p:bldP spid="3" grpId="0" uiExpand="1" build="p"/>
+    </p:bldLst>
+  </p:timing>
 </p:sld>
 </file>
 
-<file path=ppt/slides/slide49.xml><?xml version="1.0" encoding="utf-8"?>
+<file path=ppt/slides/slide47.xml><?xml version="1.0" encoding="utf-8"?>
 <p:sld xmlns:a="http://schemas.openxmlformats.org/drawingml/2006/main" xmlns:r="http://schemas.openxmlformats.org/officeDocument/2006/relationships" xmlns:p="http://schemas.openxmlformats.org/presentationml/2006/main">
   <p:cSld>
     <p:spTree>
@@ -10259,98 +10838,7 @@
 </p:sld>
 </file>
 
-<file path=ppt/slides/slide5.xml><?xml version="1.0" encoding="utf-8"?>
-<p:sld xmlns:a="http://schemas.openxmlformats.org/drawingml/2006/main" xmlns:r="http://schemas.openxmlformats.org/officeDocument/2006/relationships" xmlns:p="http://schemas.openxmlformats.org/presentationml/2006/main">
-  <p:cSld>
-    <p:spTree>
-      <p:nvGrpSpPr>
-        <p:cNvPr id="1" name=""/>
-        <p:cNvGrpSpPr/>
-        <p:nvPr/>
-      </p:nvGrpSpPr>
-      <p:grpSpPr>
-        <a:xfrm>
-          <a:off x="0" y="0"/>
-          <a:ext cx="0" cy="0"/>
-          <a:chOff x="0" y="0"/>
-          <a:chExt cx="0" cy="0"/>
-        </a:xfrm>
-      </p:grpSpPr>
-      <p:sp>
-        <p:nvSpPr>
-          <p:cNvPr id="2" name="Title 1"/>
-          <p:cNvSpPr>
-            <a:spLocks noGrp="1"/>
-          </p:cNvSpPr>
-          <p:nvPr>
-            <p:ph type="title"/>
-          </p:nvPr>
-        </p:nvSpPr>
-        <p:spPr/>
-        <p:txBody>
-          <a:bodyPr/>
-          <a:lstStyle/>
-          <a:p>
-            <a:pPr lvl="0" indent="0" marL="0">
-              <a:buNone/>
-            </a:pPr>
-            <a:r>
-              <a:rPr/>
-              <a:t>Today’s topics</a:t>
-            </a:r>
-          </a:p>
-        </p:txBody>
-      </p:sp>
-      <p:sp>
-        <p:nvSpPr>
-          <p:cNvPr id="3" name="Content Placeholder 2"/>
-          <p:cNvSpPr>
-            <a:spLocks noGrp="1"/>
-          </p:cNvSpPr>
-          <p:nvPr>
-            <p:ph idx="1"/>
-          </p:nvPr>
-        </p:nvSpPr>
-        <p:spPr/>
-        <p:txBody>
-          <a:bodyPr/>
-          <a:lstStyle/>
-          <a:p>
-            <a:pPr lvl="0"/>
-            <a:r>
-              <a:rPr/>
-              <a:t>On action</a:t>
-            </a:r>
-          </a:p>
-          <a:p>
-            <a:pPr lvl="0"/>
-            <a:r>
-              <a:rPr/>
-              <a:t>How muscles work</a:t>
-            </a:r>
-          </a:p>
-          <a:p>
-            <a:pPr lvl="0"/>
-            <a:r>
-              <a:rPr/>
-              <a:t>Controlling muscles</a:t>
-            </a:r>
-          </a:p>
-          <a:p>
-            <a:pPr lvl="0"/>
-            <a:r>
-              <a:rPr/>
-              <a:t>Illustrative motor systems</a:t>
-            </a:r>
-          </a:p>
-        </p:txBody>
-      </p:sp>
-    </p:spTree>
-  </p:cSld>
-</p:sld>
-</file>
-
-<file path=ppt/slides/slide50.xml><?xml version="1.0" encoding="utf-8"?>
+<file path=ppt/slides/slide48.xml><?xml version="1.0" encoding="utf-8"?>
 <p:sld xmlns:a="http://schemas.openxmlformats.org/drawingml/2006/main" xmlns:r="http://schemas.openxmlformats.org/officeDocument/2006/relationships" xmlns:p="http://schemas.openxmlformats.org/presentationml/2006/main">
   <p:cSld>
     <p:spTree>
@@ -10402,7 +10890,7 @@
 </p:sld>
 </file>
 
-<file path=ppt/slides/slide51.xml><?xml version="1.0" encoding="utf-8"?>
+<file path=ppt/slides/slide49.xml><?xml version="1.0" encoding="utf-8"?>
 <p:sld xmlns:a="http://schemas.openxmlformats.org/drawingml/2006/main" xmlns:r="http://schemas.openxmlformats.org/officeDocument/2006/relationships" xmlns:p="http://schemas.openxmlformats.org/presentationml/2006/main">
   <p:cSld>
     <p:spTree>
@@ -10454,7 +10942,7 @@
 </p:sld>
 </file>
 
-<file path=ppt/slides/slide52.xml><?xml version="1.0" encoding="utf-8"?>
+<file path=ppt/slides/slide5.xml><?xml version="1.0" encoding="utf-8"?>
 <p:sld xmlns:a="http://schemas.openxmlformats.org/drawingml/2006/main" xmlns:r="http://schemas.openxmlformats.org/officeDocument/2006/relationships" xmlns:p="http://schemas.openxmlformats.org/presentationml/2006/main">
   <p:cSld>
     <p:spTree>
@@ -10473,6 +10961,31 @@
       </p:grpSpPr>
       <p:sp>
         <p:nvSpPr>
+          <p:cNvPr id="2" name="Title 1"/>
+          <p:cNvSpPr>
+            <a:spLocks noGrp="1"/>
+          </p:cNvSpPr>
+          <p:nvPr>
+            <p:ph type="title"/>
+          </p:nvPr>
+        </p:nvSpPr>
+        <p:spPr/>
+        <p:txBody>
+          <a:bodyPr/>
+          <a:lstStyle/>
+          <a:p>
+            <a:pPr lvl="0" indent="0" marL="0">
+              <a:buNone/>
+            </a:pPr>
+            <a:r>
+              <a:rPr/>
+              <a:t>Today’s topics</a:t>
+            </a:r>
+          </a:p>
+        </p:txBody>
+      </p:sp>
+      <p:sp>
+        <p:nvSpPr>
           <p:cNvPr id="3" name="Content Placeholder 2"/>
           <p:cNvSpPr>
             <a:spLocks noGrp="1"/>
@@ -10486,27 +10999,32 @@
           <a:bodyPr/>
           <a:lstStyle/>
           <a:p>
-            <a:pPr lvl="0" indent="0" marL="1270000">
-              <a:buNone/>
-            </a:pPr>
-            <a:r>
-              <a:rPr sz="2000" b="1"/>
-              <a:t>Note</a:t>
-            </a:r>
-          </a:p>
-          <a:p>
-            <a:pPr lvl="0" indent="0" marL="1270000">
-              <a:buNone/>
-            </a:pPr>
-            <a:r>
-              <a:rPr sz="2000"/>
-              <a:t>This is a bit like the role of a belayer in rock climbing.</a:t>
-            </a:r>
-          </a:p>
-          <a:p>
-            <a:pPr lvl="0" indent="0" marL="1270000">
-              <a:buNone/>
-            </a:pPr>
+            <a:pPr lvl="0"/>
+            <a:r>
+              <a:rPr/>
+              <a:t>On action</a:t>
+            </a:r>
+          </a:p>
+          <a:p>
+            <a:pPr lvl="0"/>
+            <a:r>
+              <a:rPr/>
+              <a:t>How muscles work</a:t>
+            </a:r>
+          </a:p>
+          <a:p>
+            <a:pPr lvl="0"/>
+            <a:r>
+              <a:rPr/>
+              <a:t>Controlling muscles</a:t>
+            </a:r>
+          </a:p>
+          <a:p>
+            <a:pPr lvl="0"/>
+            <a:r>
+              <a:rPr/>
+              <a:t>Illustrative motor systems</a:t>
+            </a:r>
           </a:p>
         </p:txBody>
       </p:sp>
@@ -10515,7 +11033,68 @@
 </p:sld>
 </file>
 
-<file path=ppt/slides/slide53.xml><?xml version="1.0" encoding="utf-8"?>
+<file path=ppt/slides/slide50.xml><?xml version="1.0" encoding="utf-8"?>
+<p:sld xmlns:a="http://schemas.openxmlformats.org/drawingml/2006/main" xmlns:r="http://schemas.openxmlformats.org/officeDocument/2006/relationships" xmlns:p="http://schemas.openxmlformats.org/presentationml/2006/main">
+  <p:cSld>
+    <p:spTree>
+      <p:nvGrpSpPr>
+        <p:cNvPr id="1" name=""/>
+        <p:cNvGrpSpPr/>
+        <p:nvPr/>
+      </p:nvGrpSpPr>
+      <p:grpSpPr>
+        <a:xfrm>
+          <a:off x="0" y="0"/>
+          <a:ext cx="0" cy="0"/>
+          <a:chOff x="0" y="0"/>
+          <a:chExt cx="0" cy="0"/>
+        </a:xfrm>
+      </p:grpSpPr>
+      <p:sp>
+        <p:nvSpPr>
+          <p:cNvPr id="3" name="Content Placeholder 2"/>
+          <p:cNvSpPr>
+            <a:spLocks noGrp="1"/>
+          </p:cNvSpPr>
+          <p:nvPr>
+            <p:ph idx="1"/>
+          </p:nvPr>
+        </p:nvSpPr>
+        <p:spPr/>
+        <p:txBody>
+          <a:bodyPr/>
+          <a:lstStyle/>
+          <a:p>
+            <a:pPr lvl="0" indent="0" marL="1270000">
+              <a:buNone/>
+            </a:pPr>
+            <a:r>
+              <a:rPr sz="2000" b="1"/>
+              <a:t>Note</a:t>
+            </a:r>
+          </a:p>
+          <a:p>
+            <a:pPr lvl="0" indent="0" marL="1270000">
+              <a:buNone/>
+            </a:pPr>
+            <a:r>
+              <a:rPr sz="2000"/>
+              <a:t>This is a bit like the role of a belayer in rock climbing.</a:t>
+            </a:r>
+          </a:p>
+          <a:p>
+            <a:pPr lvl="0" indent="0" marL="1270000">
+              <a:buNone/>
+            </a:pPr>
+          </a:p>
+        </p:txBody>
+      </p:sp>
+    </p:spTree>
+  </p:cSld>
+</p:sld>
+</file>
+
+<file path=ppt/slides/slide51.xml><?xml version="1.0" encoding="utf-8"?>
 <p:sld xmlns:a="http://schemas.openxmlformats.org/drawingml/2006/main" xmlns:r="http://schemas.openxmlformats.org/officeDocument/2006/relationships" xmlns:p="http://schemas.openxmlformats.org/presentationml/2006/main">
   <p:cSld>
     <p:spTree>
@@ -10567,7 +11146,7 @@
 </p:sld>
 </file>
 
-<file path=ppt/slides/slide54.xml><?xml version="1.0" encoding="utf-8"?>
+<file path=ppt/slides/slide52.xml><?xml version="1.0" encoding="utf-8"?>
 <p:sld xmlns:a="http://schemas.openxmlformats.org/drawingml/2006/main" xmlns:r="http://schemas.openxmlformats.org/officeDocument/2006/relationships" xmlns:p="http://schemas.openxmlformats.org/presentationml/2006/main">
   <p:cSld>
     <p:spTree>
@@ -10614,7 +11193,7 @@
 </p:sld>
 </file>
 
-<file path=ppt/slides/slide55.xml><?xml version="1.0" encoding="utf-8"?>
+<file path=ppt/slides/slide53.xml><?xml version="1.0" encoding="utf-8"?>
 <p:sld xmlns:a="http://schemas.openxmlformats.org/drawingml/2006/main" xmlns:r="http://schemas.openxmlformats.org/officeDocument/2006/relationships" xmlns:p="http://schemas.openxmlformats.org/presentationml/2006/main">
   <p:cSld>
     <p:spTree>
@@ -10716,7 +11295,7 @@
 </p:sld>
 </file>
 
-<file path=ppt/slides/slide56.xml><?xml version="1.0" encoding="utf-8"?>
+<file path=ppt/slides/slide54.xml><?xml version="1.0" encoding="utf-8"?>
 <p:sld xmlns:a="http://schemas.openxmlformats.org/drawingml/2006/main" xmlns:r="http://schemas.openxmlformats.org/officeDocument/2006/relationships" xmlns:p="http://schemas.openxmlformats.org/presentationml/2006/main">
   <p:cSld>
     <p:spTree>
@@ -10799,7 +11378,7 @@
 </p:sld>
 </file>
 
-<file path=ppt/slides/slide57.xml><?xml version="1.0" encoding="utf-8"?>
+<file path=ppt/slides/slide55.xml><?xml version="1.0" encoding="utf-8"?>
 <p:sld xmlns:a="http://schemas.openxmlformats.org/drawingml/2006/main" xmlns:r="http://schemas.openxmlformats.org/officeDocument/2006/relationships" xmlns:p="http://schemas.openxmlformats.org/presentationml/2006/main">
   <p:cSld>
     <p:spTree>
@@ -10889,7 +11468,7 @@
 </p:sld>
 </file>
 
-<file path=ppt/slides/slide58.xml><?xml version="1.0" encoding="utf-8"?>
+<file path=ppt/slides/slide56.xml><?xml version="1.0" encoding="utf-8"?>
 <p:sld xmlns:a="http://schemas.openxmlformats.org/drawingml/2006/main" xmlns:r="http://schemas.openxmlformats.org/officeDocument/2006/relationships" xmlns:p="http://schemas.openxmlformats.org/presentationml/2006/main">
   <p:cSld>
     <p:spTree>
@@ -11051,7 +11630,7 @@
 </p:sld>
 </file>
 
-<file path=ppt/slides/slide59.xml><?xml version="1.0" encoding="utf-8"?>
+<file path=ppt/slides/slide57.xml><?xml version="1.0" encoding="utf-8"?>
 <p:sld xmlns:a="http://schemas.openxmlformats.org/drawingml/2006/main" xmlns:r="http://schemas.openxmlformats.org/officeDocument/2006/relationships" xmlns:p="http://schemas.openxmlformats.org/presentationml/2006/main">
   <p:cSld>
     <p:spTree>
@@ -11142,7 +11721,7 @@
 </p:sld>
 </file>
 
-<file path=ppt/slides/slide6.xml><?xml version="1.0" encoding="utf-8"?>
+<file path=ppt/slides/slide58.xml><?xml version="1.0" encoding="utf-8"?>
 <p:sld xmlns:a="http://schemas.openxmlformats.org/drawingml/2006/main" xmlns:r="http://schemas.openxmlformats.org/officeDocument/2006/relationships" xmlns:p="http://schemas.openxmlformats.org/presentationml/2006/main">
   <p:cSld>
     <p:spTree>
@@ -11169,53 +11748,6 @@
             <p:ph type="title"/>
           </p:nvPr>
         </p:nvSpPr>
-        <p:spPr/>
-        <p:txBody>
-          <a:bodyPr/>
-          <a:lstStyle/>
-          <a:p>
-            <a:pPr lvl="0" indent="0" marL="0">
-              <a:buNone/>
-            </a:pPr>
-            <a:r>
-              <a:rPr/>
-              <a:t>Warm-up</a:t>
-            </a:r>
-          </a:p>
-        </p:txBody>
-      </p:sp>
-    </p:spTree>
-  </p:cSld>
-</p:sld>
-</file>
-
-<file path=ppt/slides/slide60.xml><?xml version="1.0" encoding="utf-8"?>
-<p:sld xmlns:a="http://schemas.openxmlformats.org/drawingml/2006/main" xmlns:r="http://schemas.openxmlformats.org/officeDocument/2006/relationships" xmlns:p="http://schemas.openxmlformats.org/presentationml/2006/main">
-  <p:cSld>
-    <p:spTree>
-      <p:nvGrpSpPr>
-        <p:cNvPr id="1" name=""/>
-        <p:cNvGrpSpPr/>
-        <p:nvPr/>
-      </p:nvGrpSpPr>
-      <p:grpSpPr>
-        <a:xfrm>
-          <a:off x="0" y="0"/>
-          <a:ext cx="0" cy="0"/>
-          <a:chOff x="0" y="0"/>
-          <a:chExt cx="0" cy="0"/>
-        </a:xfrm>
-      </p:grpSpPr>
-      <p:sp>
-        <p:nvSpPr>
-          <p:cNvPr id="2" name="Title 1"/>
-          <p:cNvSpPr>
-            <a:spLocks noGrp="1"/>
-          </p:cNvSpPr>
-          <p:nvPr>
-            <p:ph type="title"/>
-          </p:nvPr>
-        </p:nvSpPr>
         <p:spPr>
           <a:xfrm>
             <a:off x="722313" y="3305176"/>
@@ -11241,7 +11773,7 @@
 </p:sld>
 </file>
 
-<file path=ppt/slides/slide61.xml><?xml version="1.0" encoding="utf-8"?>
+<file path=ppt/slides/slide59.xml><?xml version="1.0" encoding="utf-8"?>
 <p:sld xmlns:a="http://schemas.openxmlformats.org/drawingml/2006/main" xmlns:r="http://schemas.openxmlformats.org/officeDocument/2006/relationships" xmlns:p="http://schemas.openxmlformats.org/presentationml/2006/main">
   <p:cSld>
     <p:spTree>
@@ -11323,7 +11855,7 @@
 </p:sld>
 </file>
 
-<file path=ppt/slides/slide62.xml><?xml version="1.0" encoding="utf-8"?>
+<file path=ppt/slides/slide6.xml><?xml version="1.0" encoding="utf-8"?>
 <p:sld xmlns:a="http://schemas.openxmlformats.org/drawingml/2006/main" xmlns:r="http://schemas.openxmlformats.org/officeDocument/2006/relationships" xmlns:p="http://schemas.openxmlformats.org/presentationml/2006/main">
   <p:cSld>
     <p:spTree>
@@ -11360,44 +11892,7 @@
             </a:pPr>
             <a:r>
               <a:rPr/>
-              <a:t>Key nodes</a:t>
-            </a:r>
-          </a:p>
-        </p:txBody>
-      </p:sp>
-      <p:sp>
-        <p:nvSpPr>
-          <p:cNvPr id="3" name="Content Placeholder 2"/>
-          <p:cNvSpPr>
-            <a:spLocks noGrp="1"/>
-          </p:cNvSpPr>
-          <p:nvPr>
-            <p:ph idx="1"/>
-          </p:nvPr>
-        </p:nvSpPr>
-        <p:spPr/>
-        <p:txBody>
-          <a:bodyPr/>
-          <a:lstStyle/>
-          <a:p>
-            <a:pPr lvl="0"/>
-            <a:r>
-              <a:rPr/>
-              <a:t>Primary motor cortex (M1)</a:t>
-            </a:r>
-          </a:p>
-          <a:p>
-            <a:pPr lvl="1"/>
-            <a:r>
-              <a:rPr/>
-              <a:t>Anterior to central sulcus</a:t>
-            </a:r>
-          </a:p>
-          <a:p>
-            <a:pPr lvl="1"/>
-            <a:r>
-              <a:rPr/>
-              <a:t>Frontal lobe</a:t>
+              <a:t>Warm-up</a:t>
             </a:r>
           </a:p>
         </p:txBody>
@@ -11407,7 +11902,91 @@
 </p:sld>
 </file>
 
-<file path=ppt/slides/slide63.xml><?xml version="1.0" encoding="utf-8"?>
+<file path=ppt/slides/slide60.xml><?xml version="1.0" encoding="utf-8"?>
+<p:sld xmlns:a="http://schemas.openxmlformats.org/drawingml/2006/main" xmlns:r="http://schemas.openxmlformats.org/officeDocument/2006/relationships" xmlns:p="http://schemas.openxmlformats.org/presentationml/2006/main">
+  <p:cSld>
+    <p:spTree>
+      <p:nvGrpSpPr>
+        <p:cNvPr id="1" name=""/>
+        <p:cNvGrpSpPr/>
+        <p:nvPr/>
+      </p:nvGrpSpPr>
+      <p:grpSpPr>
+        <a:xfrm>
+          <a:off x="0" y="0"/>
+          <a:ext cx="0" cy="0"/>
+          <a:chOff x="0" y="0"/>
+          <a:chExt cx="0" cy="0"/>
+        </a:xfrm>
+      </p:grpSpPr>
+      <p:sp>
+        <p:nvSpPr>
+          <p:cNvPr id="2" name="Title 1"/>
+          <p:cNvSpPr>
+            <a:spLocks noGrp="1"/>
+          </p:cNvSpPr>
+          <p:nvPr>
+            <p:ph type="title"/>
+          </p:nvPr>
+        </p:nvSpPr>
+        <p:spPr/>
+        <p:txBody>
+          <a:bodyPr/>
+          <a:lstStyle/>
+          <a:p>
+            <a:pPr lvl="0" indent="0" marL="0">
+              <a:buNone/>
+            </a:pPr>
+            <a:r>
+              <a:rPr/>
+              <a:t>Key nodes</a:t>
+            </a:r>
+          </a:p>
+        </p:txBody>
+      </p:sp>
+      <p:sp>
+        <p:nvSpPr>
+          <p:cNvPr id="3" name="Content Placeholder 2"/>
+          <p:cNvSpPr>
+            <a:spLocks noGrp="1"/>
+          </p:cNvSpPr>
+          <p:nvPr>
+            <p:ph idx="1"/>
+          </p:nvPr>
+        </p:nvSpPr>
+        <p:spPr/>
+        <p:txBody>
+          <a:bodyPr/>
+          <a:lstStyle/>
+          <a:p>
+            <a:pPr lvl="0"/>
+            <a:r>
+              <a:rPr/>
+              <a:t>Primary motor cortex (M1)</a:t>
+            </a:r>
+          </a:p>
+          <a:p>
+            <a:pPr lvl="1"/>
+            <a:r>
+              <a:rPr/>
+              <a:t>Anterior to central sulcus</a:t>
+            </a:r>
+          </a:p>
+          <a:p>
+            <a:pPr lvl="1"/>
+            <a:r>
+              <a:rPr/>
+              <a:t>Frontal lobe</a:t>
+            </a:r>
+          </a:p>
+        </p:txBody>
+      </p:sp>
+    </p:spTree>
+  </p:cSld>
+</p:sld>
+</file>
+
+<file path=ppt/slides/slide61.xml><?xml version="1.0" encoding="utf-8"?>
 <p:sld xmlns:a="http://schemas.openxmlformats.org/drawingml/2006/main" xmlns:r="http://schemas.openxmlformats.org/officeDocument/2006/relationships" xmlns:p="http://schemas.openxmlformats.org/presentationml/2006/main">
   <p:cSld>
     <p:spTree>
@@ -11495,7 +12074,7 @@
 </p:sld>
 </file>
 
-<file path=ppt/slides/slide64.xml><?xml version="1.0" encoding="utf-8"?>
+<file path=ppt/slides/slide62.xml><?xml version="1.0" encoding="utf-8"?>
 <p:sld xmlns:a="http://schemas.openxmlformats.org/drawingml/2006/main" xmlns:r="http://schemas.openxmlformats.org/officeDocument/2006/relationships" xmlns:p="http://schemas.openxmlformats.org/presentationml/2006/main">
   <p:cSld>
     <p:spTree>
@@ -11602,7 +12181,7 @@
 </p:sld>
 </file>
 
-<file path=ppt/slides/slide65.xml><?xml version="1.0" encoding="utf-8"?>
+<file path=ppt/slides/slide63.xml><?xml version="1.0" encoding="utf-8"?>
 <p:sld xmlns:a="http://schemas.openxmlformats.org/drawingml/2006/main" xmlns:r="http://schemas.openxmlformats.org/officeDocument/2006/relationships" xmlns:p="http://schemas.openxmlformats.org/presentationml/2006/main">
   <p:cSld>
     <p:spTree>
@@ -11721,7 +12300,7 @@
 </p:sld>
 </file>
 
-<file path=ppt/slides/slide66.xml><?xml version="1.0" encoding="utf-8"?>
+<file path=ppt/slides/slide64.xml><?xml version="1.0" encoding="utf-8"?>
 <p:sld xmlns:a="http://schemas.openxmlformats.org/drawingml/2006/main" xmlns:r="http://schemas.openxmlformats.org/officeDocument/2006/relationships" xmlns:p="http://schemas.openxmlformats.org/presentationml/2006/main">
   <p:cSld>
     <p:spTree>
@@ -11798,7 +12377,7 @@
 </p:sld>
 </file>
 
-<file path=ppt/slides/slide67.xml><?xml version="1.0" encoding="utf-8"?>
+<file path=ppt/slides/slide65.xml><?xml version="1.0" encoding="utf-8"?>
 <p:sld xmlns:a="http://schemas.openxmlformats.org/drawingml/2006/main" xmlns:r="http://schemas.openxmlformats.org/officeDocument/2006/relationships" xmlns:p="http://schemas.openxmlformats.org/presentationml/2006/main">
   <p:cSld>
     <p:spTree>
@@ -11905,7 +12484,7 @@
 </p:sld>
 </file>
 
-<file path=ppt/slides/slide68.xml><?xml version="1.0" encoding="utf-8"?>
+<file path=ppt/slides/slide66.xml><?xml version="1.0" encoding="utf-8"?>
 <p:sld xmlns:a="http://schemas.openxmlformats.org/drawingml/2006/main" xmlns:r="http://schemas.openxmlformats.org/officeDocument/2006/relationships" xmlns:p="http://schemas.openxmlformats.org/presentationml/2006/main">
   <p:cSld>
     <p:spTree>
@@ -12010,7 +12589,7 @@
 </p:sld>
 </file>
 
-<file path=ppt/slides/slide69.xml><?xml version="1.0" encoding="utf-8"?>
+<file path=ppt/slides/slide67.xml><?xml version="1.0" encoding="utf-8"?>
 <p:sld xmlns:a="http://schemas.openxmlformats.org/drawingml/2006/main" xmlns:r="http://schemas.openxmlformats.org/officeDocument/2006/relationships" xmlns:p="http://schemas.openxmlformats.org/presentationml/2006/main">
   <p:cSld>
     <p:spTree>
@@ -12138,6 +12717,211 @@
 </p:sld>
 </file>
 
+<file path=ppt/slides/slide68.xml><?xml version="1.0" encoding="utf-8"?>
+<p:sld xmlns:a="http://schemas.openxmlformats.org/drawingml/2006/main" xmlns:r="http://schemas.openxmlformats.org/officeDocument/2006/relationships" xmlns:p="http://schemas.openxmlformats.org/presentationml/2006/main">
+  <p:cSld>
+    <p:spTree>
+      <p:nvGrpSpPr>
+        <p:cNvPr id="1" name=""/>
+        <p:cNvGrpSpPr/>
+        <p:nvPr/>
+      </p:nvGrpSpPr>
+      <p:grpSpPr>
+        <a:xfrm>
+          <a:off x="0" y="0"/>
+          <a:ext cx="0" cy="0"/>
+          <a:chOff x="0" y="0"/>
+          <a:chExt cx="0" cy="0"/>
+        </a:xfrm>
+      </p:grpSpPr>
+      <p:sp>
+        <p:nvSpPr>
+          <p:cNvPr id="2" name="Title 1"/>
+          <p:cNvSpPr>
+            <a:spLocks noGrp="1"/>
+          </p:cNvSpPr>
+          <p:nvPr>
+            <p:ph type="title"/>
+          </p:nvPr>
+        </p:nvSpPr>
+        <p:spPr/>
+        <p:txBody>
+          <a:bodyPr/>
+          <a:lstStyle/>
+          <a:p>
+            <a:pPr lvl="0" indent="0" marL="0">
+              <a:buNone/>
+            </a:pPr>
+            <a:r>
+              <a:rPr/>
+              <a:t>Extrapyramidal system</a:t>
+            </a:r>
+          </a:p>
+        </p:txBody>
+      </p:sp>
+      <p:sp>
+        <p:nvSpPr>
+          <p:cNvPr id="3" name="Content Placeholder 2"/>
+          <p:cNvSpPr>
+            <a:spLocks noGrp="1"/>
+          </p:cNvSpPr>
+          <p:nvPr>
+            <p:ph idx="1"/>
+          </p:nvPr>
+        </p:nvSpPr>
+        <p:spPr/>
+        <p:txBody>
+          <a:bodyPr/>
+          <a:lstStyle/>
+          <a:p>
+            <a:pPr lvl="0"/>
+            <a:r>
+              <a:rPr>
+                <a:hlinkClick r:id="rId2"/>
+              </a:rPr>
+              <a:t>Tectospinal tract</a:t>
+            </a:r>
+          </a:p>
+          <a:p>
+            <a:pPr lvl="0"/>
+            <a:r>
+              <a:rPr>
+                <a:hlinkClick r:id="rId3"/>
+              </a:rPr>
+              <a:t>Lateral Vestibulospinal tract</a:t>
+            </a:r>
+          </a:p>
+          <a:p>
+            <a:pPr lvl="0"/>
+            <a:r>
+              <a:rPr>
+                <a:hlinkClick r:id="rId4"/>
+              </a:rPr>
+              <a:t>Reticulospinal tract</a:t>
+            </a:r>
+          </a:p>
+          <a:p>
+            <a:pPr lvl="0"/>
+            <a:r>
+              <a:rPr/>
+              <a:t>Rubrospinal tract</a:t>
+            </a:r>
+          </a:p>
+          <a:p>
+            <a:pPr lvl="0"/>
+            <a:r>
+              <a:rPr>
+                <a:hlinkClick r:id="rId5"/>
+              </a:rPr>
+              <a:t>Involuntary movements</a:t>
+            </a:r>
+          </a:p>
+          <a:p>
+            <a:pPr lvl="1"/>
+            <a:r>
+              <a:rPr/>
+              <a:t>Posture, balance, arousal</a:t>
+            </a:r>
+          </a:p>
+        </p:txBody>
+      </p:sp>
+    </p:spTree>
+  </p:cSld>
+</p:sld>
+</file>
+
+<file path=ppt/slides/slide69.xml><?xml version="1.0" encoding="utf-8"?>
+<p:sld xmlns:a="http://schemas.openxmlformats.org/drawingml/2006/main" xmlns:r="http://schemas.openxmlformats.org/officeDocument/2006/relationships" xmlns:p="http://schemas.openxmlformats.org/presentationml/2006/main">
+  <p:cSld>
+    <p:spTree>
+      <p:nvGrpSpPr>
+        <p:cNvPr id="1" name=""/>
+        <p:cNvGrpSpPr/>
+        <p:nvPr/>
+      </p:nvGrpSpPr>
+      <p:grpSpPr>
+        <a:xfrm>
+          <a:off x="0" y="0"/>
+          <a:ext cx="0" cy="0"/>
+          <a:chOff x="0" y="0"/>
+          <a:chExt cx="0" cy="0"/>
+        </a:xfrm>
+      </p:grpSpPr>
+      <p:sp>
+        <p:nvSpPr>
+          <p:cNvPr id="2" name="Title 1"/>
+          <p:cNvSpPr>
+            <a:spLocks noGrp="1"/>
+          </p:cNvSpPr>
+          <p:nvPr>
+            <p:ph type="title"/>
+          </p:nvPr>
+        </p:nvSpPr>
+        <p:spPr/>
+        <p:txBody>
+          <a:bodyPr/>
+          <a:lstStyle/>
+          <a:p>
+            <a:pPr lvl="0" indent="0" marL="0">
+              <a:buNone/>
+            </a:pPr>
+            <a:r>
+              <a:rPr/>
+              <a:t>Direct cortical control</a:t>
+            </a:r>
+          </a:p>
+        </p:txBody>
+      </p:sp>
+      <p:sp>
+        <p:nvSpPr>
+          <p:cNvPr id="3" name="Content Placeholder 2"/>
+          <p:cNvSpPr>
+            <a:spLocks noGrp="1"/>
+          </p:cNvSpPr>
+          <p:nvPr>
+            <p:ph idx="1"/>
+          </p:nvPr>
+        </p:nvSpPr>
+        <p:spPr/>
+        <p:txBody>
+          <a:bodyPr/>
+          <a:lstStyle/>
+          <a:p>
+            <a:pPr lvl="0"/>
+            <a:r>
+              <a:rPr/>
+              <a:t>Over </a:t>
+            </a:r>
+            <a:r>
+              <a:rPr i="1"/>
+              <a:t>some</a:t>
+            </a:r>
+            <a:r>
+              <a:rPr/>
+              <a:t> motor neurons</a:t>
+            </a:r>
+          </a:p>
+          <a:p>
+            <a:pPr lvl="0"/>
+            <a:r>
+              <a:rPr/>
+              <a:t>In humans; prevalence uncertain in other animals</a:t>
+            </a:r>
+          </a:p>
+          <a:p>
+            <a:pPr lvl="0"/>
+            <a:r>
+              <a:rPr/>
+              <a:t>For individuated (“fractionated”) movements of fingers, toes, lips, but other muscles, too.</a:t>
+            </a:r>
+          </a:p>
+        </p:txBody>
+      </p:sp>
+    </p:spTree>
+  </p:cSld>
+</p:sld>
+</file>
+
 <file path=ppt/slides/slide7.xml><?xml version="1.0" encoding="utf-8"?>
 <p:sld xmlns:a="http://schemas.openxmlformats.org/drawingml/2006/main" xmlns:r="http://schemas.openxmlformats.org/officeDocument/2006/relationships" xmlns:p="http://schemas.openxmlformats.org/presentationml/2006/main">
   <p:cSld>
@@ -12217,211 +13001,6 @@
 </file>
 
 <file path=ppt/slides/slide70.xml><?xml version="1.0" encoding="utf-8"?>
-<p:sld xmlns:a="http://schemas.openxmlformats.org/drawingml/2006/main" xmlns:r="http://schemas.openxmlformats.org/officeDocument/2006/relationships" xmlns:p="http://schemas.openxmlformats.org/presentationml/2006/main">
-  <p:cSld>
-    <p:spTree>
-      <p:nvGrpSpPr>
-        <p:cNvPr id="1" name=""/>
-        <p:cNvGrpSpPr/>
-        <p:nvPr/>
-      </p:nvGrpSpPr>
-      <p:grpSpPr>
-        <a:xfrm>
-          <a:off x="0" y="0"/>
-          <a:ext cx="0" cy="0"/>
-          <a:chOff x="0" y="0"/>
-          <a:chExt cx="0" cy="0"/>
-        </a:xfrm>
-      </p:grpSpPr>
-      <p:sp>
-        <p:nvSpPr>
-          <p:cNvPr id="2" name="Title 1"/>
-          <p:cNvSpPr>
-            <a:spLocks noGrp="1"/>
-          </p:cNvSpPr>
-          <p:nvPr>
-            <p:ph type="title"/>
-          </p:nvPr>
-        </p:nvSpPr>
-        <p:spPr/>
-        <p:txBody>
-          <a:bodyPr/>
-          <a:lstStyle/>
-          <a:p>
-            <a:pPr lvl="0" indent="0" marL="0">
-              <a:buNone/>
-            </a:pPr>
-            <a:r>
-              <a:rPr/>
-              <a:t>Extrapyramidal system</a:t>
-            </a:r>
-          </a:p>
-        </p:txBody>
-      </p:sp>
-      <p:sp>
-        <p:nvSpPr>
-          <p:cNvPr id="3" name="Content Placeholder 2"/>
-          <p:cNvSpPr>
-            <a:spLocks noGrp="1"/>
-          </p:cNvSpPr>
-          <p:nvPr>
-            <p:ph idx="1"/>
-          </p:nvPr>
-        </p:nvSpPr>
-        <p:spPr/>
-        <p:txBody>
-          <a:bodyPr/>
-          <a:lstStyle/>
-          <a:p>
-            <a:pPr lvl="0"/>
-            <a:r>
-              <a:rPr>
-                <a:hlinkClick r:id="rId2"/>
-              </a:rPr>
-              <a:t>Tectospinal tract</a:t>
-            </a:r>
-          </a:p>
-          <a:p>
-            <a:pPr lvl="0"/>
-            <a:r>
-              <a:rPr>
-                <a:hlinkClick r:id="rId3"/>
-              </a:rPr>
-              <a:t>Lateral Vestibulospinal tract</a:t>
-            </a:r>
-          </a:p>
-          <a:p>
-            <a:pPr lvl="0"/>
-            <a:r>
-              <a:rPr>
-                <a:hlinkClick r:id="rId4"/>
-              </a:rPr>
-              <a:t>Reticulospinal tract</a:t>
-            </a:r>
-          </a:p>
-          <a:p>
-            <a:pPr lvl="0"/>
-            <a:r>
-              <a:rPr/>
-              <a:t>Rubrospinal tract</a:t>
-            </a:r>
-          </a:p>
-          <a:p>
-            <a:pPr lvl="0"/>
-            <a:r>
-              <a:rPr>
-                <a:hlinkClick r:id="rId5"/>
-              </a:rPr>
-              <a:t>Involuntary movements</a:t>
-            </a:r>
-          </a:p>
-          <a:p>
-            <a:pPr lvl="1"/>
-            <a:r>
-              <a:rPr/>
-              <a:t>Posture, balance, arousal</a:t>
-            </a:r>
-          </a:p>
-        </p:txBody>
-      </p:sp>
-    </p:spTree>
-  </p:cSld>
-</p:sld>
-</file>
-
-<file path=ppt/slides/slide71.xml><?xml version="1.0" encoding="utf-8"?>
-<p:sld xmlns:a="http://schemas.openxmlformats.org/drawingml/2006/main" xmlns:r="http://schemas.openxmlformats.org/officeDocument/2006/relationships" xmlns:p="http://schemas.openxmlformats.org/presentationml/2006/main">
-  <p:cSld>
-    <p:spTree>
-      <p:nvGrpSpPr>
-        <p:cNvPr id="1" name=""/>
-        <p:cNvGrpSpPr/>
-        <p:nvPr/>
-      </p:nvGrpSpPr>
-      <p:grpSpPr>
-        <a:xfrm>
-          <a:off x="0" y="0"/>
-          <a:ext cx="0" cy="0"/>
-          <a:chOff x="0" y="0"/>
-          <a:chExt cx="0" cy="0"/>
-        </a:xfrm>
-      </p:grpSpPr>
-      <p:sp>
-        <p:nvSpPr>
-          <p:cNvPr id="2" name="Title 1"/>
-          <p:cNvSpPr>
-            <a:spLocks noGrp="1"/>
-          </p:cNvSpPr>
-          <p:nvPr>
-            <p:ph type="title"/>
-          </p:nvPr>
-        </p:nvSpPr>
-        <p:spPr/>
-        <p:txBody>
-          <a:bodyPr/>
-          <a:lstStyle/>
-          <a:p>
-            <a:pPr lvl="0" indent="0" marL="0">
-              <a:buNone/>
-            </a:pPr>
-            <a:r>
-              <a:rPr/>
-              <a:t>Direct cortical control</a:t>
-            </a:r>
-          </a:p>
-        </p:txBody>
-      </p:sp>
-      <p:sp>
-        <p:nvSpPr>
-          <p:cNvPr id="3" name="Content Placeholder 2"/>
-          <p:cNvSpPr>
-            <a:spLocks noGrp="1"/>
-          </p:cNvSpPr>
-          <p:nvPr>
-            <p:ph idx="1"/>
-          </p:nvPr>
-        </p:nvSpPr>
-        <p:spPr/>
-        <p:txBody>
-          <a:bodyPr/>
-          <a:lstStyle/>
-          <a:p>
-            <a:pPr lvl="0"/>
-            <a:r>
-              <a:rPr/>
-              <a:t>Over </a:t>
-            </a:r>
-            <a:r>
-              <a:rPr i="1"/>
-              <a:t>some</a:t>
-            </a:r>
-            <a:r>
-              <a:rPr/>
-              <a:t> motor neurons</a:t>
-            </a:r>
-          </a:p>
-          <a:p>
-            <a:pPr lvl="0"/>
-            <a:r>
-              <a:rPr/>
-              <a:t>In humans; prevalence uncertain in other animals</a:t>
-            </a:r>
-          </a:p>
-          <a:p>
-            <a:pPr lvl="0"/>
-            <a:r>
-              <a:rPr/>
-              <a:t>For individuated (“fractionated”) movements of fingers, toes, lips, but other muscles, too.</a:t>
-            </a:r>
-          </a:p>
-        </p:txBody>
-      </p:sp>
-    </p:spTree>
-  </p:cSld>
-</p:sld>
-</file>
-
-<file path=ppt/slides/slide72.xml><?xml version="1.0" encoding="utf-8"?>
 <p:sld xmlns:a="http://schemas.openxmlformats.org/drawingml/2006/main" xmlns:r="http://schemas.openxmlformats.org/officeDocument/2006/relationships" xmlns:p="http://schemas.openxmlformats.org/presentationml/2006/main">
   <p:cSld>
     <p:spTree>
@@ -12503,7 +13082,7 @@
 </p:sld>
 </file>
 
-<file path=ppt/slides/slide73.xml><?xml version="1.0" encoding="utf-8"?>
+<file path=ppt/slides/slide71.xml><?xml version="1.0" encoding="utf-8"?>
 <p:sld xmlns:a="http://schemas.openxmlformats.org/drawingml/2006/main" xmlns:r="http://schemas.openxmlformats.org/officeDocument/2006/relationships" xmlns:p="http://schemas.openxmlformats.org/presentationml/2006/main">
   <p:cSld>
     <p:spTree>
@@ -12555,7 +13134,7 @@
 </p:sld>
 </file>
 
-<file path=ppt/slides/slide74.xml><?xml version="1.0" encoding="utf-8"?>
+<file path=ppt/slides/slide72.xml><?xml version="1.0" encoding="utf-8"?>
 <p:sld xmlns:a="http://schemas.openxmlformats.org/drawingml/2006/main" xmlns:r="http://schemas.openxmlformats.org/officeDocument/2006/relationships" xmlns:p="http://schemas.openxmlformats.org/presentationml/2006/main">
   <p:cSld>
     <p:spTree>
@@ -12646,7 +13225,7 @@
 </p:sld>
 </file>
 
-<file path=ppt/slides/slide75.xml><?xml version="1.0" encoding="utf-8"?>
+<file path=ppt/slides/slide73.xml><?xml version="1.0" encoding="utf-8"?>
 <p:sld xmlns:a="http://schemas.openxmlformats.org/drawingml/2006/main" xmlns:r="http://schemas.openxmlformats.org/officeDocument/2006/relationships" xmlns:p="http://schemas.openxmlformats.org/presentationml/2006/main">
   <p:cSld>
     <p:spTree>
@@ -12767,7 +13346,7 @@
 </p:sld>
 </file>
 
-<file path=ppt/slides/slide76.xml><?xml version="1.0" encoding="utf-8"?>
+<file path=ppt/slides/slide74.xml><?xml version="1.0" encoding="utf-8"?>
 <p:sld xmlns:a="http://schemas.openxmlformats.org/drawingml/2006/main" xmlns:r="http://schemas.openxmlformats.org/officeDocument/2006/relationships" xmlns:p="http://schemas.openxmlformats.org/presentationml/2006/main">
   <p:cSld>
     <p:spTree>
@@ -12865,7 +13444,7 @@
 </p:sld>
 </file>
 
-<file path=ppt/slides/slide77.xml><?xml version="1.0" encoding="utf-8"?>
+<file path=ppt/slides/slide75.xml><?xml version="1.0" encoding="utf-8"?>
 <p:sld xmlns:a="http://schemas.openxmlformats.org/drawingml/2006/main" xmlns:r="http://schemas.openxmlformats.org/officeDocument/2006/relationships" xmlns:p="http://schemas.openxmlformats.org/presentationml/2006/main">
   <p:cSld>
     <p:spTree>
@@ -12947,7 +13526,7 @@
 </p:sld>
 </file>
 
-<file path=ppt/slides/slide78.xml><?xml version="1.0" encoding="utf-8"?>
+<file path=ppt/slides/slide76.xml><?xml version="1.0" encoding="utf-8"?>
 <p:sld xmlns:a="http://schemas.openxmlformats.org/drawingml/2006/main" xmlns:r="http://schemas.openxmlformats.org/officeDocument/2006/relationships" xmlns:p="http://schemas.openxmlformats.org/presentationml/2006/main">
   <p:cSld>
     <p:spTree>
@@ -13029,7 +13608,7 @@
 </p:sld>
 </file>
 
-<file path=ppt/slides/slide79.xml><?xml version="1.0" encoding="utf-8"?>
+<file path=ppt/slides/slide77.xml><?xml version="1.0" encoding="utf-8"?>
 <p:sld xmlns:a="http://schemas.openxmlformats.org/drawingml/2006/main" xmlns:r="http://schemas.openxmlformats.org/officeDocument/2006/relationships" xmlns:p="http://schemas.openxmlformats.org/presentationml/2006/main">
   <p:cSld>
     <p:spTree>
@@ -13590,85 +14169,7 @@
 </p:sld>
 </file>
 
-<file path=ppt/slides/slide8.xml><?xml version="1.0" encoding="utf-8"?>
-<p:sld xmlns:a="http://schemas.openxmlformats.org/drawingml/2006/main" xmlns:r="http://schemas.openxmlformats.org/officeDocument/2006/relationships" xmlns:p="http://schemas.openxmlformats.org/presentationml/2006/main">
-  <p:cSld>
-    <p:spTree>
-      <p:nvGrpSpPr>
-        <p:cNvPr id="1" name=""/>
-        <p:cNvGrpSpPr/>
-        <p:nvPr/>
-      </p:nvGrpSpPr>
-      <p:grpSpPr>
-        <a:xfrm>
-          <a:off x="0" y="0"/>
-          <a:ext cx="0" cy="0"/>
-          <a:chOff x="0" y="0"/>
-          <a:chExt cx="0" cy="0"/>
-        </a:xfrm>
-      </p:grpSpPr>
-      <p:sp>
-        <p:nvSpPr>
-          <p:cNvPr id="3" name="Content Placeholder 2"/>
-          <p:cNvSpPr>
-            <a:spLocks noGrp="1"/>
-          </p:cNvSpPr>
-          <p:nvPr>
-            <p:ph idx="1"/>
-          </p:nvPr>
-        </p:nvSpPr>
-        <p:spPr/>
-        <p:txBody>
-          <a:bodyPr/>
-          <a:lstStyle/>
-          <a:p>
-            <a:pPr lvl="0" indent="0" marL="0">
-              <a:spcBef>
-                <a:spcPts val="3000"/>
-              </a:spcBef>
-              <a:buNone/>
-            </a:pPr>
-            <a:r>
-              <a:rPr b="1"/>
-              <a:t>The amygadala is found deep within which lobe of the cerebral cortex?</a:t>
-            </a:r>
-          </a:p>
-          <a:p>
-            <a:pPr lvl="0"/>
-            <a:r>
-              <a:rPr strike="sngStrike"/>
-              <a:t>A. The occipital lobe</a:t>
-            </a:r>
-          </a:p>
-          <a:p>
-            <a:pPr lvl="0"/>
-            <a:r>
-              <a:rPr strike="sngStrike"/>
-              <a:t>B. The frontal lobe</a:t>
-            </a:r>
-          </a:p>
-          <a:p>
-            <a:pPr lvl="0"/>
-            <a:r>
-              <a:rPr strike="sngStrike"/>
-              <a:t>C. The insula</a:t>
-            </a:r>
-          </a:p>
-          <a:p>
-            <a:pPr lvl="0"/>
-            <a:r>
-              <a:rPr b="1"/>
-              <a:t>D. The temporal lobe</a:t>
-            </a:r>
-          </a:p>
-        </p:txBody>
-      </p:sp>
-    </p:spTree>
-  </p:cSld>
-</p:sld>
-</file>
-
-<file path=ppt/slides/slide80.xml><?xml version="1.0" encoding="utf-8"?>
+<file path=ppt/slides/slide78.xml><?xml version="1.0" encoding="utf-8"?>
 <p:sld xmlns:a="http://schemas.openxmlformats.org/drawingml/2006/main" xmlns:r="http://schemas.openxmlformats.org/officeDocument/2006/relationships" xmlns:p="http://schemas.openxmlformats.org/presentationml/2006/main">
   <p:cSld>
     <p:spTree>
@@ -13804,7 +14305,7 @@
 </p:sld>
 </file>
 
-<file path=ppt/slides/slide81.xml><?xml version="1.0" encoding="utf-8"?>
+<file path=ppt/slides/slide79.xml><?xml version="1.0" encoding="utf-8"?>
 <p:sld xmlns:a="http://schemas.openxmlformats.org/drawingml/2006/main" xmlns:r="http://schemas.openxmlformats.org/officeDocument/2006/relationships" xmlns:p="http://schemas.openxmlformats.org/presentationml/2006/main">
   <p:cSld>
     <p:spTree>
@@ -13851,7 +14352,85 @@
 </p:sld>
 </file>
 
-<file path=ppt/slides/slide82.xml><?xml version="1.0" encoding="utf-8"?>
+<file path=ppt/slides/slide8.xml><?xml version="1.0" encoding="utf-8"?>
+<p:sld xmlns:a="http://schemas.openxmlformats.org/drawingml/2006/main" xmlns:r="http://schemas.openxmlformats.org/officeDocument/2006/relationships" xmlns:p="http://schemas.openxmlformats.org/presentationml/2006/main">
+  <p:cSld>
+    <p:spTree>
+      <p:nvGrpSpPr>
+        <p:cNvPr id="1" name=""/>
+        <p:cNvGrpSpPr/>
+        <p:nvPr/>
+      </p:nvGrpSpPr>
+      <p:grpSpPr>
+        <a:xfrm>
+          <a:off x="0" y="0"/>
+          <a:ext cx="0" cy="0"/>
+          <a:chOff x="0" y="0"/>
+          <a:chExt cx="0" cy="0"/>
+        </a:xfrm>
+      </p:grpSpPr>
+      <p:sp>
+        <p:nvSpPr>
+          <p:cNvPr id="3" name="Content Placeholder 2"/>
+          <p:cNvSpPr>
+            <a:spLocks noGrp="1"/>
+          </p:cNvSpPr>
+          <p:nvPr>
+            <p:ph idx="1"/>
+          </p:nvPr>
+        </p:nvSpPr>
+        <p:spPr/>
+        <p:txBody>
+          <a:bodyPr/>
+          <a:lstStyle/>
+          <a:p>
+            <a:pPr lvl="0" indent="0" marL="0">
+              <a:spcBef>
+                <a:spcPts val="3000"/>
+              </a:spcBef>
+              <a:buNone/>
+            </a:pPr>
+            <a:r>
+              <a:rPr b="1"/>
+              <a:t>The amygadala is found deep within which lobe of the cerebral cortex?</a:t>
+            </a:r>
+          </a:p>
+          <a:p>
+            <a:pPr lvl="0"/>
+            <a:r>
+              <a:rPr strike="sngStrike"/>
+              <a:t>A. The occipital lobe</a:t>
+            </a:r>
+          </a:p>
+          <a:p>
+            <a:pPr lvl="0"/>
+            <a:r>
+              <a:rPr strike="sngStrike"/>
+              <a:t>B. The frontal lobe</a:t>
+            </a:r>
+          </a:p>
+          <a:p>
+            <a:pPr lvl="0"/>
+            <a:r>
+              <a:rPr strike="sngStrike"/>
+              <a:t>C. The insula</a:t>
+            </a:r>
+          </a:p>
+          <a:p>
+            <a:pPr lvl="0"/>
+            <a:r>
+              <a:rPr b="1"/>
+              <a:t>D. The temporal lobe</a:t>
+            </a:r>
+          </a:p>
+        </p:txBody>
+      </p:sp>
+    </p:spTree>
+  </p:cSld>
+</p:sld>
+</file>
+
+<file path=ppt/slides/slide80.xml><?xml version="1.0" encoding="utf-8"?>
 <p:sld xmlns:a="http://schemas.openxmlformats.org/drawingml/2006/main" xmlns:r="http://schemas.openxmlformats.org/officeDocument/2006/relationships" xmlns:p="http://schemas.openxmlformats.org/presentationml/2006/main">
   <p:cSld>
     <p:spTree>
@@ -13933,7 +14512,7 @@
 </p:sld>
 </file>
 
-<file path=ppt/slides/slide83.xml><?xml version="1.0" encoding="utf-8"?>
+<file path=ppt/slides/slide81.xml><?xml version="1.0" encoding="utf-8"?>
 <p:sld xmlns:a="http://schemas.openxmlformats.org/drawingml/2006/main" xmlns:r="http://schemas.openxmlformats.org/officeDocument/2006/relationships" xmlns:p="http://schemas.openxmlformats.org/presentationml/2006/main">
   <p:cSld>
     <p:spTree>
@@ -14040,7 +14619,7 @@
 </p:sld>
 </file>
 
-<file path=ppt/slides/slide84.xml><?xml version="1.0" encoding="utf-8"?>
+<file path=ppt/slides/slide82.xml><?xml version="1.0" encoding="utf-8"?>
 <p:sld xmlns:a="http://schemas.openxmlformats.org/drawingml/2006/main" xmlns:r="http://schemas.openxmlformats.org/officeDocument/2006/relationships" xmlns:p="http://schemas.openxmlformats.org/presentationml/2006/main">
   <p:cSld>
     <p:spTree>
@@ -14202,7 +14781,7 @@
 </p:sld>
 </file>
 
-<file path=ppt/slides/slide85.xml><?xml version="1.0" encoding="utf-8"?>
+<file path=ppt/slides/slide83.xml><?xml version="1.0" encoding="utf-8"?>
 <p:sld xmlns:a="http://schemas.openxmlformats.org/drawingml/2006/main" xmlns:r="http://schemas.openxmlformats.org/officeDocument/2006/relationships" xmlns:p="http://schemas.openxmlformats.org/presentationml/2006/main">
   <p:cSld>
     <p:spTree>
@@ -14346,7 +14925,7 @@
 </p:sld>
 </file>
 
-<file path=ppt/slides/slide86.xml><?xml version="1.0" encoding="utf-8"?>
+<file path=ppt/slides/slide84.xml><?xml version="1.0" encoding="utf-8"?>
 <p:sld xmlns:a="http://schemas.openxmlformats.org/drawingml/2006/main" xmlns:r="http://schemas.openxmlformats.org/officeDocument/2006/relationships" xmlns:p="http://schemas.openxmlformats.org/presentationml/2006/main">
   <p:cSld>
     <p:spTree>
@@ -14473,7 +15052,7 @@
 </p:sld>
 </file>
 
-<file path=ppt/slides/slide87.xml><?xml version="1.0" encoding="utf-8"?>
+<file path=ppt/slides/slide85.xml><?xml version="1.0" encoding="utf-8"?>
 <p:sld xmlns:a="http://schemas.openxmlformats.org/drawingml/2006/main" xmlns:r="http://schemas.openxmlformats.org/officeDocument/2006/relationships" xmlns:p="http://schemas.openxmlformats.org/presentationml/2006/main">
   <p:cSld>
     <p:spTree>
@@ -14656,7 +15235,7 @@
 </p:sld>
 </file>
 
-<file path=ppt/slides/slide88.xml><?xml version="1.0" encoding="utf-8"?>
+<file path=ppt/slides/slide86.xml><?xml version="1.0" encoding="utf-8"?>
 <p:sld xmlns:a="http://schemas.openxmlformats.org/drawingml/2006/main" xmlns:r="http://schemas.openxmlformats.org/officeDocument/2006/relationships" xmlns:p="http://schemas.openxmlformats.org/presentationml/2006/main">
   <p:cSld>
     <p:spTree>
@@ -14763,7 +15342,7 @@
 </p:sld>
 </file>
 
-<file path=ppt/slides/slide89.xml><?xml version="1.0" encoding="utf-8"?>
+<file path=ppt/slides/slide87.xml><?xml version="1.0" encoding="utf-8"?>
 <p:sld xmlns:a="http://schemas.openxmlformats.org/drawingml/2006/main" xmlns:r="http://schemas.openxmlformats.org/officeDocument/2006/relationships" xmlns:p="http://schemas.openxmlformats.org/presentationml/2006/main">
   <p:cSld>
     <p:spTree>
@@ -14840,89 +15419,7 @@
 </p:sld>
 </file>
 
-<file path=ppt/slides/slide9.xml><?xml version="1.0" encoding="utf-8"?>
-<p:sld xmlns:a="http://schemas.openxmlformats.org/drawingml/2006/main" xmlns:r="http://schemas.openxmlformats.org/officeDocument/2006/relationships" xmlns:p="http://schemas.openxmlformats.org/presentationml/2006/main">
-  <p:cSld>
-    <p:spTree>
-      <p:nvGrpSpPr>
-        <p:cNvPr id="1" name=""/>
-        <p:cNvGrpSpPr/>
-        <p:nvPr/>
-      </p:nvGrpSpPr>
-      <p:grpSpPr>
-        <a:xfrm>
-          <a:off x="0" y="0"/>
-          <a:ext cx="0" cy="0"/>
-          <a:chOff x="0" y="0"/>
-          <a:chExt cx="0" cy="0"/>
-        </a:xfrm>
-      </p:grpSpPr>
-      <p:pic>
-        <p:nvPicPr>
-          <p:cNvPr descr="http://www.frontiersin.org/files/Articles/31697/fpsyg-03-00319-HTML/image_m/fpsyg-03-00319-g002.jpg" id="0" name="Picture 1"/>
-          <p:cNvPicPr>
-            <a:picLocks noGrp="1" noChangeAspect="1"/>
-          </p:cNvPicPr>
-          <p:nvPr/>
-        </p:nvPicPr>
-        <p:blipFill>
-          <a:blip r:embed="rId2"/>
-          <a:stretch>
-            <a:fillRect/>
-          </a:stretch>
-        </p:blipFill>
-        <p:spPr bwMode="auto">
-          <a:xfrm>
-            <a:off x="2514600" y="1193800"/>
-            <a:ext cx="4114800" cy="2882900"/>
-          </a:xfrm>
-          <a:prstGeom prst="rect">
-            <a:avLst/>
-          </a:prstGeom>
-          <a:noFill/>
-          <a:ln w="9525">
-            <a:noFill/>
-            <a:headEnd/>
-            <a:tailEnd/>
-          </a:ln>
-        </p:spPr>
-      </p:pic>
-      <p:sp>
-        <p:nvSpPr>
-          <p:cNvPr id="1" name="TextBox 3"/>
-          <p:cNvSpPr txBox="1"/>
-          <p:nvPr/>
-        </p:nvSpPr>
-        <p:spPr>
-          <a:xfrm>
-            <a:off x="457200" y="4076700"/>
-            <a:ext cx="8229600" cy="508000"/>
-          </a:xfrm>
-          <a:prstGeom prst="rect">
-            <a:avLst/>
-          </a:prstGeom>
-          <a:noFill/>
-        </p:spPr>
-        <p:txBody>
-          <a:bodyPr/>
-          <a:lstStyle/>
-          <a:p>
-            <a:pPr lvl="0" indent="0" marL="0" algn="ctr">
-              <a:buNone/>
-            </a:pPr>
-            <a:r>
-              <a:rPr/>
-              <a:t>Cassidy2012-ue Figure 2</a:t>
-            </a:r>
-          </a:p>
-        </p:txBody>
-      </p:sp>
-    </p:spTree>
-  </p:cSld>
-</p:sld>
-</file>
-
-<file path=ppt/slides/slide90.xml><?xml version="1.0" encoding="utf-8"?>
+<file path=ppt/slides/slide88.xml><?xml version="1.0" encoding="utf-8"?>
 <p:sld xmlns:a="http://schemas.openxmlformats.org/drawingml/2006/main" xmlns:r="http://schemas.openxmlformats.org/officeDocument/2006/relationships" xmlns:p="http://schemas.openxmlformats.org/presentationml/2006/main">
   <p:cSld>
     <p:spTree>
@@ -15238,7 +15735,7 @@
 </p:sld>
 </file>
 
-<file path=ppt/slides/slide91.xml><?xml version="1.0" encoding="utf-8"?>
+<file path=ppt/slides/slide89.xml><?xml version="1.0" encoding="utf-8"?>
 <p:sld xmlns:a="http://schemas.openxmlformats.org/drawingml/2006/main" xmlns:r="http://schemas.openxmlformats.org/officeDocument/2006/relationships" xmlns:p="http://schemas.openxmlformats.org/presentationml/2006/main">
   <p:cSld>
     <p:spTree>
@@ -15315,7 +15812,7 @@
 </p:sld>
 </file>
 
-<file path=ppt/slides/slide92.xml><?xml version="1.0" encoding="utf-8"?>
+<file path=ppt/slides/slide9.xml><?xml version="1.0" encoding="utf-8"?>
 <p:sld xmlns:a="http://schemas.openxmlformats.org/drawingml/2006/main" xmlns:r="http://schemas.openxmlformats.org/officeDocument/2006/relationships" xmlns:p="http://schemas.openxmlformats.org/presentationml/2006/main">
   <p:cSld>
     <p:spTree>
@@ -15332,27 +15829,62 @@
           <a:chExt cx="0" cy="0"/>
         </a:xfrm>
       </p:grpSpPr>
-      <p:sp>
-        <p:nvSpPr>
-          <p:cNvPr id="3" name="Content Placeholder 2"/>
-          <p:cNvSpPr>
-            <a:spLocks noGrp="1"/>
-          </p:cNvSpPr>
-          <p:nvPr>
-            <p:ph idx="1"/>
-          </p:nvPr>
-        </p:nvSpPr>
-        <p:spPr/>
-        <p:txBody>
-          <a:bodyPr/>
-          <a:lstStyle/>
-          <a:p>
-            <a:pPr lvl="0" indent="0" marL="0">
-              <a:buNone/>
-            </a:pPr>
-            <a:r>
-              <a:rPr/>
-              <a:t>Inputs to CN III.</a:t>
+      <p:pic>
+        <p:nvPicPr>
+          <p:cNvPr descr="http://www.frontiersin.org/files/Articles/31697/fpsyg-03-00319-HTML/image_m/fpsyg-03-00319-g002.jpg" id="0" name="Picture 1"/>
+          <p:cNvPicPr>
+            <a:picLocks noGrp="1" noChangeAspect="1"/>
+          </p:cNvPicPr>
+          <p:nvPr/>
+        </p:nvPicPr>
+        <p:blipFill>
+          <a:blip r:embed="rId2"/>
+          <a:stretch>
+            <a:fillRect/>
+          </a:stretch>
+        </p:blipFill>
+        <p:spPr bwMode="auto">
+          <a:xfrm>
+            <a:off x="2514600" y="1193800"/>
+            <a:ext cx="4114800" cy="2882900"/>
+          </a:xfrm>
+          <a:prstGeom prst="rect">
+            <a:avLst/>
+          </a:prstGeom>
+          <a:noFill/>
+          <a:ln w="9525">
+            <a:noFill/>
+            <a:headEnd/>
+            <a:tailEnd/>
+          </a:ln>
+        </p:spPr>
+      </p:pic>
+      <p:sp>
+        <p:nvSpPr>
+          <p:cNvPr id="1" name="TextBox 3"/>
+          <p:cNvSpPr txBox="1"/>
+          <p:nvPr/>
+        </p:nvSpPr>
+        <p:spPr>
+          <a:xfrm>
+            <a:off x="457200" y="4076700"/>
+            <a:ext cx="8229600" cy="508000"/>
+          </a:xfrm>
+          <a:prstGeom prst="rect">
+            <a:avLst/>
+          </a:prstGeom>
+          <a:noFill/>
+        </p:spPr>
+        <p:txBody>
+          <a:bodyPr/>
+          <a:lstStyle/>
+          <a:p>
+            <a:pPr lvl="0" indent="0" marL="0" algn="ctr">
+              <a:buNone/>
+            </a:pPr>
+            <a:r>
+              <a:rPr/>
+              <a:t>Cassidy2012-ue Figure 2</a:t>
             </a:r>
           </a:p>
         </p:txBody>
@@ -15362,7 +15894,54 @@
 </p:sld>
 </file>
 
-<file path=ppt/slides/slide93.xml><?xml version="1.0" encoding="utf-8"?>
+<file path=ppt/slides/slide90.xml><?xml version="1.0" encoding="utf-8"?>
+<p:sld xmlns:a="http://schemas.openxmlformats.org/drawingml/2006/main" xmlns:r="http://schemas.openxmlformats.org/officeDocument/2006/relationships" xmlns:p="http://schemas.openxmlformats.org/presentationml/2006/main">
+  <p:cSld>
+    <p:spTree>
+      <p:nvGrpSpPr>
+        <p:cNvPr id="1" name=""/>
+        <p:cNvGrpSpPr/>
+        <p:nvPr/>
+      </p:nvGrpSpPr>
+      <p:grpSpPr>
+        <a:xfrm>
+          <a:off x="0" y="0"/>
+          <a:ext cx="0" cy="0"/>
+          <a:chOff x="0" y="0"/>
+          <a:chExt cx="0" cy="0"/>
+        </a:xfrm>
+      </p:grpSpPr>
+      <p:sp>
+        <p:nvSpPr>
+          <p:cNvPr id="3" name="Content Placeholder 2"/>
+          <p:cNvSpPr>
+            <a:spLocks noGrp="1"/>
+          </p:cNvSpPr>
+          <p:nvPr>
+            <p:ph idx="1"/>
+          </p:nvPr>
+        </p:nvSpPr>
+        <p:spPr/>
+        <p:txBody>
+          <a:bodyPr/>
+          <a:lstStyle/>
+          <a:p>
+            <a:pPr lvl="0" indent="0" marL="0">
+              <a:buNone/>
+            </a:pPr>
+            <a:r>
+              <a:rPr/>
+              <a:t>Inputs to CN III.</a:t>
+            </a:r>
+          </a:p>
+        </p:txBody>
+      </p:sp>
+    </p:spTree>
+  </p:cSld>
+</p:sld>
+</file>
+
+<file path=ppt/slides/slide91.xml><?xml version="1.0" encoding="utf-8"?>
 <p:sld xmlns:a="http://schemas.openxmlformats.org/drawingml/2006/main" xmlns:r="http://schemas.openxmlformats.org/officeDocument/2006/relationships" xmlns:p="http://schemas.openxmlformats.org/presentationml/2006/main">
   <p:cSld>
     <p:spTree>
@@ -15714,7 +16293,7 @@
 </p:sld>
 </file>
 
-<file path=ppt/slides/slide94.xml><?xml version="1.0" encoding="utf-8"?>
+<file path=ppt/slides/slide92.xml><?xml version="1.0" encoding="utf-8"?>
 <p:sld xmlns:a="http://schemas.openxmlformats.org/drawingml/2006/main" xmlns:r="http://schemas.openxmlformats.org/officeDocument/2006/relationships" xmlns:p="http://schemas.openxmlformats.org/presentationml/2006/main">
   <p:cSld>
     <p:spTree>
@@ -16178,6 +16757,255 @@
 </p:sld>
 </file>
 
+<file path=ppt/slides/slide93.xml><?xml version="1.0" encoding="utf-8"?>
+<p:sld xmlns:a="http://schemas.openxmlformats.org/drawingml/2006/main" xmlns:r="http://schemas.openxmlformats.org/officeDocument/2006/relationships" xmlns:p="http://schemas.openxmlformats.org/presentationml/2006/main">
+  <p:cSld>
+    <p:spTree>
+      <p:nvGrpSpPr>
+        <p:cNvPr id="1" name=""/>
+        <p:cNvGrpSpPr/>
+        <p:nvPr/>
+      </p:nvGrpSpPr>
+      <p:grpSpPr>
+        <a:xfrm>
+          <a:off x="0" y="0"/>
+          <a:ext cx="0" cy="0"/>
+          <a:chOff x="0" y="0"/>
+          <a:chExt cx="0" cy="0"/>
+        </a:xfrm>
+      </p:grpSpPr>
+      <p:sp>
+        <p:nvSpPr>
+          <p:cNvPr id="2" name="Title 1"/>
+          <p:cNvSpPr>
+            <a:spLocks noGrp="1"/>
+          </p:cNvSpPr>
+          <p:nvPr>
+            <p:ph type="title"/>
+          </p:nvPr>
+        </p:nvSpPr>
+        <p:spPr/>
+        <p:txBody>
+          <a:bodyPr/>
+          <a:lstStyle/>
+          <a:p>
+            <a:pPr lvl="0" indent="0" marL="0">
+              <a:buNone/>
+            </a:pPr>
+            <a:r>
+              <a:rPr/>
+              <a:t>Locomotion: Goals</a:t>
+            </a:r>
+          </a:p>
+        </p:txBody>
+      </p:sp>
+      <p:sp>
+        <p:nvSpPr>
+          <p:cNvPr id="3" name="Content Placeholder 2"/>
+          <p:cNvSpPr>
+            <a:spLocks noGrp="1"/>
+          </p:cNvSpPr>
+          <p:nvPr>
+            <p:ph idx="1" sz="half"/>
+          </p:nvPr>
+        </p:nvSpPr>
+        <p:spPr/>
+        <p:txBody>
+          <a:bodyPr/>
+          <a:lstStyle/>
+          <a:p>
+            <a:pPr lvl="0"/>
+            <a:r>
+              <a:rPr/>
+              <a:t>Keep balance</a:t>
+            </a:r>
+          </a:p>
+          <a:p>
+            <a:pPr lvl="0"/>
+            <a:r>
+              <a:rPr/>
+              <a:t>Control speed</a:t>
+            </a:r>
+          </a:p>
+          <a:p>
+            <a:pPr lvl="0"/>
+            <a:r>
+              <a:rPr/>
+              <a:t>Steer</a:t>
+            </a:r>
+          </a:p>
+          <a:p>
+            <a:pPr lvl="1"/>
+            <a:r>
+              <a:rPr/>
+              <a:t>Toward</a:t>
+            </a:r>
+          </a:p>
+          <a:p>
+            <a:pPr lvl="1"/>
+            <a:r>
+              <a:rPr/>
+              <a:t>Away</a:t>
+            </a:r>
+          </a:p>
+        </p:txBody>
+      </p:sp>
+      <p:sp>
+        <p:nvSpPr>
+          <p:cNvPr id="4" name="Content Placeholder 3"/>
+          <p:cNvSpPr>
+            <a:spLocks noGrp="1"/>
+          </p:cNvSpPr>
+          <p:nvPr>
+            <p:ph idx="2" sz="half"/>
+          </p:nvPr>
+        </p:nvSpPr>
+        <p:spPr/>
+        <p:txBody>
+          <a:bodyPr/>
+          <a:lstStyle/>
+          <a:p>
+            <a:pPr lvl="0" indent="0" marL="0">
+              <a:buNone/>
+            </a:pPr>
+            <a:r>
+              <a:rPr>
+                <a:hlinkClick r:id="rId2"/>
+              </a:rPr>
+              <a:t>https://www.youtube.com/shorts/pxWIauT1WaM</a:t>
+            </a:r>
+          </a:p>
+        </p:txBody>
+      </p:sp>
+    </p:spTree>
+  </p:cSld>
+</p:sld>
+</file>
+
+<file path=ppt/slides/slide94.xml><?xml version="1.0" encoding="utf-8"?>
+<p:sld xmlns:a="http://schemas.openxmlformats.org/drawingml/2006/main" xmlns:r="http://schemas.openxmlformats.org/officeDocument/2006/relationships" xmlns:p="http://schemas.openxmlformats.org/presentationml/2006/main">
+  <p:cSld>
+    <p:spTree>
+      <p:nvGrpSpPr>
+        <p:cNvPr id="1" name=""/>
+        <p:cNvGrpSpPr/>
+        <p:nvPr/>
+      </p:nvGrpSpPr>
+      <p:grpSpPr>
+        <a:xfrm>
+          <a:off x="0" y="0"/>
+          <a:ext cx="0" cy="0"/>
+          <a:chOff x="0" y="0"/>
+          <a:chExt cx="0" cy="0"/>
+        </a:xfrm>
+      </p:grpSpPr>
+      <p:sp>
+        <p:nvSpPr>
+          <p:cNvPr id="2" name="Title 1"/>
+          <p:cNvSpPr>
+            <a:spLocks noGrp="1"/>
+          </p:cNvSpPr>
+          <p:nvPr>
+            <p:ph type="title"/>
+          </p:nvPr>
+        </p:nvSpPr>
+        <p:spPr/>
+        <p:txBody>
+          <a:bodyPr/>
+          <a:lstStyle/>
+          <a:p>
+            <a:pPr lvl="0" indent="0" marL="0">
+              <a:buNone/>
+            </a:pPr>
+            <a:r>
+              <a:rPr/>
+              <a:t>Physics of balance</a:t>
+            </a:r>
+          </a:p>
+        </p:txBody>
+      </p:sp>
+      <p:sp>
+        <p:nvSpPr>
+          <p:cNvPr id="3" name="Content Placeholder 2"/>
+          <p:cNvSpPr>
+            <a:spLocks noGrp="1"/>
+          </p:cNvSpPr>
+          <p:nvPr>
+            <p:ph idx="1" sz="half"/>
+          </p:nvPr>
+        </p:nvSpPr>
+        <p:spPr/>
+        <p:txBody>
+          <a:bodyPr/>
+          <a:lstStyle/>
+          <a:p>
+            <a:pPr lvl="0"/>
+            <a:r>
+              <a:rPr/>
+              <a:t>Body ~ inverted pendulum</a:t>
+            </a:r>
+          </a:p>
+          <a:p>
+            <a:pPr lvl="1"/>
+            <a:r>
+              <a:rPr/>
+              <a:t>Inherently unstable</a:t>
+            </a:r>
+          </a:p>
+          <a:p>
+            <a:pPr lvl="1"/>
+            <a:r>
+              <a:rPr/>
+              <a:t>Requires </a:t>
+            </a:r>
+            <a:r>
+              <a:rPr i="1"/>
+              <a:t>control</a:t>
+            </a:r>
+          </a:p>
+        </p:txBody>
+      </p:sp>
+      <p:sp>
+        <p:nvSpPr>
+          <p:cNvPr id="4" name="Content Placeholder 3"/>
+          <p:cNvSpPr>
+            <a:spLocks noGrp="1"/>
+          </p:cNvSpPr>
+          <p:nvPr>
+            <p:ph idx="2" sz="half"/>
+          </p:nvPr>
+        </p:nvSpPr>
+        <p:spPr/>
+        <p:txBody>
+          <a:bodyPr/>
+          <a:lstStyle/>
+          <a:p>
+            <a:pPr lvl="0" indent="0" marL="0">
+              <a:buNone/>
+            </a:pPr>
+            <a:r>
+              <a:rPr>
+                <a:hlinkClick r:id="rId2"/>
+              </a:rPr>
+              <a:t>https://www.youtube.com/watch?v=Rh7JuL3PRSY</a:t>
+            </a:r>
+          </a:p>
+          <a:p>
+            <a:pPr lvl="0" indent="0" marL="0">
+              <a:buNone/>
+            </a:pPr>
+            <a:r>
+              <a:rPr/>
+              <a:t>– Lab. (2022)</a:t>
+            </a:r>
+          </a:p>
+        </p:txBody>
+      </p:sp>
+    </p:spTree>
+  </p:cSld>
+</p:sld>
+</file>
+
 <file path=ppt/slides/slide95.xml><?xml version="1.0" encoding="utf-8"?>
 <p:sld xmlns:a="http://schemas.openxmlformats.org/drawingml/2006/main" xmlns:r="http://schemas.openxmlformats.org/officeDocument/2006/relationships" xmlns:p="http://schemas.openxmlformats.org/presentationml/2006/main">
   <p:cSld>
@@ -16197,12 +17025,12 @@
       </p:grpSpPr>
       <p:sp>
         <p:nvSpPr>
-          <p:cNvPr id="2" name="Title 1"/>
-          <p:cNvSpPr>
-            <a:spLocks noGrp="1"/>
-          </p:cNvSpPr>
-          <p:nvPr>
-            <p:ph type="title"/>
+          <p:cNvPr id="3" name="Content Placeholder 2"/>
+          <p:cNvSpPr>
+            <a:spLocks noGrp="1"/>
+          </p:cNvSpPr>
+          <p:nvPr>
+            <p:ph idx="1"/>
           </p:nvPr>
         </p:nvSpPr>
         <p:spPr/>
@@ -16210,81 +17038,12 @@
           <a:bodyPr/>
           <a:lstStyle/>
           <a:p>
-            <a:pPr lvl="0" indent="0" marL="0">
-              <a:buNone/>
-            </a:pPr>
-            <a:r>
-              <a:rPr/>
-              <a:t>Locomotion: Goals</a:t>
-            </a:r>
-          </a:p>
-        </p:txBody>
-      </p:sp>
-      <p:sp>
-        <p:nvSpPr>
-          <p:cNvPr id="3" name="Content Placeholder 2"/>
-          <p:cNvSpPr>
-            <a:spLocks noGrp="1"/>
-          </p:cNvSpPr>
-          <p:nvPr>
-            <p:ph idx="1" sz="half"/>
-          </p:nvPr>
-        </p:nvSpPr>
-        <p:spPr/>
-        <p:txBody>
-          <a:bodyPr/>
-          <a:lstStyle/>
-          <a:p>
             <a:pPr lvl="0"/>
             <a:r>
               <a:rPr/>
-              <a:t>Keep balance</a:t>
-            </a:r>
-          </a:p>
-          <a:p>
-            <a:pPr lvl="0"/>
-            <a:r>
-              <a:rPr/>
-              <a:t>Control speed</a:t>
-            </a:r>
-          </a:p>
-          <a:p>
-            <a:pPr lvl="0"/>
-            <a:r>
-              <a:rPr/>
-              <a:t>Steer</a:t>
-            </a:r>
-          </a:p>
-          <a:p>
-            <a:pPr lvl="1"/>
-            <a:r>
-              <a:rPr/>
-              <a:t>Toward</a:t>
-            </a:r>
-          </a:p>
-          <a:p>
-            <a:pPr lvl="1"/>
-            <a:r>
-              <a:rPr/>
-              <a:t>Away</a:t>
-            </a:r>
-          </a:p>
-        </p:txBody>
-      </p:sp>
-      <p:sp>
-        <p:nvSpPr>
-          <p:cNvPr id="4" name="Content Placeholder 3"/>
-          <p:cNvSpPr>
-            <a:spLocks noGrp="1"/>
-          </p:cNvSpPr>
-          <p:nvPr>
-            <p:ph idx="2" sz="half"/>
-          </p:nvPr>
-        </p:nvSpPr>
-        <p:spPr/>
-        <p:txBody>
-          <a:bodyPr/>
-          <a:lstStyle/>
+              <a:t>Keep Center of Mass (COM) within base of support</a:t>
+            </a:r>
+          </a:p>
           <a:p>
             <a:pPr lvl="0" indent="0" marL="0">
               <a:buNone/>
@@ -16293,7 +17052,16 @@
               <a:rPr>
                 <a:hlinkClick r:id="rId2"/>
               </a:rPr>
-              <a:t>https://www.youtube.com/shorts/pxWIauT1WaM</a:t>
+              <a:t>https://www.youtube.com/watch?v=5s1gEi5wfLg&amp;t=11s</a:t>
+            </a:r>
+          </a:p>
+          <a:p>
+            <a:pPr lvl="0" indent="0" marL="0">
+              <a:buNone/>
+            </a:pPr>
+            <a:r>
+              <a:rPr/>
+              <a:t>– Motion (2024)</a:t>
             </a:r>
           </a:p>
         </p:txBody>
@@ -16304,195 +17072,6 @@
 </file>
 
 <file path=ppt/slides/slide96.xml><?xml version="1.0" encoding="utf-8"?>
-<p:sld xmlns:a="http://schemas.openxmlformats.org/drawingml/2006/main" xmlns:r="http://schemas.openxmlformats.org/officeDocument/2006/relationships" xmlns:p="http://schemas.openxmlformats.org/presentationml/2006/main">
-  <p:cSld>
-    <p:spTree>
-      <p:nvGrpSpPr>
-        <p:cNvPr id="1" name=""/>
-        <p:cNvGrpSpPr/>
-        <p:nvPr/>
-      </p:nvGrpSpPr>
-      <p:grpSpPr>
-        <a:xfrm>
-          <a:off x="0" y="0"/>
-          <a:ext cx="0" cy="0"/>
-          <a:chOff x="0" y="0"/>
-          <a:chExt cx="0" cy="0"/>
-        </a:xfrm>
-      </p:grpSpPr>
-      <p:sp>
-        <p:nvSpPr>
-          <p:cNvPr id="2" name="Title 1"/>
-          <p:cNvSpPr>
-            <a:spLocks noGrp="1"/>
-          </p:cNvSpPr>
-          <p:nvPr>
-            <p:ph type="title"/>
-          </p:nvPr>
-        </p:nvSpPr>
-        <p:spPr/>
-        <p:txBody>
-          <a:bodyPr/>
-          <a:lstStyle/>
-          <a:p>
-            <a:pPr lvl="0" indent="0" marL="0">
-              <a:buNone/>
-            </a:pPr>
-            <a:r>
-              <a:rPr/>
-              <a:t>Physics of balance</a:t>
-            </a:r>
-          </a:p>
-        </p:txBody>
-      </p:sp>
-      <p:sp>
-        <p:nvSpPr>
-          <p:cNvPr id="3" name="Content Placeholder 2"/>
-          <p:cNvSpPr>
-            <a:spLocks noGrp="1"/>
-          </p:cNvSpPr>
-          <p:nvPr>
-            <p:ph idx="1" sz="half"/>
-          </p:nvPr>
-        </p:nvSpPr>
-        <p:spPr/>
-        <p:txBody>
-          <a:bodyPr/>
-          <a:lstStyle/>
-          <a:p>
-            <a:pPr lvl="0"/>
-            <a:r>
-              <a:rPr/>
-              <a:t>Body ~ inverted pendulum</a:t>
-            </a:r>
-          </a:p>
-          <a:p>
-            <a:pPr lvl="1"/>
-            <a:r>
-              <a:rPr/>
-              <a:t>Inherently unstable</a:t>
-            </a:r>
-          </a:p>
-          <a:p>
-            <a:pPr lvl="1"/>
-            <a:r>
-              <a:rPr/>
-              <a:t>Requires </a:t>
-            </a:r>
-            <a:r>
-              <a:rPr i="1"/>
-              <a:t>control</a:t>
-            </a:r>
-          </a:p>
-        </p:txBody>
-      </p:sp>
-      <p:sp>
-        <p:nvSpPr>
-          <p:cNvPr id="4" name="Content Placeholder 3"/>
-          <p:cNvSpPr>
-            <a:spLocks noGrp="1"/>
-          </p:cNvSpPr>
-          <p:nvPr>
-            <p:ph idx="2" sz="half"/>
-          </p:nvPr>
-        </p:nvSpPr>
-        <p:spPr/>
-        <p:txBody>
-          <a:bodyPr/>
-          <a:lstStyle/>
-          <a:p>
-            <a:pPr lvl="0" indent="0" marL="0">
-              <a:buNone/>
-            </a:pPr>
-            <a:r>
-              <a:rPr>
-                <a:hlinkClick r:id="rId2"/>
-              </a:rPr>
-              <a:t>https://www.youtube.com/watch?v=Rh7JuL3PRSY</a:t>
-            </a:r>
-          </a:p>
-          <a:p>
-            <a:pPr lvl="0" indent="0" marL="0">
-              <a:buNone/>
-            </a:pPr>
-            <a:r>
-              <a:rPr/>
-              <a:t>– Lab. (2022)</a:t>
-            </a:r>
-          </a:p>
-        </p:txBody>
-      </p:sp>
-    </p:spTree>
-  </p:cSld>
-</p:sld>
-</file>
-
-<file path=ppt/slides/slide97.xml><?xml version="1.0" encoding="utf-8"?>
-<p:sld xmlns:a="http://schemas.openxmlformats.org/drawingml/2006/main" xmlns:r="http://schemas.openxmlformats.org/officeDocument/2006/relationships" xmlns:p="http://schemas.openxmlformats.org/presentationml/2006/main">
-  <p:cSld>
-    <p:spTree>
-      <p:nvGrpSpPr>
-        <p:cNvPr id="1" name=""/>
-        <p:cNvGrpSpPr/>
-        <p:nvPr/>
-      </p:nvGrpSpPr>
-      <p:grpSpPr>
-        <a:xfrm>
-          <a:off x="0" y="0"/>
-          <a:ext cx="0" cy="0"/>
-          <a:chOff x="0" y="0"/>
-          <a:chExt cx="0" cy="0"/>
-        </a:xfrm>
-      </p:grpSpPr>
-      <p:sp>
-        <p:nvSpPr>
-          <p:cNvPr id="3" name="Content Placeholder 2"/>
-          <p:cNvSpPr>
-            <a:spLocks noGrp="1"/>
-          </p:cNvSpPr>
-          <p:nvPr>
-            <p:ph idx="1"/>
-          </p:nvPr>
-        </p:nvSpPr>
-        <p:spPr/>
-        <p:txBody>
-          <a:bodyPr/>
-          <a:lstStyle/>
-          <a:p>
-            <a:pPr lvl="0"/>
-            <a:r>
-              <a:rPr/>
-              <a:t>Keep Center of Mass (COM) within base of support</a:t>
-            </a:r>
-          </a:p>
-          <a:p>
-            <a:pPr lvl="0" indent="0" marL="0">
-              <a:buNone/>
-            </a:pPr>
-            <a:r>
-              <a:rPr>
-                <a:hlinkClick r:id="rId2"/>
-              </a:rPr>
-              <a:t>https://www.youtube.com/watch?v=5s1gEi5wfLg&amp;t=11s</a:t>
-            </a:r>
-          </a:p>
-          <a:p>
-            <a:pPr lvl="0" indent="0" marL="0">
-              <a:buNone/>
-            </a:pPr>
-            <a:r>
-              <a:rPr/>
-              <a:t>– Motion (2024)</a:t>
-            </a:r>
-          </a:p>
-        </p:txBody>
-      </p:sp>
-    </p:spTree>
-  </p:cSld>
-</p:sld>
-</file>
-
-<file path=ppt/slides/slide98.xml><?xml version="1.0" encoding="utf-8"?>
 <p:sld xmlns:a="http://schemas.openxmlformats.org/drawingml/2006/main" xmlns:r="http://schemas.openxmlformats.org/officeDocument/2006/relationships" xmlns:p="http://schemas.openxmlformats.org/presentationml/2006/main">
   <p:cSld>
     <p:spTree>
@@ -16650,6 +17229,194 @@
 </p:sld>
 </file>
 
+<file path=ppt/slides/slide97.xml><?xml version="1.0" encoding="utf-8"?>
+<p:sld xmlns:a="http://schemas.openxmlformats.org/drawingml/2006/main" xmlns:r="http://schemas.openxmlformats.org/officeDocument/2006/relationships" xmlns:p="http://schemas.openxmlformats.org/presentationml/2006/main">
+  <p:cSld>
+    <p:spTree>
+      <p:nvGrpSpPr>
+        <p:cNvPr id="1" name=""/>
+        <p:cNvGrpSpPr/>
+        <p:nvPr/>
+      </p:nvGrpSpPr>
+      <p:grpSpPr>
+        <a:xfrm>
+          <a:off x="0" y="0"/>
+          <a:ext cx="0" cy="0"/>
+          <a:chOff x="0" y="0"/>
+          <a:chExt cx="0" cy="0"/>
+        </a:xfrm>
+      </p:grpSpPr>
+      <p:sp>
+        <p:nvSpPr>
+          <p:cNvPr id="2" name="Title 1"/>
+          <p:cNvSpPr>
+            <a:spLocks noGrp="1"/>
+          </p:cNvSpPr>
+          <p:nvPr>
+            <p:ph type="title"/>
+          </p:nvPr>
+        </p:nvSpPr>
+        <p:spPr/>
+        <p:txBody>
+          <a:bodyPr/>
+          <a:lstStyle/>
+          <a:p>
+            <a:pPr lvl="0" indent="0" marL="0">
+              <a:buNone/>
+            </a:pPr>
+            <a:r>
+              <a:rPr/>
+              <a:t>Locomotion: Neural signalling</a:t>
+            </a:r>
+          </a:p>
+        </p:txBody>
+      </p:sp>
+      <p:sp>
+        <p:nvSpPr>
+          <p:cNvPr id="3" name="Content Placeholder 2"/>
+          <p:cNvSpPr>
+            <a:spLocks noGrp="1"/>
+          </p:cNvSpPr>
+          <p:nvPr>
+            <p:ph idx="1"/>
+          </p:nvPr>
+        </p:nvSpPr>
+        <p:spPr/>
+        <p:txBody>
+          <a:bodyPr/>
+          <a:lstStyle/>
+          <a:p>
+            <a:pPr lvl="0"/>
+            <a:r>
+              <a:rPr/>
+              <a:t>Central pattern generators (CPG) in spinal cord?</a:t>
+            </a:r>
+          </a:p>
+          <a:p>
+            <a:pPr lvl="0" indent="0" marL="0">
+              <a:buNone/>
+            </a:pPr>
+            <a:r>
+              <a:rPr>
+                <a:hlinkClick r:id="rId2"/>
+              </a:rPr>
+              <a:t>https://www.youtube.com/shorts/pxWIauT1WaM</a:t>
+            </a:r>
+          </a:p>
+        </p:txBody>
+      </p:sp>
+    </p:spTree>
+  </p:cSld>
+</p:sld>
+</file>
+
+<file path=ppt/slides/slide98.xml><?xml version="1.0" encoding="utf-8"?>
+<p:sld xmlns:a="http://schemas.openxmlformats.org/drawingml/2006/main" xmlns:r="http://schemas.openxmlformats.org/officeDocument/2006/relationships" xmlns:p="http://schemas.openxmlformats.org/presentationml/2006/main">
+  <p:cSld>
+    <p:spTree>
+      <p:nvGrpSpPr>
+        <p:cNvPr id="1" name=""/>
+        <p:cNvGrpSpPr/>
+        <p:nvPr/>
+      </p:nvGrpSpPr>
+      <p:grpSpPr>
+        <a:xfrm>
+          <a:off x="0" y="0"/>
+          <a:ext cx="0" cy="0"/>
+          <a:chOff x="0" y="0"/>
+          <a:chExt cx="0" cy="0"/>
+        </a:xfrm>
+      </p:grpSpPr>
+      <p:sp>
+        <p:nvSpPr>
+          <p:cNvPr id="2" name="Title 1"/>
+          <p:cNvSpPr>
+            <a:spLocks noGrp="1"/>
+          </p:cNvSpPr>
+          <p:nvPr>
+            <p:ph type="title"/>
+          </p:nvPr>
+        </p:nvSpPr>
+        <p:spPr/>
+        <p:txBody>
+          <a:bodyPr/>
+          <a:lstStyle/>
+          <a:p>
+            <a:pPr lvl="0" indent="0" marL="0">
+              <a:buNone/>
+            </a:pPr>
+            <a:r>
+              <a:rPr/>
+              <a:t>Or “rotational” patterns…</a:t>
+            </a:r>
+          </a:p>
+        </p:txBody>
+      </p:sp>
+      <p:pic>
+        <p:nvPicPr>
+          <p:cNvPr descr="https://media.nature.com/lw767/magazine-assets/d41586-022-02238-1/d41586-022-02238-1_23580834.png?as=webp" id="0" name="Picture 1"/>
+          <p:cNvPicPr>
+            <a:picLocks noGrp="1" noChangeAspect="1"/>
+          </p:cNvPicPr>
+          <p:nvPr/>
+        </p:nvPicPr>
+        <p:blipFill>
+          <a:blip r:embed="rId2"/>
+          <a:stretch>
+            <a:fillRect/>
+          </a:stretch>
+        </p:blipFill>
+        <p:spPr bwMode="auto">
+          <a:xfrm>
+            <a:off x="2819400" y="1193800"/>
+            <a:ext cx="3505200" cy="2882900"/>
+          </a:xfrm>
+          <a:prstGeom prst="rect">
+            <a:avLst/>
+          </a:prstGeom>
+          <a:noFill/>
+          <a:ln w="9525">
+            <a:noFill/>
+            <a:headEnd/>
+            <a:tailEnd/>
+          </a:ln>
+        </p:spPr>
+      </p:pic>
+      <p:sp>
+        <p:nvSpPr>
+          <p:cNvPr id="1" name="TextBox 3"/>
+          <p:cNvSpPr txBox="1"/>
+          <p:nvPr/>
+        </p:nvSpPr>
+        <p:spPr>
+          <a:xfrm>
+            <a:off x="457200" y="4076700"/>
+            <a:ext cx="8229600" cy="508000"/>
+          </a:xfrm>
+          <a:prstGeom prst="rect">
+            <a:avLst/>
+          </a:prstGeom>
+          <a:noFill/>
+        </p:spPr>
+        <p:txBody>
+          <a:bodyPr/>
+          <a:lstStyle/>
+          <a:p>
+            <a:pPr lvl="0" indent="0" marL="0" algn="ctr">
+              <a:buNone/>
+            </a:pPr>
+            <a:r>
+              <a:rPr/>
+              <a:t>Bagnall (2022)</a:t>
+            </a:r>
+          </a:p>
+        </p:txBody>
+      </p:sp>
+    </p:spTree>
+  </p:cSld>
+</p:sld>
+</file>
+
 <file path=ppt/slides/slide99.xml><?xml version="1.0" encoding="utf-8"?>
 <p:sld xmlns:a="http://schemas.openxmlformats.org/drawingml/2006/main" xmlns:r="http://schemas.openxmlformats.org/officeDocument/2006/relationships" xmlns:p="http://schemas.openxmlformats.org/presentationml/2006/main">
   <p:cSld>
@@ -16687,7 +17454,7 @@
             </a:pPr>
             <a:r>
               <a:rPr/>
-              <a:t>Locomotion: Neural signalling</a:t>
+              <a:t>Reaching: Goals</a:t>
             </a:r>
           </a:p>
         </p:txBody>
@@ -16699,7 +17466,7 @@
             <a:spLocks noGrp="1"/>
           </p:cNvSpPr>
           <p:nvPr>
-            <p:ph idx="1"/>
+            <p:ph idx="1" sz="half"/>
           </p:nvPr>
         </p:nvSpPr>
         <p:spPr/>
@@ -16710,18 +17477,39 @@
             <a:pPr lvl="0"/>
             <a:r>
               <a:rPr/>
-              <a:t>Central pattern generators (CPG) in spinal cord?</a:t>
-            </a:r>
-          </a:p>
+              <a:t>Move hand (foot/mouth) to contact target</a:t>
+            </a:r>
+          </a:p>
+          <a:p>
+            <a:pPr lvl="0"/>
+            <a:r>
+              <a:rPr/>
+              <a:t>Avoid obstacles</a:t>
+            </a:r>
+          </a:p>
+        </p:txBody>
+      </p:sp>
+      <p:sp>
+        <p:nvSpPr>
+          <p:cNvPr id="4" name="Content Placeholder 3"/>
+          <p:cNvSpPr>
+            <a:spLocks noGrp="1"/>
+          </p:cNvSpPr>
+          <p:nvPr>
+            <p:ph idx="2" sz="half"/>
+          </p:nvPr>
+        </p:nvSpPr>
+        <p:spPr/>
+        <p:txBody>
+          <a:bodyPr/>
+          <a:lstStyle/>
           <a:p>
             <a:pPr lvl="0" indent="0" marL="0">
               <a:buNone/>
             </a:pPr>
             <a:r>
-              <a:rPr>
-                <a:hlinkClick r:id="rId2"/>
-              </a:rPr>
-              <a:t>https://www.youtube.com/shorts/pxWIauT1WaM</a:t>
+              <a:rPr/>
+              <a:t>Content</a:t>
             </a:r>
           </a:p>
         </p:txBody>
